--- a/docs/presentations/Vexi-Hakari-6min-EN.pptx
+++ b/docs/presentations/Vexi-Hakari-6min-EN.pptx
@@ -2,32 +2,32 @@
 <file path=ppt/presentation.xml><?xml version="1.0" encoding="utf-8"?>
 <p:presentation xmlns:p="http://schemas.openxmlformats.org/presentationml/2006/main">
   <p:sldMasterIdLst>
-    <p:sldMasterId xmlns:r="http://schemas.openxmlformats.org/officeDocument/2006/relationships" id="2147483648" r:id="R828aa86728a9492d"/>
+    <p:sldMasterId xmlns:r="http://schemas.openxmlformats.org/officeDocument/2006/relationships" id="2147483648" r:id="Rd418a43562aa4e02"/>
   </p:sldMasterIdLst>
   <p:notesMasterIdLst>
-    <p:notesMasterId xmlns:r="http://schemas.openxmlformats.org/officeDocument/2006/relationships" r:id="R7d9cdbeb89f14250"/>
+    <p:notesMasterId xmlns:r="http://schemas.openxmlformats.org/officeDocument/2006/relationships" r:id="R2fb562a922074c6f"/>
   </p:notesMasterIdLst>
   <p:sldIdLst>
-    <p:sldId xmlns:r="http://schemas.openxmlformats.org/officeDocument/2006/relationships" id="256" r:id="R0e967f6eb79c4857"/>
-    <p:sldId xmlns:r="http://schemas.openxmlformats.org/officeDocument/2006/relationships" id="257" r:id="R0a40a1ac30d749b1"/>
-    <p:sldId xmlns:r="http://schemas.openxmlformats.org/officeDocument/2006/relationships" id="258" r:id="R4822f46b9993479f"/>
-    <p:sldId xmlns:r="http://schemas.openxmlformats.org/officeDocument/2006/relationships" id="259" r:id="Rf397b510b55e4393"/>
-    <p:sldId xmlns:r="http://schemas.openxmlformats.org/officeDocument/2006/relationships" id="260" r:id="R3cd5325124dd4d3f"/>
-    <p:sldId xmlns:r="http://schemas.openxmlformats.org/officeDocument/2006/relationships" id="261" r:id="R3e0816fa26ad441b"/>
-    <p:sldId xmlns:r="http://schemas.openxmlformats.org/officeDocument/2006/relationships" id="262" r:id="R23ad8581e62a478e"/>
-    <p:sldId xmlns:r="http://schemas.openxmlformats.org/officeDocument/2006/relationships" id="263" r:id="R8f100ff6903e4209"/>
-    <p:sldId xmlns:r="http://schemas.openxmlformats.org/officeDocument/2006/relationships" id="264" r:id="Rfcfb4b679ca7409f"/>
-    <p:sldId xmlns:r="http://schemas.openxmlformats.org/officeDocument/2006/relationships" id="265" r:id="R0e2b5629e68c4001"/>
-    <p:sldId xmlns:r="http://schemas.openxmlformats.org/officeDocument/2006/relationships" id="266" r:id="Rb72818123d6249a7"/>
-    <p:sldId xmlns:r="http://schemas.openxmlformats.org/officeDocument/2006/relationships" id="267" r:id="R2165e69314534c04"/>
-    <p:sldId xmlns:r="http://schemas.openxmlformats.org/officeDocument/2006/relationships" id="268" r:id="R61a2acd83cad403b"/>
-    <p:sldId xmlns:r="http://schemas.openxmlformats.org/officeDocument/2006/relationships" id="269" r:id="R7bb98ab0ddc94bd0"/>
-    <p:sldId xmlns:r="http://schemas.openxmlformats.org/officeDocument/2006/relationships" id="270" r:id="R3cd406b72f654212"/>
-    <p:sldId xmlns:r="http://schemas.openxmlformats.org/officeDocument/2006/relationships" id="271" r:id="R1ccdb81ff04b44e8"/>
-    <p:sldId xmlns:r="http://schemas.openxmlformats.org/officeDocument/2006/relationships" id="272" r:id="Rae925e5c37b94831"/>
-    <p:sldId xmlns:r="http://schemas.openxmlformats.org/officeDocument/2006/relationships" id="273" r:id="R88e90249b0c2434c"/>
-    <p:sldId xmlns:r="http://schemas.openxmlformats.org/officeDocument/2006/relationships" id="274" r:id="R44b773af49694e9c"/>
-    <p:sldId xmlns:r="http://schemas.openxmlformats.org/officeDocument/2006/relationships" id="275" r:id="Ref27ba7528c74590"/>
+    <p:sldId xmlns:r="http://schemas.openxmlformats.org/officeDocument/2006/relationships" id="256" r:id="Rf5203ae59a834d4f"/>
+    <p:sldId xmlns:r="http://schemas.openxmlformats.org/officeDocument/2006/relationships" id="257" r:id="R4a1855e41ca447ee"/>
+    <p:sldId xmlns:r="http://schemas.openxmlformats.org/officeDocument/2006/relationships" id="258" r:id="Re3329c9e7bba4530"/>
+    <p:sldId xmlns:r="http://schemas.openxmlformats.org/officeDocument/2006/relationships" id="259" r:id="R65eff6dd72db4eff"/>
+    <p:sldId xmlns:r="http://schemas.openxmlformats.org/officeDocument/2006/relationships" id="260" r:id="R885ee17c0e5d46f6"/>
+    <p:sldId xmlns:r="http://schemas.openxmlformats.org/officeDocument/2006/relationships" id="261" r:id="Rd9efdcb8f456421c"/>
+    <p:sldId xmlns:r="http://schemas.openxmlformats.org/officeDocument/2006/relationships" id="262" r:id="R092fc9c805b940e3"/>
+    <p:sldId xmlns:r="http://schemas.openxmlformats.org/officeDocument/2006/relationships" id="263" r:id="Rf2ad8c7119e24ead"/>
+    <p:sldId xmlns:r="http://schemas.openxmlformats.org/officeDocument/2006/relationships" id="264" r:id="R2a1e04c39a634948"/>
+    <p:sldId xmlns:r="http://schemas.openxmlformats.org/officeDocument/2006/relationships" id="265" r:id="R36be34a968bc4e6b"/>
+    <p:sldId xmlns:r="http://schemas.openxmlformats.org/officeDocument/2006/relationships" id="266" r:id="R528b831dc0e04c4e"/>
+    <p:sldId xmlns:r="http://schemas.openxmlformats.org/officeDocument/2006/relationships" id="267" r:id="R63a150b059894eb9"/>
+    <p:sldId xmlns:r="http://schemas.openxmlformats.org/officeDocument/2006/relationships" id="268" r:id="R500c3d9e9d1c468d"/>
+    <p:sldId xmlns:r="http://schemas.openxmlformats.org/officeDocument/2006/relationships" id="269" r:id="R6a25556f41684013"/>
+    <p:sldId xmlns:r="http://schemas.openxmlformats.org/officeDocument/2006/relationships" id="270" r:id="Rd8a41f3cb78147a7"/>
+    <p:sldId xmlns:r="http://schemas.openxmlformats.org/officeDocument/2006/relationships" id="271" r:id="Rcb5872d183f146de"/>
+    <p:sldId xmlns:r="http://schemas.openxmlformats.org/officeDocument/2006/relationships" id="272" r:id="R1030f48cea94481c"/>
+    <p:sldId xmlns:r="http://schemas.openxmlformats.org/officeDocument/2006/relationships" id="273" r:id="Rbd338d8a3845435c"/>
+    <p:sldId xmlns:r="http://schemas.openxmlformats.org/officeDocument/2006/relationships" id="274" r:id="Rb26ce287bdfc41a9"/>
+    <p:sldId xmlns:r="http://schemas.openxmlformats.org/officeDocument/2006/relationships" id="275" r:id="R9f66d9b6ceab464e"/>
   </p:sldIdLst>
   <p:sldSz cx="12192000" cy="6858000"/>
   <p:notesSz cx="6858000" cy="9144000"/>
@@ -511,6 +511,11 @@
           </a:p>
           <a:p xmlns:a="http://schemas.openxmlformats.org/drawingml/2006/main">
             <a:r>
+              <a:t>AAPL is an illustrative token example. Quantities and price paths are adapted from the recorded TSLA/USDG local-fork fixture, not an AAPL execution record or live stock prices. The linked website replay retains its original TSLA labels. Historical HIMS evidence keeps its original asset.</a:t>
+            </a:r>
+          </a:p>
+          <a:p xmlns:a="http://schemas.openxmlformats.org/drawingml/2006/main">
+            <a:r>
               <a:t>https://github.com/vexi-v1/vexi-hakari</a:t>
             </a:r>
           </a:p>
@@ -621,7 +626,7 @@
           </a:p>
           <a:p xmlns:a="http://schemas.openxmlformats.org/drawingml/2006/main">
             <a:r>
-              <a:t>Point to 2.5% in both charts. Rounding is toward fewer contracts and a higher ask. At ±5% there is no whole contract left.</a:t>
+              <a:t>Point to 2.5% in both charts. Rounding is toward fewer contracts and a higher ask. At ±5% there is no whole contract left. AAPL is an illustrative token example. Quantities and price paths are adapted from the recorded TSLA/USDG local-fork fixture, not an AAPL execution record or live stock prices. The linked website replay retains its original TSLA labels. Historical HIMS evidence keeps its original asset.</a:t>
             </a:r>
           </a:p>
           <a:p xmlns:a="http://schemas.openxmlformats.org/drawingml/2006/main">
@@ -637,6 +642,11 @@
           <a:p xmlns:a="http://schemas.openxmlformats.org/drawingml/2006/main">
             <a:r>
               <a:t>website/band.mjs calculateBand; fixed example assumes readable reference, enough liquidity and raw/truncated agreement</a:t>
+            </a:r>
+          </a:p>
+          <a:p xmlns:a="http://schemas.openxmlformats.org/drawingml/2006/main">
+            <a:r>
+              <a:t>AAPL is an illustrative token example. Quantities and price paths are adapted from the recorded TSLA/USDG local-fork fixture, not an AAPL execution record or live stock prices. The linked website replay retains its original TSLA labels. Historical HIMS evidence keeps its original asset.</a:t>
             </a:r>
           </a:p>
           <a:p xmlns:a="http://schemas.openxmlformats.org/drawingml/2006/main">
@@ -751,7 +761,7 @@
           </a:p>
           <a:p xmlns:a="http://schemas.openxmlformats.org/drawingml/2006/main">
             <a:r>
-              <a:t>Read each row across. A quote read is not a guarantee that a buy will fill. The book runs checks in order and may stop at the first failure.</a:t>
+              <a:t>Read each row across. A quote read is not a guarantee that a buy will fill. The book runs checks in order and may stop at the first failure. AAPL is an illustrative token example. Quantities and price paths are adapted from the recorded TSLA/USDG local-fork fixture, not an AAPL execution record or live stock prices. The linked website replay retains its original TSLA labels. Historical HIMS evidence keeps its original asset.</a:t>
             </a:r>
           </a:p>
           <a:p xmlns:a="http://schemas.openxmlformats.org/drawingml/2006/main">
@@ -767,6 +777,11 @@
           <a:p xmlns:a="http://schemas.openxmlformats.org/drawingml/2006/main">
             <a:r>
               <a:t>website/evidence/demo.json: lifecycle pause, expired; anchor anchor-refused; unguarded unguarded; website/app.js cases</a:t>
+            </a:r>
+          </a:p>
+          <a:p xmlns:a="http://schemas.openxmlformats.org/drawingml/2006/main">
+            <a:r>
+              <a:t>AAPL is an illustrative token example. Quantities and price paths are adapted from the recorded TSLA/USDG local-fork fixture, not an AAPL execution record or live stock prices. The linked website replay retains its original TSLA labels. Historical HIMS evidence keeps its original asset.</a:t>
             </a:r>
           </a:p>
           <a:p xmlns:a="http://schemas.openxmlformats.org/drawingml/2006/main">
@@ -866,7 +881,7 @@
           </a:p>
           <a:p xmlns:a="http://schemas.openxmlformats.org/drawingml/2006/main">
             <a:r>
-              <a:t>At the accepted expiry price of about 378.269, the put is in the money against a four-hundred strike. The holder delivers three TSLA and receives twelve hundred USDG. The calls are out of the money. After the exercise window, close returns eight TSLA through Aqua: five unused call collateral and three exercise proceeds. A separate premium claim returns 64.0064 USDG. Book token balances then reach zero.</a:t>
+              <a:t>At the illustrative accepted expiry price of about 378.269, the put is in the money against a four-hundred strike. The holder delivers three AAPL and receives twelve hundred USDG. The calls are out of the money. After the exercise window, close returns eight AAPL through Aqua: five unused call collateral and three exercise proceeds. A separate premium claim returns 64.0064 USDG. Book token balances then reach zero.</a:t>
             </a:r>
           </a:p>
           <a:p xmlns:a="http://schemas.openxmlformats.org/drawingml/2006/main">
@@ -881,7 +896,7 @@
           </a:p>
           <a:p xmlns:a="http://schemas.openxmlformats.org/drawingml/2006/main">
             <a:r>
-              <a:t>Follow the same lifecycle across both token charts. Close and claim are separate actions. Releasing the remaining promises is step 15.</a:t>
+              <a:t>Follow the same lifecycle across both token charts. Close and claim are separate actions. Releasing the remaining promises is step 15. AAPL is an illustrative token example. Quantities and price paths are adapted from the recorded TSLA/USDG local-fork fixture, not an AAPL execution record or live stock prices. The linked website replay retains its original TSLA labels. Historical HIMS evidence keeps its original asset.</a:t>
             </a:r>
           </a:p>
           <a:p xmlns:a="http://schemas.openxmlformats.org/drawingml/2006/main">
@@ -897,6 +912,11 @@
           <a:p xmlns:a="http://schemas.openxmlformats.org/drawingml/2006/main">
             <a:r>
               <a:t>website/evidence/demo.json: lifecycle settle, exercise, close, premium, release; docs/settlement.md</a:t>
+            </a:r>
+          </a:p>
+          <a:p xmlns:a="http://schemas.openxmlformats.org/drawingml/2006/main">
+            <a:r>
+              <a:t>AAPL is an illustrative token example. Quantities and price paths are adapted from the recorded TSLA/USDG local-fork fixture, not an AAPL execution record or live stock prices. The linked website replay retains its original TSLA labels. Historical HIMS evidence keeps its original asset.</a:t>
             </a:r>
           </a:p>
           <a:p xmlns:a="http://schemas.openxmlformats.org/drawingml/2006/main">
@@ -996,7 +1016,7 @@
           </a:p>
           <a:p xmlns:a="http://schemas.openxmlformats.org/drawingml/2006/main">
             <a:r>
-              <a:t>Here is the actual contract replay. Step five shows the collateral and premium split. Step seven attempts a buy outside the band; the buyer keeps the same funds and positions. Step nine has an open band but an expired quote, so the maker must renew. Step fourteen claims the premiums and leaves zero tokens in the book. The page exposes the previous and current balances and recorded EVM logs for each checkpoint.</a:t>
+              <a:t>The AAPL example follows this recorded TSLA/USDG contract replay. Step five shows the collateral and premium split. Step seven attempts a buy outside the band; the buyer keeps the same funds and positions. Step nine has an open band but an expired quote, so the maker must renew. Step fourteen claims the premiums and leaves zero tokens in the book. The page exposes the previous and current balances and recorded EVM logs for each checkpoint.</a:t>
             </a:r>
           </a:p>
           <a:p xmlns:a="http://schemas.openxmlformats.org/drawingml/2006/main">
@@ -1011,7 +1031,7 @@
           </a:p>
           <a:p xmlns:a="http://schemas.openxmlformats.org/drawingml/2006/main">
             <a:r>
-              <a:t>Open the replay before speaking. Select 05, 07, 09, 14, allowing roughly 10 seconds each. The slide is a fallback if the browser is unavailable. Public demo: https://vexi-v1.github.io/vexi-hakari/ . Local fallback: http://127.0.0.1:8787/ .</a:t>
+              <a:t>Open the replay before speaking. Select 05, 07, 09, 14, allowing roughly 10 seconds each. The slide is a fallback if the browser is unavailable. Public demo: https://vexi-v1.github.io/vexi-hakari/ . Local fallback: http://127.0.0.1:8787/ . AAPL is an illustrative token example. Quantities and price paths are adapted from the recorded TSLA/USDG local-fork fixture, not an AAPL execution record or live stock prices. The linked website replay retains its original TSLA labels. Historical HIMS evidence keeps its original asset.</a:t>
             </a:r>
           </a:p>
           <a:p xmlns:a="http://schemas.openxmlformats.org/drawingml/2006/main">
@@ -1027,6 +1047,11 @@
           <a:p xmlns:a="http://schemas.openxmlformats.org/drawingml/2006/main">
             <a:r>
               <a:t>website/evidence/demo.json: lifecycle buy, pause, expired, premium; website/app.js</a:t>
+            </a:r>
+          </a:p>
+          <a:p xmlns:a="http://schemas.openxmlformats.org/drawingml/2006/main">
+            <a:r>
+              <a:t>AAPL is an illustrative token example. Quantities and price paths are adapted from the recorded TSLA/USDG local-fork fixture, not an AAPL execution record or live stock prices. The linked website replay retains its original TSLA labels. Historical HIMS evidence keeps its original asset.</a:t>
             </a:r>
           </a:p>
           <a:p xmlns:a="http://schemas.openxmlformats.org/drawingml/2006/main">
@@ -1161,6 +1186,11 @@
           </a:p>
           <a:p xmlns:a="http://schemas.openxmlformats.org/drawingml/2006/main">
             <a:r>
+              <a:t>AAPL is an illustrative token example. Quantities and price paths are adapted from the recorded TSLA/USDG local-fork fixture, not an AAPL execution record or live stock prices. The linked website replay retains its original TSLA labels. Historical HIMS evidence keeps its original asset.</a:t>
+            </a:r>
+          </a:p>
+          <a:p xmlns:a="http://schemas.openxmlformats.org/drawingml/2006/main">
+            <a:r>
               <a:t>https://github.com/vexi-v1/vexi-hakari</a:t>
             </a:r>
           </a:p>
@@ -1291,6 +1321,11 @@
           </a:p>
           <a:p xmlns:a="http://schemas.openxmlformats.org/drawingml/2006/main">
             <a:r>
+              <a:t>AAPL is an illustrative token example. Quantities and price paths are adapted from the recorded TSLA/USDG local-fork fixture, not an AAPL execution record or live stock prices. The linked website replay retains its original TSLA labels. Historical HIMS evidence keeps its original asset.</a:t>
+            </a:r>
+          </a:p>
+          <a:p xmlns:a="http://schemas.openxmlformats.org/drawingml/2006/main">
+            <a:r>
               <a:t>https://github.com/vexi-v1/vexi-hakari</a:t>
             </a:r>
           </a:p>
@@ -1401,7 +1436,7 @@
           </a:p>
           <a:p xmlns:a="http://schemas.openxmlformats.org/drawingml/2006/main">
             <a:r>
-              <a:t>Explain the three integration seams. The fork creates a new reference pool, not a hook attached to the existing TSLA pool. FEEDBACK.md documents current integration findings; historical feedback is separate.</a:t>
+              <a:t>Explain the three integration seams. The fork creates a new reference pool, not a hook attached to the existing unhooked pool. FEEDBACK.md documents current integration findings; historical feedback is separate.</a:t>
             </a:r>
           </a:p>
           <a:p xmlns:a="http://schemas.openxmlformats.org/drawingml/2006/main">
@@ -1417,6 +1452,11 @@
           <a:p xmlns:a="http://schemas.openxmlformats.org/drawingml/2006/main">
             <a:r>
               <a:t>README.md; FEEDBACK.md; src/HakariOracleHook.sol; aqua/test/StabilityBandFork.t.sol</a:t>
+            </a:r>
+          </a:p>
+          <a:p xmlns:a="http://schemas.openxmlformats.org/drawingml/2006/main">
+            <a:r>
+              <a:t>AAPL is an illustrative token example. Quantities and price paths are adapted from the recorded TSLA/USDG local-fork fixture, not an AAPL execution record or live stock prices. The linked website replay retains its original TSLA labels. Historical HIMS evidence keeps its original asset.</a:t>
             </a:r>
           </a:p>
           <a:p xmlns:a="http://schemas.openxmlformats.org/drawingml/2006/main">
@@ -1551,6 +1591,11 @@
           </a:p>
           <a:p xmlns:a="http://schemas.openxmlformats.org/drawingml/2006/main">
             <a:r>
+              <a:t>AAPL is an illustrative token example. Quantities and price paths are adapted from the recorded TSLA/USDG local-fork fixture, not an AAPL execution record or live stock prices. The linked website replay retains its original TSLA labels. Historical HIMS evidence keeps its original asset.</a:t>
+            </a:r>
+          </a:p>
+          <a:p xmlns:a="http://schemas.openxmlformats.org/drawingml/2006/main">
+            <a:r>
               <a:t>https://github.com/vexi-v1/vexi-hakari</a:t>
             </a:r>
           </a:p>
@@ -1681,6 +1726,11 @@
           </a:p>
           <a:p xmlns:a="http://schemas.openxmlformats.org/drawingml/2006/main">
             <a:r>
+              <a:t>AAPL is an illustrative token example. Quantities and price paths are adapted from the recorded TSLA/USDG local-fork fixture, not an AAPL execution record or live stock prices. The linked website replay retains its original TSLA labels. Historical HIMS evidence keeps its original asset.</a:t>
+            </a:r>
+          </a:p>
+          <a:p xmlns:a="http://schemas.openxmlformats.org/drawingml/2006/main">
+            <a:r>
               <a:t>https://github.com/vexi-v1/vexi-hakari</a:t>
             </a:r>
           </a:p>
@@ -1811,6 +1861,11 @@
           </a:p>
           <a:p xmlns:a="http://schemas.openxmlformats.org/drawingml/2006/main">
             <a:r>
+              <a:t>AAPL is an illustrative token example. Quantities and price paths are adapted from the recorded TSLA/USDG local-fork fixture, not an AAPL execution record or live stock prices. The linked website replay retains its original TSLA labels. Historical HIMS evidence keeps its original asset.</a:t>
+            </a:r>
+          </a:p>
+          <a:p xmlns:a="http://schemas.openxmlformats.org/drawingml/2006/main">
+            <a:r>
               <a:t>https://github.com/vexi-v1/vexi-hakari</a:t>
             </a:r>
           </a:p>
@@ -1906,7 +1961,7 @@
           </a:p>
           <a:p xmlns:a="http://schemas.openxmlformats.org/drawingml/2006/main">
             <a:r>
-              <a:t>Our example is a TSLA token priced in USDG. A covered call gives the buyer the right to buy one token at a four-hundred strike. Five USDG buys that right. At three-fifty the buyer walks away; at four-fifty they can pay four hundred and receive the token. A put reverses the delivery, so the writer reserves four hundred USDG.</a:t>
+              <a:t>Our example is an illustrative AAPL token priced in USDG. A covered call gives the buyer the right to buy one token at a four-hundred strike. Five USDG buys that right. At three-fifty the buyer walks away; at four-fifty they can pay four hundred and receive the token. A put reverses the delivery, so the writer reserves four hundred USDG.</a:t>
             </a:r>
           </a:p>
           <a:p xmlns:a="http://schemas.openxmlformats.org/drawingml/2006/main">
@@ -1921,7 +1976,7 @@
           </a:p>
           <a:p xmlns:a="http://schemas.openxmlformats.org/drawingml/2006/main">
             <a:r>
-              <a:t>Illustrative contract with a five-USDG premium. This is a teaching example, not the recorded eight-USDG base-premium lifecycle.</a:t>
+              <a:t>Illustrative contract with a five-USDG premium. This is a teaching example, not the recorded eight-USDG base-premium lifecycle. AAPL is an illustrative token example. Quantities and price paths are adapted from the recorded TSLA/USDG local-fork fixture, not an AAPL execution record or live stock prices. The linked website replay retains its original TSLA labels. Historical HIMS evidence keeps its original asset.</a:t>
             </a:r>
           </a:p>
           <a:p xmlns:a="http://schemas.openxmlformats.org/drawingml/2006/main">
@@ -1937,6 +1992,11 @@
           <a:p xmlns:a="http://schemas.openxmlformats.org/drawingml/2006/main">
             <a:r>
               <a:t>User-supplied HAKARI Pitch Deck.html, slides 2–3; aqua/src/book/OptionBook.sol</a:t>
+            </a:r>
+          </a:p>
+          <a:p xmlns:a="http://schemas.openxmlformats.org/drawingml/2006/main">
+            <a:r>
+              <a:t>AAPL is an illustrative token example. Quantities and price paths are adapted from the recorded TSLA/USDG local-fork fixture, not an AAPL execution record or live stock prices. The linked website replay retains its original TSLA labels. Historical HIMS evidence keeps its original asset.</a:t>
             </a:r>
           </a:p>
           <a:p xmlns:a="http://schemas.openxmlformats.org/drawingml/2006/main">
@@ -2121,6 +2181,11 @@
           </a:p>
           <a:p xmlns:a="http://schemas.openxmlformats.org/drawingml/2006/main">
             <a:r>
+              <a:t>AAPL is an illustrative token example. Quantities and price paths are adapted from the recorded TSLA/USDG local-fork fixture, not an AAPL execution record or live stock prices. The linked website replay retains its original TSLA labels. Historical HIMS evidence keeps its original asset.</a:t>
+            </a:r>
+          </a:p>
+          <a:p xmlns:a="http://schemas.openxmlformats.org/drawingml/2006/main">
+            <a:r>
               <a:t>https://github.com/vexi-v1/vexi-hakari</a:t>
             </a:r>
           </a:p>
@@ -2251,6 +2316,11 @@
           </a:p>
           <a:p xmlns:a="http://schemas.openxmlformats.org/drawingml/2006/main">
             <a:r>
+              <a:t>AAPL is an illustrative token example. Quantities and price paths are adapted from the recorded TSLA/USDG local-fork fixture, not an AAPL execution record or live stock prices. The linked website replay retains its original TSLA labels. Historical HIMS evidence keeps its original asset.</a:t>
+            </a:r>
+          </a:p>
+          <a:p xmlns:a="http://schemas.openxmlformats.org/drawingml/2006/main">
+            <a:r>
               <a:t>https://github.com/vexi-v1/vexi-hakari</a:t>
             </a:r>
           </a:p>
@@ -2381,6 +2451,11 @@
           </a:p>
           <a:p xmlns:a="http://schemas.openxmlformats.org/drawingml/2006/main">
             <a:r>
+              <a:t>AAPL is an illustrative token example. Quantities and price paths are adapted from the recorded TSLA/USDG local-fork fixture, not an AAPL execution record or live stock prices. The linked website replay retains its original TSLA labels. Historical HIMS evidence keeps its original asset.</a:t>
+            </a:r>
+          </a:p>
+          <a:p xmlns:a="http://schemas.openxmlformats.org/drawingml/2006/main">
+            <a:r>
               <a:t>https://github.com/vexi-v1/vexi-hakari</a:t>
             </a:r>
           </a:p>
@@ -2476,7 +2551,7 @@
           </a:p>
           <a:p xmlns:a="http://schemas.openxmlformats.org/drawingml/2006/main">
             <a:r>
-              <a:t>The initial wallet holds thirty TSLA and twenty thousand USDG. Posting ten calls promises ten TSLA. Posting ten puts at a four-hundred strike promises four thousand USDG. Nothing enters the book yet. The rest is unpromised inventory. Aqua virtual allocations refer to these same assets and must not be summed as additional deposits.</a:t>
+              <a:t>The initial wallet holds thirty AAPL and twenty thousand USDG. Posting ten calls promises ten AAPL. Posting ten puts at a four-hundred strike promises four thousand USDG. Nothing enters the book yet. The rest is unpromised inventory. Aqua virtual allocations refer to these same assets and must not be summed as additional deposits.</a:t>
             </a:r>
           </a:p>
           <a:p xmlns:a="http://schemas.openxmlformats.org/drawingml/2006/main">
@@ -2491,7 +2566,7 @@
           </a:p>
           <a:p xmlns:a="http://schemas.openxmlformats.org/drawingml/2006/main">
             <a:r>
-              <a:t>Point to the promised and free segments, then the zero book balance. No tokens moved in ship/post.</a:t>
+              <a:t>Point to the promised and free segments, then the zero book balance. No tokens moved in ship/post. AAPL is an illustrative token example. Quantities and price paths are adapted from the recorded TSLA/USDG local-fork fixture, not an AAPL execution record or live stock prices. The linked website replay retains its original TSLA labels. Historical HIMS evidence keeps its original asset.</a:t>
             </a:r>
           </a:p>
           <a:p xmlns:a="http://schemas.openxmlformats.org/drawingml/2006/main">
@@ -2507,6 +2582,11 @@
           <a:p xmlns:a="http://schemas.openxmlformats.org/drawingml/2006/main">
             <a:r>
               <a:t>website/evidence/demo.json: lifecycle initial, ship, post</a:t>
+            </a:r>
+          </a:p>
+          <a:p xmlns:a="http://schemas.openxmlformats.org/drawingml/2006/main">
+            <a:r>
+              <a:t>AAPL is an illustrative token example. Quantities and price paths are adapted from the recorded TSLA/USDG local-fork fixture, not an AAPL execution record or live stock prices. The linked website replay retains its original TSLA labels. Historical HIMS evidence keeps its original asset.</a:t>
             </a:r>
           </a:p>
           <a:p xmlns:a="http://schemas.openxmlformats.org/drawingml/2006/main">
@@ -2606,7 +2686,7 @@
           </a:p>
           <a:p xmlns:a="http://schemas.openxmlformats.org/drawingml/2006/main">
             <a:r>
-              <a:t>The guard computes the outgoing token’s free inventory as wallet balance minus the writer’s promises. It scales both SwapVM reserves before the curve executes. In the guarded test, a four-hundred USDG spot trade leaves about twenty-nine TSLA. In a separate unguarded fixture, selling twenty-one leaves only nine against a ten-TSLA promise. A later call fill refuses. The guard only constrains participating strategies.</a:t>
+              <a:t>The guard computes the outgoing token’s free inventory as wallet balance minus the writer’s promises. It scales both SwapVM reserves before the curve executes. In the guarded example, a four-hundred USDG spot trade leaves about twenty-nine AAPL. In a separate unguarded example, selling twenty-one leaves only nine against a ten-AAPL promise. A later call fill refuses. The guard only constrains participating strategies.</a:t>
             </a:r>
           </a:p>
           <a:p xmlns:a="http://schemas.openxmlformats.org/drawingml/2006/main">
@@ -2621,7 +2701,7 @@
           </a:p>
           <a:p xmlns:a="http://schemas.openxmlformats.org/drawingml/2006/main">
             <a:r>
-              <a:t>Compare wallet balance with the ten-TSLA promise. The two trade fixtures have different inputs and are independent, not a performance comparison.</a:t>
+              <a:t>Compare wallet balance with the ten-AAPL promise. The two trade fixtures have different inputs and are independent, not a performance comparison. AAPL is an illustrative token example. Quantities and price paths are adapted from the recorded TSLA/USDG local-fork fixture, not an AAPL execution record or live stock prices. The linked website replay retains its original TSLA labels. Historical HIMS evidence keeps its original asset.</a:t>
             </a:r>
           </a:p>
           <a:p xmlns:a="http://schemas.openxmlformats.org/drawingml/2006/main">
@@ -2637,6 +2717,11 @@
           <a:p xmlns:a="http://schemas.openxmlformats.org/drawingml/2006/main">
             <a:r>
               <a:t>website/evidence/demo.json: lifecycle spot; unguarded unguarded; aqua/src/swapvm/ExposureGuard.sol</a:t>
+            </a:r>
+          </a:p>
+          <a:p xmlns:a="http://schemas.openxmlformats.org/drawingml/2006/main">
+            <a:r>
+              <a:t>AAPL is an illustrative token example. Quantities and price paths are adapted from the recorded TSLA/USDG local-fork fixture, not an AAPL execution record or live stock prices. The linked website replay retains its original TSLA labels. Historical HIMS evidence keeps its original asset.</a:t>
             </a:r>
           </a:p>
           <a:p xmlns:a="http://schemas.openxmlformats.org/drawingml/2006/main">
@@ -2736,7 +2821,7 @@
           </a:p>
           <a:p xmlns:a="http://schemas.openxmlformats.org/drawingml/2006/main">
             <a:r>
-              <a:t>Now a buyer fills five calls and three puts. Through Aqua.pull, the writer supplies five TSLA and twelve hundred USDG directly to the book. The buyer separately pays 64.0064 USDG in premiums and receives the long positions. The book therefore holds five TSLA and 1264.0064 USDG. Remaining unfilled promises are five TSLA and twenty-eight hundred USDG.</a:t>
+              <a:t>Now a buyer fills five calls and three puts. Through Aqua.pull, the writer supplies five AAPL and twelve hundred USDG directly to the book. The buyer separately pays 64.0064 USDG in premiums and receives the long positions. The book therefore holds five AAPL and 1264.0064 USDG. Remaining unfilled promises are five AAPL and twenty-eight hundred USDG.</a:t>
             </a:r>
           </a:p>
           <a:p xmlns:a="http://schemas.openxmlformats.org/drawingml/2006/main">
@@ -2751,7 +2836,7 @@
           </a:p>
           <a:p xmlns:a="http://schemas.openxmlformats.org/drawingml/2006/main">
             <a:r>
-              <a:t>Follow green collateral and pink premium paths. Aqua.pull is a transfer mechanism, not an intermediate custody account.</a:t>
+              <a:t>Follow green collateral and pink premium paths. Aqua.pull is a transfer mechanism, not an intermediate custody account. AAPL is an illustrative token example. Quantities and price paths are adapted from the recorded TSLA/USDG local-fork fixture, not an AAPL execution record or live stock prices. The linked website replay retains its original TSLA labels. Historical HIMS evidence keeps its original asset.</a:t>
             </a:r>
           </a:p>
           <a:p xmlns:a="http://schemas.openxmlformats.org/drawingml/2006/main">
@@ -2767,6 +2852,11 @@
           <a:p xmlns:a="http://schemas.openxmlformats.org/drawingml/2006/main">
             <a:r>
               <a:t>website/evidence/demo.json: lifecycle spot, buy; aqua/test/WebsiteEvidence.t.sol</a:t>
+            </a:r>
+          </a:p>
+          <a:p xmlns:a="http://schemas.openxmlformats.org/drawingml/2006/main">
+            <a:r>
+              <a:t>AAPL is an illustrative token example. Quantities and price paths are adapted from the recorded TSLA/USDG local-fork fixture, not an AAPL execution record or live stock prices. The linked website replay retains its original TSLA labels. Historical HIMS evidence keeps its original asset.</a:t>
             </a:r>
           </a:p>
           <a:p xmlns:a="http://schemas.openxmlformats.org/drawingml/2006/main">
@@ -2901,6 +2991,11 @@
           </a:p>
           <a:p xmlns:a="http://schemas.openxmlformats.org/drawingml/2006/main">
             <a:r>
+              <a:t>AAPL is an illustrative token example. Quantities and price paths are adapted from the recorded TSLA/USDG local-fork fixture, not an AAPL execution record or live stock prices. The linked website replay retains its original TSLA labels. Historical HIMS evidence keeps its original asset.</a:t>
+            </a:r>
+          </a:p>
+          <a:p xmlns:a="http://schemas.openxmlformats.org/drawingml/2006/main">
+            <a:r>
               <a:t>https://github.com/vexi-v1/vexi-hakari</a:t>
             </a:r>
           </a:p>
@@ -2996,7 +3091,7 @@
           </a:p>
           <a:p xmlns:a="http://schemas.openxmlformats.org/drawingml/2006/main">
             <a:r>
-              <a:t>The chart uses recorded reference snapshots. The rolling TWAP is around 378.23 USDG. The public band extends five percent above and below it. At plus 2.5 percent, a quote remains available. At plus 5.1 percent, the price crosses the upper edge and the buy refuses. Reference availability, liquidity and agreement between raw and truncated observations are additional checks.</a:t>
+              <a:t>This AAPL illustration adapts the recorded TSLA reference path. The rolling TWAP is around 378.23 USDG. The public band extends five percent above and below it. At plus 2.5 percent, a quote remains available. At plus 5.1 percent, the price crosses the upper edge and the buy refuses. Reference availability, liquidity and agreement between raw and truncated observations are additional checks.</a:t>
             </a:r>
           </a:p>
           <a:p xmlns:a="http://schemas.openxmlformats.org/drawingml/2006/main">
@@ -3011,7 +3106,7 @@
           </a:p>
           <a:p xmlns:a="http://schemas.openxmlformats.org/drawingml/2006/main">
             <a:r>
-              <a:t>Point to the plus-5.1% snapshot crossing the upper bound. These are synthetic market observations from the local EVM.</a:t>
+              <a:t>Point to the plus-5.1% snapshot crossing the upper bound. These are synthetic market observations from the local EVM. AAPL is an illustrative token example. Quantities and price paths are adapted from the recorded TSLA/USDG local-fork fixture, not an AAPL execution record or live stock prices. The linked website replay retains its original TSLA labels. Historical HIMS evidence keeps its original asset.</a:t>
             </a:r>
           </a:p>
           <a:p xmlns:a="http://schemas.openxmlformats.org/drawingml/2006/main">
@@ -3027,6 +3122,11 @@
           <a:p xmlns:a="http://schemas.openxmlformats.org/drawingml/2006/main">
             <a:r>
               <a:t>website/evidence/demo.json: lifecycle buy, taper, pause, recover; aqua/src/band/StabilityBandPricer.sol</a:t>
+            </a:r>
+          </a:p>
+          <a:p xmlns:a="http://schemas.openxmlformats.org/drawingml/2006/main">
+            <a:r>
+              <a:t>AAPL is an illustrative token example. Quantities and price paths are adapted from the recorded TSLA/USDG local-fork fixture, not an AAPL execution record or live stock prices. The linked website replay retains its original TSLA labels. Historical HIMS evidence keeps its original asset.</a:t>
             </a:r>
           </a:p>
           <a:p xmlns:a="http://schemas.openxmlformats.org/drawingml/2006/main">
@@ -3109,7 +3209,7 @@
   </p:cSld>
   <p:clrMap bg1="lt1" tx1="dk1" bg2="lt2" tx2="dk2" accent1="accent1" accent2="accent2" accent3="accent3" accent4="accent4" accent5="accent5" accent6="accent6" hlink="hlink" folHlink="folHlink"/>
   <p:sldLayoutIdLst>
-    <p:sldLayoutId xmlns:r="http://schemas.openxmlformats.org/officeDocument/2006/relationships" id="2147483649" r:id="R1532541a833a4780"/>
+    <p:sldLayoutId xmlns:r="http://schemas.openxmlformats.org/officeDocument/2006/relationships" id="2147483649" r:id="R9e6ee50939324b95"/>
   </p:sldLayoutIdLst>
   <p:txStyles>
     <p:titleStyle>
@@ -4460,7 +4560,7 @@
               <c:strCache>
                 <c:ptCount val="1"/>
                 <c:pt idx="0">
-                  <c:v>TSLA</c:v>
+                  <c:v>AAPL</c:v>
                 </c:pt>
               </c:strCache>
             </c:strRef>
@@ -4495,7 +4595,7 @@
               <c:strCache>
                 <c:ptCount val="1"/>
                 <c:pt idx="0">
-                  <c:v>TSLA</c:v>
+                  <c:v>AAPL</c:v>
                 </c:pt>
               </c:strCache>
             </c:strRef>
@@ -4863,7 +4963,7 @@
           <c:idx val="0"/>
           <c:order val="0"/>
           <c:tx>
-            <c:v>Wallet TSLA</c:v>
+            <c:v>Wallet AAPL</c:v>
           </c:tx>
           <c:spPr>
             <a:solidFill xmlns:a="http://schemas.openxmlformats.org/drawingml/2006/main">
@@ -4904,7 +5004,7 @@
           <c:idx val="1"/>
           <c:order val="1"/>
           <c:tx>
-            <c:v>Promised TSLA</c:v>
+            <c:v>Promised AAPL</c:v>
           </c:tx>
           <c:spPr>
             <a:solidFill xmlns:a="http://schemas.openxmlformats.org/drawingml/2006/main">
@@ -5974,7 +6074,7 @@
           <c:idx val="0"/>
           <c:order val="0"/>
           <c:tx>
-            <c:v>TSLA</c:v>
+            <c:v>AAPL</c:v>
           </c:tx>
           <c:spPr>
             <a:solidFill xmlns:a="http://schemas.openxmlformats.org/drawingml/2006/main">
@@ -6190,7 +6290,7 @@
           <p:nvPr/>
         </p:nvPicPr>
         <p:blipFill>
-          <a:blip xmlns:r="http://schemas.openxmlformats.org/officeDocument/2006/relationships" xmlns:a="http://schemas.openxmlformats.org/drawingml/2006/main" r:embed="R7a3f9f74edb14556"/>
+          <a:blip xmlns:r="http://schemas.openxmlformats.org/officeDocument/2006/relationships" xmlns:a="http://schemas.openxmlformats.org/drawingml/2006/main" r:embed="R533c280e822c4072"/>
           <a:stretch xmlns:a="http://schemas.openxmlformats.org/drawingml/2006/main"/>
         </p:blipFill>
         <p:spPr>
@@ -6208,7 +6308,7 @@
           <p:cNvPr id="2" name="Vexi Hakari">
             <a:extLst xmlns:a="http://schemas.openxmlformats.org/drawingml/2006/main">
               <a:ext uri="{FF2B5EF4-FFF2-40B4-BE49-F238E27FC236}">
-                <a16:creationId xmlns:a16="http://schemas.microsoft.com/office/drawing/2014/main" id="{F4E622E3-B921-405A-9027-1087CD314622}"/>
+                <a16:creationId xmlns:a16="http://schemas.microsoft.com/office/drawing/2014/main" id="{E76FDAA5-579A-4BC8-B612-B781E76F5C93}"/>
               </a:ext>
             </a:extLst>
           </p:cNvPr>
@@ -6265,7 +6365,7 @@
           <p:cNvPr id="3" name="Shared liquidity for options + spot">
             <a:extLst xmlns:a="http://schemas.openxmlformats.org/drawingml/2006/main">
               <a:ext uri="{FF2B5EF4-FFF2-40B4-BE49-F238E27FC236}">
-                <a16:creationId xmlns:a16="http://schemas.microsoft.com/office/drawing/2014/main" id="{471D4522-B73F-4E6B-AC1D-BD2EB31BA58A}"/>
+                <a16:creationId xmlns:a16="http://schemas.microsoft.com/office/drawing/2014/main" id="{C1A06353-D6BF-44B4-893B-76AD4243B9B7}"/>
               </a:ext>
             </a:extLst>
           </p:cNvPr>
@@ -6322,7 +6422,7 @@
           <p:cNvPr id="4" name="Aqua accounting. Uniswap v4 quote checks.">
             <a:extLst xmlns:a="http://schemas.openxmlformats.org/drawingml/2006/main">
               <a:ext uri="{FF2B5EF4-FFF2-40B4-BE49-F238E27FC236}">
-                <a16:creationId xmlns:a16="http://schemas.microsoft.com/office/drawing/2014/main" id="{B69F68D8-5639-4AEE-8594-063B06DE6CF2}"/>
+                <a16:creationId xmlns:a16="http://schemas.microsoft.com/office/drawing/2014/main" id="{5AFC138D-15E0-4CE3-A83E-74ACA8B65F64}"/>
               </a:ext>
             </a:extLst>
           </p:cNvPr>
@@ -6376,10 +6476,10 @@
       </p:sp>
       <p:sp>
         <p:nvSpPr>
-          <p:cNvPr id="5" name="6-minute protocol demo">
-            <a:extLst xmlns:a="http://schemas.openxmlformats.org/drawingml/2006/main">
-              <a:ext uri="{FF2B5EF4-FFF2-40B4-BE49-F238E27FC236}">
-                <a16:creationId xmlns:a16="http://schemas.microsoft.com/office/drawing/2014/main" id="{F38FEA57-0245-4DF3-85EA-C09234452DF4}"/>
+          <p:cNvPr id="5" name="6-minute protocol demo / AAPL example">
+            <a:extLst xmlns:a="http://schemas.openxmlformats.org/drawingml/2006/main">
+              <a:ext uri="{FF2B5EF4-FFF2-40B4-BE49-F238E27FC236}">
+                <a16:creationId xmlns:a16="http://schemas.microsoft.com/office/drawing/2014/main" id="{299A52D7-C44A-4E62-BF8B-509184EAADDC}"/>
               </a:ext>
             </a:extLst>
           </p:cNvPr>
@@ -6426,7 +6526,7 @@
                 <a:ea typeface="Arial"/>
                 <a:cs typeface="Arial"/>
               </a:rPr>
-              <a:t>6-minute protocol demo</a:t>
+              <a:t>6-minute protocol demo / AAPL example</a:t>
             </a:r>
           </a:p>
         </p:txBody>
@@ -6436,7 +6536,7 @@
           <p:cNvPr id="6" name="ETHGlobal Tokyo 2026">
             <a:extLst xmlns:a="http://schemas.openxmlformats.org/drawingml/2006/main">
               <a:ext uri="{FF2B5EF4-FFF2-40B4-BE49-F238E27FC236}">
-                <a16:creationId xmlns:a16="http://schemas.microsoft.com/office/drawing/2014/main" id="{A9C17357-8441-4858-AB41-4C3E4B244F3A}"/>
+                <a16:creationId xmlns:a16="http://schemas.microsoft.com/office/drawing/2014/main" id="{EE196FE7-509C-4118-89C5-984CED5821BC}"/>
               </a:ext>
             </a:extLst>
           </p:cNvPr>
@@ -6491,7 +6591,7 @@
     </p:spTree>
     <p:extLst>
       <p:ext uri="{BB962C8B-B14F-4D97-AF65-F5344CB8AC3E}">
-        <p14:creationId xmlns:p14="http://schemas.microsoft.com/office/powerpoint/2010/main" val="1289390919"/>
+        <p14:creationId xmlns:p14="http://schemas.microsoft.com/office/powerpoint/2010/main" val="1944093900"/>
       </p:ext>
     </p:extLst>
   </p:cSld>
@@ -6519,10 +6619,10 @@
       </p:grpSpPr>
       <p:sp>
         <p:nvSpPr>
-          <p:cNvPr id="11" name="Size and premium react differently">
-            <a:extLst xmlns:a="http://schemas.openxmlformats.org/drawingml/2006/main">
-              <a:ext uri="{FF2B5EF4-FFF2-40B4-BE49-F238E27FC236}">
-                <a16:creationId xmlns:a16="http://schemas.microsoft.com/office/drawing/2014/main" id="{C27295D3-1CDD-402C-BACB-CD7F9F083956}"/>
+          <p:cNvPr id="12" name="Size and premium react differently">
+            <a:extLst xmlns:a="http://schemas.openxmlformats.org/drawingml/2006/main">
+              <a:ext uri="{FF2B5EF4-FFF2-40B4-BE49-F238E27FC236}">
+                <a16:creationId xmlns:a16="http://schemas.microsoft.com/office/drawing/2014/main" id="{AB3793A9-7F04-4B15-A353-D60BD7EB8284}"/>
               </a:ext>
             </a:extLst>
           </p:cNvPr>
@@ -6576,14 +6676,14 @@
       </p:sp>
       <p:pic>
         <p:nvPicPr>
-          <p:cNvPr id="12" name=""/>
+          <p:cNvPr id="13" name=""/>
           <p:cNvPicPr>
             <a:picLocks xmlns:a="http://schemas.openxmlformats.org/drawingml/2006/main" noChangeAspect="1"/>
           </p:cNvPicPr>
           <p:nvPr/>
         </p:nvPicPr>
         <p:blipFill>
-          <a:blip xmlns:r="http://schemas.openxmlformats.org/officeDocument/2006/relationships" xmlns:a="http://schemas.openxmlformats.org/drawingml/2006/main" r:embed="Rf6db2bc93a0447e2"/>
+          <a:blip xmlns:r="http://schemas.openxmlformats.org/officeDocument/2006/relationships" xmlns:a="http://schemas.openxmlformats.org/drawingml/2006/main" r:embed="R5c209adc83e640db"/>
           <a:stretch xmlns:a="http://schemas.openxmlformats.org/drawingml/2006/main"/>
         </p:blipFill>
         <p:spPr>
@@ -6601,7 +6701,7 @@
           <p:cNvPr id="3" name="Vexi Hakari">
             <a:extLst xmlns:a="http://schemas.openxmlformats.org/drawingml/2006/main">
               <a:ext uri="{FF2B5EF4-FFF2-40B4-BE49-F238E27FC236}">
-                <a16:creationId xmlns:a16="http://schemas.microsoft.com/office/drawing/2014/main" id="{45F379A4-79F8-4214-A2BD-9A9F3184DCC3}"/>
+                <a16:creationId xmlns:a16="http://schemas.microsoft.com/office/drawing/2014/main" id="{0E66F091-59A5-4911-B9C7-DC467571D20B}"/>
               </a:ext>
             </a:extLst>
           </p:cNvPr>
@@ -6655,22 +6755,22 @@
       </p:sp>
       <p:sp>
         <p:nvSpPr>
-          <p:cNvPr id="4" name="10">
-            <a:extLst xmlns:a="http://schemas.openxmlformats.org/drawingml/2006/main">
-              <a:ext uri="{FF2B5EF4-FFF2-40B4-BE49-F238E27FC236}">
-                <a16:creationId xmlns:a16="http://schemas.microsoft.com/office/drawing/2014/main" id="{C3329AA3-1257-4B4F-8311-9D8D9E86B906}"/>
-              </a:ext>
-            </a:extLst>
-          </p:cNvPr>
-          <p:cNvSpPr>
-            <a:spLocks xmlns:a="http://schemas.openxmlformats.org/drawingml/2006/main" noGrp="1"/>
-          </p:cNvSpPr>
-          <p:nvPr/>
-        </p:nvSpPr>
-        <p:spPr>
-          <a:xfrm xmlns:a="http://schemas.openxmlformats.org/drawingml/2006/main">
-            <a:off x="11001375" y="6153150"/>
-            <a:ext cx="619125" cy="342900"/>
+          <p:cNvPr id="4" name="AAPL example / illustrative amounts">
+            <a:extLst xmlns:a="http://schemas.openxmlformats.org/drawingml/2006/main">
+              <a:ext uri="{FF2B5EF4-FFF2-40B4-BE49-F238E27FC236}">
+                <a16:creationId xmlns:a16="http://schemas.microsoft.com/office/drawing/2014/main" id="{0AD210B0-0736-4354-9954-E202BA534280}"/>
+              </a:ext>
+            </a:extLst>
+          </p:cNvPr>
+          <p:cNvSpPr>
+            <a:spLocks xmlns:a="http://schemas.openxmlformats.org/drawingml/2006/main" noGrp="1"/>
+          </p:cNvSpPr>
+          <p:nvPr/>
+        </p:nvSpPr>
+        <p:spPr>
+          <a:xfrm xmlns:a="http://schemas.openxmlformats.org/drawingml/2006/main">
+            <a:off x="3905250" y="6153150"/>
+            <a:ext cx="6667500" cy="342900"/>
           </a:xfrm>
           <a:prstGeom xmlns:a="http://schemas.openxmlformats.org/drawingml/2006/main" prst="rect">
             <a:avLst/>
@@ -6686,7 +6786,7 @@
           </a:bodyPr>
           <a:lstStyle xmlns:a="http://schemas.openxmlformats.org/drawingml/2006/main"/>
           <a:p xmlns:a="http://schemas.openxmlformats.org/drawingml/2006/main">
-            <a:pPr algn="r">
+            <a:pPr algn="l">
               <a:defRPr sz="1275" b="0">
                 <a:solidFill>
                   <a:srgbClr val="A8A8B2"/>
@@ -6705,29 +6805,29 @@
                 <a:ea typeface="Arial"/>
                 <a:cs typeface="Arial"/>
               </a:rPr>
-              <a:t>10</a:t>
-            </a:r>
-          </a:p>
-        </p:txBody>
-      </p:sp>
-      <p:sp>
-        <p:nvSpPr>
-          <p:cNvPr id="5" name="Contracts per call">
-            <a:extLst xmlns:a="http://schemas.openxmlformats.org/drawingml/2006/main">
-              <a:ext uri="{FF2B5EF4-FFF2-40B4-BE49-F238E27FC236}">
-                <a16:creationId xmlns:a16="http://schemas.microsoft.com/office/drawing/2014/main" id="{F18549BE-6042-47AB-BB64-1C955CFEC45C}"/>
-              </a:ext>
-            </a:extLst>
-          </p:cNvPr>
-          <p:cNvSpPr>
-            <a:spLocks xmlns:a="http://schemas.openxmlformats.org/drawingml/2006/main" noGrp="1"/>
-          </p:cNvSpPr>
-          <p:nvPr/>
-        </p:nvSpPr>
-        <p:spPr>
-          <a:xfrm xmlns:a="http://schemas.openxmlformats.org/drawingml/2006/main">
-            <a:off x="685800" y="1476375"/>
-            <a:ext cx="5048250" cy="447675"/>
+              <a:t>AAPL example / illustrative amounts</a:t>
+            </a:r>
+          </a:p>
+        </p:txBody>
+      </p:sp>
+      <p:sp>
+        <p:nvSpPr>
+          <p:cNvPr id="5" name="10">
+            <a:extLst xmlns:a="http://schemas.openxmlformats.org/drawingml/2006/main">
+              <a:ext uri="{FF2B5EF4-FFF2-40B4-BE49-F238E27FC236}">
+                <a16:creationId xmlns:a16="http://schemas.microsoft.com/office/drawing/2014/main" id="{907F3562-E376-4417-8531-D1E3B97ACEA2}"/>
+              </a:ext>
+            </a:extLst>
+          </p:cNvPr>
+          <p:cNvSpPr>
+            <a:spLocks xmlns:a="http://schemas.openxmlformats.org/drawingml/2006/main" noGrp="1"/>
+          </p:cNvSpPr>
+          <p:nvPr/>
+        </p:nvSpPr>
+        <p:spPr>
+          <a:xfrm xmlns:a="http://schemas.openxmlformats.org/drawingml/2006/main">
+            <a:off x="11001375" y="6153150"/>
+            <a:ext cx="619125" cy="342900"/>
           </a:xfrm>
           <a:prstGeom xmlns:a="http://schemas.openxmlformats.org/drawingml/2006/main" prst="rect">
             <a:avLst/>
@@ -6743,47 +6843,47 @@
           </a:bodyPr>
           <a:lstStyle xmlns:a="http://schemas.openxmlformats.org/drawingml/2006/main"/>
           <a:p xmlns:a="http://schemas.openxmlformats.org/drawingml/2006/main">
-            <a:pPr algn="l">
-              <a:defRPr sz="2250" b="1">
-                <a:solidFill>
-                  <a:srgbClr val="37D67A"/>
-                </a:solidFill>
-                <a:latin typeface="Arial"/>
-                <a:ea typeface="Arial"/>
-                <a:cs typeface="Arial"/>
-              </a:defRPr>
-            </a:pPr>
-            <a:r>
-              <a:rPr sz="2250" b="1">
-                <a:solidFill>
-                  <a:srgbClr val="37D67A"/>
-                </a:solidFill>
-                <a:latin typeface="Arial"/>
-                <a:ea typeface="Arial"/>
-                <a:cs typeface="Arial"/>
-              </a:rPr>
-              <a:t>Contracts per call</a:t>
-            </a:r>
-          </a:p>
-        </p:txBody>
-      </p:sp>
-      <p:sp>
-        <p:nvSpPr>
-          <p:cNvPr id="6" name="Ask per contract / USDG">
-            <a:extLst xmlns:a="http://schemas.openxmlformats.org/drawingml/2006/main">
-              <a:ext uri="{FF2B5EF4-FFF2-40B4-BE49-F238E27FC236}">
-                <a16:creationId xmlns:a16="http://schemas.microsoft.com/office/drawing/2014/main" id="{863304CC-1250-4616-B6EF-F1C0F1CD9EB0}"/>
-              </a:ext>
-            </a:extLst>
-          </p:cNvPr>
-          <p:cNvSpPr>
-            <a:spLocks xmlns:a="http://schemas.openxmlformats.org/drawingml/2006/main" noGrp="1"/>
-          </p:cNvSpPr>
-          <p:nvPr/>
-        </p:nvSpPr>
-        <p:spPr>
-          <a:xfrm xmlns:a="http://schemas.openxmlformats.org/drawingml/2006/main">
-            <a:off x="6553200" y="1476375"/>
+            <a:pPr algn="r">
+              <a:defRPr sz="1275" b="0">
+                <a:solidFill>
+                  <a:srgbClr val="A8A8B2"/>
+                </a:solidFill>
+                <a:latin typeface="Arial"/>
+                <a:ea typeface="Arial"/>
+                <a:cs typeface="Arial"/>
+              </a:defRPr>
+            </a:pPr>
+            <a:r>
+              <a:rPr sz="1275" b="0">
+                <a:solidFill>
+                  <a:srgbClr val="A8A8B2"/>
+                </a:solidFill>
+                <a:latin typeface="Arial"/>
+                <a:ea typeface="Arial"/>
+                <a:cs typeface="Arial"/>
+              </a:rPr>
+              <a:t>10</a:t>
+            </a:r>
+          </a:p>
+        </p:txBody>
+      </p:sp>
+      <p:sp>
+        <p:nvSpPr>
+          <p:cNvPr id="6" name="Contracts per call">
+            <a:extLst xmlns:a="http://schemas.openxmlformats.org/drawingml/2006/main">
+              <a:ext uri="{FF2B5EF4-FFF2-40B4-BE49-F238E27FC236}">
+                <a16:creationId xmlns:a16="http://schemas.microsoft.com/office/drawing/2014/main" id="{66AB615E-9C6B-4BA3-A734-E82BDEF96E9D}"/>
+              </a:ext>
+            </a:extLst>
+          </p:cNvPr>
+          <p:cNvSpPr>
+            <a:spLocks xmlns:a="http://schemas.openxmlformats.org/drawingml/2006/main" noGrp="1"/>
+          </p:cNvSpPr>
+          <p:nvPr/>
+        </p:nvSpPr>
+        <p:spPr>
+          <a:xfrm xmlns:a="http://schemas.openxmlformats.org/drawingml/2006/main">
+            <a:off x="685800" y="1476375"/>
             <a:ext cx="5048250" cy="447675"/>
           </a:xfrm>
           <a:prstGeom xmlns:a="http://schemas.openxmlformats.org/drawingml/2006/main" prst="rect">
@@ -6803,6 +6903,63 @@
             <a:pPr algn="l">
               <a:defRPr sz="2250" b="1">
                 <a:solidFill>
+                  <a:srgbClr val="37D67A"/>
+                </a:solidFill>
+                <a:latin typeface="Arial"/>
+                <a:ea typeface="Arial"/>
+                <a:cs typeface="Arial"/>
+              </a:defRPr>
+            </a:pPr>
+            <a:r>
+              <a:rPr sz="2250" b="1">
+                <a:solidFill>
+                  <a:srgbClr val="37D67A"/>
+                </a:solidFill>
+                <a:latin typeface="Arial"/>
+                <a:ea typeface="Arial"/>
+                <a:cs typeface="Arial"/>
+              </a:rPr>
+              <a:t>Contracts per call</a:t>
+            </a:r>
+          </a:p>
+        </p:txBody>
+      </p:sp>
+      <p:sp>
+        <p:nvSpPr>
+          <p:cNvPr id="7" name="Ask per contract / USDG">
+            <a:extLst xmlns:a="http://schemas.openxmlformats.org/drawingml/2006/main">
+              <a:ext uri="{FF2B5EF4-FFF2-40B4-BE49-F238E27FC236}">
+                <a16:creationId xmlns:a16="http://schemas.microsoft.com/office/drawing/2014/main" id="{70827B2E-1406-4205-874E-F3FB04868F52}"/>
+              </a:ext>
+            </a:extLst>
+          </p:cNvPr>
+          <p:cNvSpPr>
+            <a:spLocks xmlns:a="http://schemas.openxmlformats.org/drawingml/2006/main" noGrp="1"/>
+          </p:cNvSpPr>
+          <p:nvPr/>
+        </p:nvSpPr>
+        <p:spPr>
+          <a:xfrm xmlns:a="http://schemas.openxmlformats.org/drawingml/2006/main">
+            <a:off x="6553200" y="1476375"/>
+            <a:ext cx="5048250" cy="447675"/>
+          </a:xfrm>
+          <a:prstGeom xmlns:a="http://schemas.openxmlformats.org/drawingml/2006/main" prst="rect">
+            <a:avLst/>
+          </a:prstGeom>
+          <a:noFill xmlns:a="http://schemas.openxmlformats.org/drawingml/2006/main"/>
+          <a:ln xmlns:a="http://schemas.openxmlformats.org/drawingml/2006/main" w="0">
+            <a:noFill/>
+          </a:ln>
+        </p:spPr>
+        <p:txBody>
+          <a:bodyPr xmlns:a="http://schemas.openxmlformats.org/drawingml/2006/main" wrap="none" lIns="0" tIns="0" rIns="0" bIns="0" anchor="ctr">
+            <a:noAutofit/>
+          </a:bodyPr>
+          <a:lstStyle xmlns:a="http://schemas.openxmlformats.org/drawingml/2006/main"/>
+          <a:p xmlns:a="http://schemas.openxmlformats.org/drawingml/2006/main">
+            <a:pPr algn="l">
+              <a:defRPr sz="2250" b="1">
+                <a:solidFill>
                   <a:srgbClr val="FF007A"/>
                 </a:solidFill>
                 <a:latin typeface="Arial"/>
@@ -6826,7 +6983,7 @@
       </p:sp>
       <p:graphicFrame>
         <p:nvGraphicFramePr>
-          <p:cNvPr id="17" name="Chart"/>
+          <p:cNvPr id="19" name="Chart"/>
           <p:cNvGraphicFramePr/>
           <p:nvPr/>
         </p:nvGraphicFramePr>
@@ -6836,13 +6993,13 @@
         </p:xfrm>
         <a:graphic xmlns:a="http://schemas.openxmlformats.org/drawingml/2006/main">
           <a:graphicData uri="http://schemas.openxmlformats.org/drawingml/2006/chart">
-            <c:chart xmlns:r="http://schemas.openxmlformats.org/officeDocument/2006/relationships" xmlns:c="http://schemas.openxmlformats.org/drawingml/2006/chart" r:id="Rf6b396d1f9914759"/>
+            <c:chart xmlns:r="http://schemas.openxmlformats.org/officeDocument/2006/relationships" xmlns:c="http://schemas.openxmlformats.org/drawingml/2006/chart" r:id="R94b9d1f980ad4e03"/>
           </a:graphicData>
         </a:graphic>
       </p:graphicFrame>
       <p:graphicFrame>
         <p:nvGraphicFramePr>
-          <p:cNvPr id="18" name="Chart"/>
+          <p:cNvPr id="20" name="Chart"/>
           <p:cNvGraphicFramePr/>
           <p:nvPr/>
         </p:nvGraphicFramePr>
@@ -6852,16 +7009,16 @@
         </p:xfrm>
         <a:graphic xmlns:a="http://schemas.openxmlformats.org/drawingml/2006/main">
           <a:graphicData uri="http://schemas.openxmlformats.org/drawingml/2006/chart">
-            <c:chart xmlns:r="http://schemas.openxmlformats.org/officeDocument/2006/relationships" xmlns:c="http://schemas.openxmlformats.org/drawingml/2006/chart" r:id="Rc9fdd4485ca4437c"/>
+            <c:chart xmlns:r="http://schemas.openxmlformats.org/officeDocument/2006/relationships" xmlns:c="http://schemas.openxmlformats.org/drawingml/2006/chart" r:id="R6821e9cc80ca41db"/>
           </a:graphicData>
         </a:graphic>
       </p:graphicFrame>
       <p:sp>
         <p:nvSpPr>
-          <p:cNvPr id="9" name="+2.5%: 25 contracts, 8.4 USDG">
-            <a:extLst xmlns:a="http://schemas.openxmlformats.org/drawingml/2006/main">
-              <a:ext uri="{FF2B5EF4-FFF2-40B4-BE49-F238E27FC236}">
-                <a16:creationId xmlns:a16="http://schemas.microsoft.com/office/drawing/2014/main" id="{21C801AC-3B0C-4F1E-A856-AD0C31DE0FCA}"/>
+          <p:cNvPr id="10" name="+2.5%: 25 contracts, 8.4 USDG">
+            <a:extLst xmlns:a="http://schemas.openxmlformats.org/drawingml/2006/main">
+              <a:ext uri="{FF2B5EF4-FFF2-40B4-BE49-F238E27FC236}">
+                <a16:creationId xmlns:a16="http://schemas.microsoft.com/office/drawing/2014/main" id="{C434DFEB-565E-4C52-AA04-721F3F5260C6}"/>
               </a:ext>
             </a:extLst>
           </p:cNvPr>
@@ -6915,10 +7072,10 @@
       </p:sp>
       <p:sp>
         <p:nvSpPr>
-          <p:cNvPr id="10" name="Illustration: 400 center, 8 base ask. At ±5%: cap 0, no quot">
-            <a:extLst xmlns:a="http://schemas.openxmlformats.org/drawingml/2006/main">
-              <a:ext uri="{FF2B5EF4-FFF2-40B4-BE49-F238E27FC236}">
-                <a16:creationId xmlns:a16="http://schemas.microsoft.com/office/drawing/2014/main" id="{39355B0F-5C48-4394-B078-55EED96AB307}"/>
+          <p:cNvPr id="11" name="Illustration: 400 center, 8 base ask. At ±5%: cap 0, no quot">
+            <a:extLst xmlns:a="http://schemas.openxmlformats.org/drawingml/2006/main">
+              <a:ext uri="{FF2B5EF4-FFF2-40B4-BE49-F238E27FC236}">
+                <a16:creationId xmlns:a16="http://schemas.microsoft.com/office/drawing/2014/main" id="{09A08BFF-C3E9-4769-99E9-99EEE28040CC}"/>
               </a:ext>
             </a:extLst>
           </p:cNvPr>
@@ -6973,7 +7130,7 @@
     </p:spTree>
     <p:extLst>
       <p:ext uri="{BB962C8B-B14F-4D97-AF65-F5344CB8AC3E}">
-        <p14:creationId xmlns:p14="http://schemas.microsoft.com/office/powerpoint/2010/main" val="1937487965"/>
+        <p14:creationId xmlns:p14="http://schemas.microsoft.com/office/powerpoint/2010/main" val="729347023"/>
       </p:ext>
     </p:extLst>
   </p:cSld>
@@ -7001,10 +7158,10 @@
       </p:grpSpPr>
       <p:sp>
         <p:nvSpPr>
-          <p:cNvPr id="7" name="An open band does not guarantee a fill">
-            <a:extLst xmlns:a="http://schemas.openxmlformats.org/drawingml/2006/main">
-              <a:ext uri="{FF2B5EF4-FFF2-40B4-BE49-F238E27FC236}">
-                <a16:creationId xmlns:a16="http://schemas.microsoft.com/office/drawing/2014/main" id="{09F67F8E-84C9-453F-BF81-CB78735E4942}"/>
+          <p:cNvPr id="8" name="An open band does not guarantee a fill">
+            <a:extLst xmlns:a="http://schemas.openxmlformats.org/drawingml/2006/main">
+              <a:ext uri="{FF2B5EF4-FFF2-40B4-BE49-F238E27FC236}">
+                <a16:creationId xmlns:a16="http://schemas.microsoft.com/office/drawing/2014/main" id="{C45BC036-2FF2-4002-A2A7-722DB4582C8F}"/>
               </a:ext>
             </a:extLst>
           </p:cNvPr>
@@ -7058,14 +7215,14 @@
       </p:sp>
       <p:pic>
         <p:nvPicPr>
-          <p:cNvPr id="8" name=""/>
+          <p:cNvPr id="9" name=""/>
           <p:cNvPicPr>
             <a:picLocks xmlns:a="http://schemas.openxmlformats.org/drawingml/2006/main" noChangeAspect="1"/>
           </p:cNvPicPr>
           <p:nvPr/>
         </p:nvPicPr>
         <p:blipFill>
-          <a:blip xmlns:r="http://schemas.openxmlformats.org/officeDocument/2006/relationships" xmlns:a="http://schemas.openxmlformats.org/drawingml/2006/main" r:embed="Rc1c62f8f9aff4195"/>
+          <a:blip xmlns:r="http://schemas.openxmlformats.org/officeDocument/2006/relationships" xmlns:a="http://schemas.openxmlformats.org/drawingml/2006/main" r:embed="R1c03e14ce29f4b8c"/>
           <a:stretch xmlns:a="http://schemas.openxmlformats.org/drawingml/2006/main"/>
         </p:blipFill>
         <p:spPr>
@@ -7083,7 +7240,7 @@
           <p:cNvPr id="3" name="Vexi Hakari">
             <a:extLst xmlns:a="http://schemas.openxmlformats.org/drawingml/2006/main">
               <a:ext uri="{FF2B5EF4-FFF2-40B4-BE49-F238E27FC236}">
-                <a16:creationId xmlns:a16="http://schemas.microsoft.com/office/drawing/2014/main" id="{7B883DF7-752E-473C-95C6-F66DF59C2AA8}"/>
+                <a16:creationId xmlns:a16="http://schemas.microsoft.com/office/drawing/2014/main" id="{2ECB1177-B452-49D4-9E7B-85EFFE64CB3D}"/>
               </a:ext>
             </a:extLst>
           </p:cNvPr>
@@ -7137,22 +7294,22 @@
       </p:sp>
       <p:sp>
         <p:nvSpPr>
-          <p:cNvPr id="4" name="11">
-            <a:extLst xmlns:a="http://schemas.openxmlformats.org/drawingml/2006/main">
-              <a:ext uri="{FF2B5EF4-FFF2-40B4-BE49-F238E27FC236}">
-                <a16:creationId xmlns:a16="http://schemas.microsoft.com/office/drawing/2014/main" id="{F39399FE-0790-4449-86F6-8479336108E5}"/>
-              </a:ext>
-            </a:extLst>
-          </p:cNvPr>
-          <p:cNvSpPr>
-            <a:spLocks xmlns:a="http://schemas.openxmlformats.org/drawingml/2006/main" noGrp="1"/>
-          </p:cNvSpPr>
-          <p:nvPr/>
-        </p:nvSpPr>
-        <p:spPr>
-          <a:xfrm xmlns:a="http://schemas.openxmlformats.org/drawingml/2006/main">
-            <a:off x="11001375" y="6153150"/>
-            <a:ext cx="619125" cy="342900"/>
+          <p:cNvPr id="4" name="AAPL example / illustrative amounts">
+            <a:extLst xmlns:a="http://schemas.openxmlformats.org/drawingml/2006/main">
+              <a:ext uri="{FF2B5EF4-FFF2-40B4-BE49-F238E27FC236}">
+                <a16:creationId xmlns:a16="http://schemas.microsoft.com/office/drawing/2014/main" id="{7AFB8675-AC98-4F12-82BA-3CCD31E27299}"/>
+              </a:ext>
+            </a:extLst>
+          </p:cNvPr>
+          <p:cNvSpPr>
+            <a:spLocks xmlns:a="http://schemas.openxmlformats.org/drawingml/2006/main" noGrp="1"/>
+          </p:cNvSpPr>
+          <p:nvPr/>
+        </p:nvSpPr>
+        <p:spPr>
+          <a:xfrm xmlns:a="http://schemas.openxmlformats.org/drawingml/2006/main">
+            <a:off x="3905250" y="6153150"/>
+            <a:ext cx="6667500" cy="342900"/>
           </a:xfrm>
           <a:prstGeom xmlns:a="http://schemas.openxmlformats.org/drawingml/2006/main" prst="rect">
             <a:avLst/>
@@ -7168,6 +7325,63 @@
           </a:bodyPr>
           <a:lstStyle xmlns:a="http://schemas.openxmlformats.org/drawingml/2006/main"/>
           <a:p xmlns:a="http://schemas.openxmlformats.org/drawingml/2006/main">
+            <a:pPr algn="l">
+              <a:defRPr sz="1275" b="0">
+                <a:solidFill>
+                  <a:srgbClr val="A8A8B2"/>
+                </a:solidFill>
+                <a:latin typeface="Arial"/>
+                <a:ea typeface="Arial"/>
+                <a:cs typeface="Arial"/>
+              </a:defRPr>
+            </a:pPr>
+            <a:r>
+              <a:rPr sz="1275" b="0">
+                <a:solidFill>
+                  <a:srgbClr val="A8A8B2"/>
+                </a:solidFill>
+                <a:latin typeface="Arial"/>
+                <a:ea typeface="Arial"/>
+                <a:cs typeface="Arial"/>
+              </a:rPr>
+              <a:t>AAPL example / illustrative amounts</a:t>
+            </a:r>
+          </a:p>
+        </p:txBody>
+      </p:sp>
+      <p:sp>
+        <p:nvSpPr>
+          <p:cNvPr id="5" name="11">
+            <a:extLst xmlns:a="http://schemas.openxmlformats.org/drawingml/2006/main">
+              <a:ext uri="{FF2B5EF4-FFF2-40B4-BE49-F238E27FC236}">
+                <a16:creationId xmlns:a16="http://schemas.microsoft.com/office/drawing/2014/main" id="{755F2D8E-B850-4D1D-8150-F85C515D098A}"/>
+              </a:ext>
+            </a:extLst>
+          </p:cNvPr>
+          <p:cNvSpPr>
+            <a:spLocks xmlns:a="http://schemas.openxmlformats.org/drawingml/2006/main" noGrp="1"/>
+          </p:cNvSpPr>
+          <p:nvPr/>
+        </p:nvSpPr>
+        <p:spPr>
+          <a:xfrm xmlns:a="http://schemas.openxmlformats.org/drawingml/2006/main">
+            <a:off x="11001375" y="6153150"/>
+            <a:ext cx="619125" cy="342900"/>
+          </a:xfrm>
+          <a:prstGeom xmlns:a="http://schemas.openxmlformats.org/drawingml/2006/main" prst="rect">
+            <a:avLst/>
+          </a:prstGeom>
+          <a:noFill xmlns:a="http://schemas.openxmlformats.org/drawingml/2006/main"/>
+          <a:ln xmlns:a="http://schemas.openxmlformats.org/drawingml/2006/main" w="0">
+            <a:noFill/>
+          </a:ln>
+        </p:spPr>
+        <p:txBody>
+          <a:bodyPr xmlns:a="http://schemas.openxmlformats.org/drawingml/2006/main" wrap="none" lIns="0" tIns="0" rIns="0" bIns="0" anchor="ctr">
+            <a:noAutofit/>
+          </a:bodyPr>
+          <a:lstStyle xmlns:a="http://schemas.openxmlformats.org/drawingml/2006/main"/>
+          <a:p xmlns:a="http://schemas.openxmlformats.org/drawingml/2006/main">
             <a:pPr algn="r">
               <a:defRPr sz="1275" b="0">
                 <a:solidFill>
@@ -7194,7 +7408,7 @@
       </p:sp>
       <p:graphicFrame>
         <p:nvGraphicFramePr>
-          <p:cNvPr id="11" name=""/>
+          <p:cNvPr id="13" name=""/>
           <p:cNvGraphicFramePr/>
           <p:nvPr/>
         </p:nvGraphicFramePr>
@@ -7768,10 +7982,10 @@
       </p:graphicFrame>
       <p:sp>
         <p:nvSpPr>
-          <p:cNvPr id="6" name="Available quote ≠ guaranteed execution">
-            <a:extLst xmlns:a="http://schemas.openxmlformats.org/drawingml/2006/main">
-              <a:ext uri="{FF2B5EF4-FFF2-40B4-BE49-F238E27FC236}">
-                <a16:creationId xmlns:a16="http://schemas.microsoft.com/office/drawing/2014/main" id="{9ACFCF12-84FD-4FB7-B394-E310CAA86587}"/>
+          <p:cNvPr id="7" name="Available quote ≠ guaranteed execution">
+            <a:extLst xmlns:a="http://schemas.openxmlformats.org/drawingml/2006/main">
+              <a:ext uri="{FF2B5EF4-FFF2-40B4-BE49-F238E27FC236}">
+                <a16:creationId xmlns:a16="http://schemas.microsoft.com/office/drawing/2014/main" id="{8A763D86-B25E-448C-9CBD-DB9DE87534BF}"/>
               </a:ext>
             </a:extLst>
           </p:cNvPr>
@@ -7826,7 +8040,7 @@
     </p:spTree>
     <p:extLst>
       <p:ext uri="{BB962C8B-B14F-4D97-AF65-F5344CB8AC3E}">
-        <p14:creationId xmlns:p14="http://schemas.microsoft.com/office/powerpoint/2010/main" val="655904230"/>
+        <p14:creationId xmlns:p14="http://schemas.microsoft.com/office/powerpoint/2010/main" val="1180946330"/>
       </p:ext>
     </p:extLst>
   </p:cSld>
@@ -7854,10 +8068,10 @@
       </p:grpSpPr>
       <p:sp>
         <p:nvSpPr>
-          <p:cNvPr id="11" name="Exercise, close and premium return">
-            <a:extLst xmlns:a="http://schemas.openxmlformats.org/drawingml/2006/main">
-              <a:ext uri="{FF2B5EF4-FFF2-40B4-BE49-F238E27FC236}">
-                <a16:creationId xmlns:a16="http://schemas.microsoft.com/office/drawing/2014/main" id="{B34E202A-F73B-49BE-A19E-C3565574303C}"/>
+          <p:cNvPr id="12" name="Exercise, close and premium return">
+            <a:extLst xmlns:a="http://schemas.openxmlformats.org/drawingml/2006/main">
+              <a:ext uri="{FF2B5EF4-FFF2-40B4-BE49-F238E27FC236}">
+                <a16:creationId xmlns:a16="http://schemas.microsoft.com/office/drawing/2014/main" id="{D0C1C4BF-C3E0-44C2-BFB5-9C456F722CD8}"/>
               </a:ext>
             </a:extLst>
           </p:cNvPr>
@@ -7911,14 +8125,14 @@
       </p:sp>
       <p:pic>
         <p:nvPicPr>
-          <p:cNvPr id="12" name=""/>
+          <p:cNvPr id="13" name=""/>
           <p:cNvPicPr>
             <a:picLocks xmlns:a="http://schemas.openxmlformats.org/drawingml/2006/main" noChangeAspect="1"/>
           </p:cNvPicPr>
           <p:nvPr/>
         </p:nvPicPr>
         <p:blipFill>
-          <a:blip xmlns:r="http://schemas.openxmlformats.org/officeDocument/2006/relationships" xmlns:a="http://schemas.openxmlformats.org/drawingml/2006/main" r:embed="Rb70a666ca0014b67"/>
+          <a:blip xmlns:r="http://schemas.openxmlformats.org/officeDocument/2006/relationships" xmlns:a="http://schemas.openxmlformats.org/drawingml/2006/main" r:embed="R8cdf6733998f4e3e"/>
           <a:stretch xmlns:a="http://schemas.openxmlformats.org/drawingml/2006/main"/>
         </p:blipFill>
         <p:spPr>
@@ -7936,7 +8150,7 @@
           <p:cNvPr id="3" name="Vexi Hakari">
             <a:extLst xmlns:a="http://schemas.openxmlformats.org/drawingml/2006/main">
               <a:ext uri="{FF2B5EF4-FFF2-40B4-BE49-F238E27FC236}">
-                <a16:creationId xmlns:a16="http://schemas.microsoft.com/office/drawing/2014/main" id="{E385830C-09D9-466E-87AE-1B1F83FC2A5D}"/>
+                <a16:creationId xmlns:a16="http://schemas.microsoft.com/office/drawing/2014/main" id="{BF92BCBE-C133-4BDE-B8BF-16B8A6E77EF8}"/>
               </a:ext>
             </a:extLst>
           </p:cNvPr>
@@ -7990,22 +8204,22 @@
       </p:sp>
       <p:sp>
         <p:nvSpPr>
-          <p:cNvPr id="4" name="12">
-            <a:extLst xmlns:a="http://schemas.openxmlformats.org/drawingml/2006/main">
-              <a:ext uri="{FF2B5EF4-FFF2-40B4-BE49-F238E27FC236}">
-                <a16:creationId xmlns:a16="http://schemas.microsoft.com/office/drawing/2014/main" id="{24152097-1A07-4104-B292-5B06A1DD83CE}"/>
-              </a:ext>
-            </a:extLst>
-          </p:cNvPr>
-          <p:cNvSpPr>
-            <a:spLocks xmlns:a="http://schemas.openxmlformats.org/drawingml/2006/main" noGrp="1"/>
-          </p:cNvSpPr>
-          <p:nvPr/>
-        </p:nvSpPr>
-        <p:spPr>
-          <a:xfrm xmlns:a="http://schemas.openxmlformats.org/drawingml/2006/main">
-            <a:off x="11001375" y="6153150"/>
-            <a:ext cx="619125" cy="342900"/>
+          <p:cNvPr id="4" name="AAPL example / illustrative amounts">
+            <a:extLst xmlns:a="http://schemas.openxmlformats.org/drawingml/2006/main">
+              <a:ext uri="{FF2B5EF4-FFF2-40B4-BE49-F238E27FC236}">
+                <a16:creationId xmlns:a16="http://schemas.microsoft.com/office/drawing/2014/main" id="{D87E49E7-B6AC-4CF6-96EB-AA3B656FEFE6}"/>
+              </a:ext>
+            </a:extLst>
+          </p:cNvPr>
+          <p:cNvSpPr>
+            <a:spLocks xmlns:a="http://schemas.openxmlformats.org/drawingml/2006/main" noGrp="1"/>
+          </p:cNvSpPr>
+          <p:nvPr/>
+        </p:nvSpPr>
+        <p:spPr>
+          <a:xfrm xmlns:a="http://schemas.openxmlformats.org/drawingml/2006/main">
+            <a:off x="3905250" y="6153150"/>
+            <a:ext cx="6667500" cy="342900"/>
           </a:xfrm>
           <a:prstGeom xmlns:a="http://schemas.openxmlformats.org/drawingml/2006/main" prst="rect">
             <a:avLst/>
@@ -8021,7 +8235,7 @@
           </a:bodyPr>
           <a:lstStyle xmlns:a="http://schemas.openxmlformats.org/drawingml/2006/main"/>
           <a:p xmlns:a="http://schemas.openxmlformats.org/drawingml/2006/main">
-            <a:pPr algn="r">
+            <a:pPr algn="l">
               <a:defRPr sz="1275" b="0">
                 <a:solidFill>
                   <a:srgbClr val="A8A8B2"/>
@@ -8040,29 +8254,29 @@
                 <a:ea typeface="Arial"/>
                 <a:cs typeface="Arial"/>
               </a:rPr>
-              <a:t>12</a:t>
-            </a:r>
-          </a:p>
-        </p:txBody>
-      </p:sp>
-      <p:sp>
-        <p:nvSpPr>
-          <p:cNvPr id="5" name="3 puts: deliver 3 TSLA, receive 1,200 USDG">
-            <a:extLst xmlns:a="http://schemas.openxmlformats.org/drawingml/2006/main">
-              <a:ext uri="{FF2B5EF4-FFF2-40B4-BE49-F238E27FC236}">
-                <a16:creationId xmlns:a16="http://schemas.microsoft.com/office/drawing/2014/main" id="{AF194318-3BE9-43F4-A223-C6146D98E16C}"/>
-              </a:ext>
-            </a:extLst>
-          </p:cNvPr>
-          <p:cNvSpPr>
-            <a:spLocks xmlns:a="http://schemas.openxmlformats.org/drawingml/2006/main" noGrp="1"/>
-          </p:cNvSpPr>
-          <p:nvPr/>
-        </p:nvSpPr>
-        <p:spPr>
-          <a:xfrm xmlns:a="http://schemas.openxmlformats.org/drawingml/2006/main">
-            <a:off x="647700" y="1381125"/>
-            <a:ext cx="10991850" cy="523875"/>
+              <a:t>AAPL example / illustrative amounts</a:t>
+            </a:r>
+          </a:p>
+        </p:txBody>
+      </p:sp>
+      <p:sp>
+        <p:nvSpPr>
+          <p:cNvPr id="5" name="12">
+            <a:extLst xmlns:a="http://schemas.openxmlformats.org/drawingml/2006/main">
+              <a:ext uri="{FF2B5EF4-FFF2-40B4-BE49-F238E27FC236}">
+                <a16:creationId xmlns:a16="http://schemas.microsoft.com/office/drawing/2014/main" id="{61347DC0-06B9-4DAA-BF59-0C67D70C701B}"/>
+              </a:ext>
+            </a:extLst>
+          </p:cNvPr>
+          <p:cNvSpPr>
+            <a:spLocks xmlns:a="http://schemas.openxmlformats.org/drawingml/2006/main" noGrp="1"/>
+          </p:cNvSpPr>
+          <p:nvPr/>
+        </p:nvSpPr>
+        <p:spPr>
+          <a:xfrm xmlns:a="http://schemas.openxmlformats.org/drawingml/2006/main">
+            <a:off x="11001375" y="6153150"/>
+            <a:ext cx="619125" cy="342900"/>
           </a:xfrm>
           <a:prstGeom xmlns:a="http://schemas.openxmlformats.org/drawingml/2006/main" prst="rect">
             <a:avLst/>
@@ -8078,48 +8292,48 @@
           </a:bodyPr>
           <a:lstStyle xmlns:a="http://schemas.openxmlformats.org/drawingml/2006/main"/>
           <a:p xmlns:a="http://schemas.openxmlformats.org/drawingml/2006/main">
-            <a:pPr algn="l">
-              <a:defRPr sz="2475" b="1">
-                <a:solidFill>
-                  <a:srgbClr val="37D67A"/>
-                </a:solidFill>
-                <a:latin typeface="Arial"/>
-                <a:ea typeface="Arial"/>
-                <a:cs typeface="Arial"/>
-              </a:defRPr>
-            </a:pPr>
-            <a:r>
-              <a:rPr sz="2475" b="1">
-                <a:solidFill>
-                  <a:srgbClr val="37D67A"/>
-                </a:solidFill>
-                <a:latin typeface="Arial"/>
-                <a:ea typeface="Arial"/>
-                <a:cs typeface="Arial"/>
-              </a:rPr>
-              <a:t>3 puts: deliver 3 TSLA, receive 1,200 USDG</a:t>
-            </a:r>
-          </a:p>
-        </p:txBody>
-      </p:sp>
-      <p:sp>
-        <p:nvSpPr>
-          <p:cNvPr id="6" name="Book TSLA">
-            <a:extLst xmlns:a="http://schemas.openxmlformats.org/drawingml/2006/main">
-              <a:ext uri="{FF2B5EF4-FFF2-40B4-BE49-F238E27FC236}">
-                <a16:creationId xmlns:a16="http://schemas.microsoft.com/office/drawing/2014/main" id="{B90FF23D-A6C7-4B71-B3B3-A95D881BCD47}"/>
-              </a:ext>
-            </a:extLst>
-          </p:cNvPr>
-          <p:cNvSpPr>
-            <a:spLocks xmlns:a="http://schemas.openxmlformats.org/drawingml/2006/main" noGrp="1"/>
-          </p:cNvSpPr>
-          <p:nvPr/>
-        </p:nvSpPr>
-        <p:spPr>
-          <a:xfrm xmlns:a="http://schemas.openxmlformats.org/drawingml/2006/main">
-            <a:off x="676275" y="2209800"/>
-            <a:ext cx="5286375" cy="438150"/>
+            <a:pPr algn="r">
+              <a:defRPr sz="1275" b="0">
+                <a:solidFill>
+                  <a:srgbClr val="A8A8B2"/>
+                </a:solidFill>
+                <a:latin typeface="Arial"/>
+                <a:ea typeface="Arial"/>
+                <a:cs typeface="Arial"/>
+              </a:defRPr>
+            </a:pPr>
+            <a:r>
+              <a:rPr sz="1275" b="0">
+                <a:solidFill>
+                  <a:srgbClr val="A8A8B2"/>
+                </a:solidFill>
+                <a:latin typeface="Arial"/>
+                <a:ea typeface="Arial"/>
+                <a:cs typeface="Arial"/>
+              </a:rPr>
+              <a:t>12</a:t>
+            </a:r>
+          </a:p>
+        </p:txBody>
+      </p:sp>
+      <p:sp>
+        <p:nvSpPr>
+          <p:cNvPr id="6" name="3 puts: deliver 3 AAPL, receive 1,200 USDG">
+            <a:extLst xmlns:a="http://schemas.openxmlformats.org/drawingml/2006/main">
+              <a:ext uri="{FF2B5EF4-FFF2-40B4-BE49-F238E27FC236}">
+                <a16:creationId xmlns:a16="http://schemas.microsoft.com/office/drawing/2014/main" id="{49EFEC0D-DC72-4A68-A164-E7E1BF47ABE9}"/>
+              </a:ext>
+            </a:extLst>
+          </p:cNvPr>
+          <p:cNvSpPr>
+            <a:spLocks xmlns:a="http://schemas.openxmlformats.org/drawingml/2006/main" noGrp="1"/>
+          </p:cNvSpPr>
+          <p:nvPr/>
+        </p:nvSpPr>
+        <p:spPr>
+          <a:xfrm xmlns:a="http://schemas.openxmlformats.org/drawingml/2006/main">
+            <a:off x="647700" y="1381125"/>
+            <a:ext cx="10991850" cy="523875"/>
           </a:xfrm>
           <a:prstGeom xmlns:a="http://schemas.openxmlformats.org/drawingml/2006/main" prst="rect">
             <a:avLst/>
@@ -8136,47 +8350,47 @@
           <a:lstStyle xmlns:a="http://schemas.openxmlformats.org/drawingml/2006/main"/>
           <a:p xmlns:a="http://schemas.openxmlformats.org/drawingml/2006/main">
             <a:pPr algn="l">
-              <a:defRPr sz="2175" b="1">
-                <a:solidFill>
-                  <a:srgbClr val="FAFAFA"/>
-                </a:solidFill>
-                <a:latin typeface="Arial"/>
-                <a:ea typeface="Arial"/>
-                <a:cs typeface="Arial"/>
-              </a:defRPr>
-            </a:pPr>
-            <a:r>
-              <a:rPr sz="2175" b="1">
-                <a:solidFill>
-                  <a:srgbClr val="FAFAFA"/>
-                </a:solidFill>
-                <a:latin typeface="Arial"/>
-                <a:ea typeface="Arial"/>
-                <a:cs typeface="Arial"/>
-              </a:rPr>
-              <a:t>Book TSLA</a:t>
-            </a:r>
-          </a:p>
-        </p:txBody>
-      </p:sp>
-      <p:sp>
-        <p:nvSpPr>
-          <p:cNvPr id="7" name="Book USDG">
-            <a:extLst xmlns:a="http://schemas.openxmlformats.org/drawingml/2006/main">
-              <a:ext uri="{FF2B5EF4-FFF2-40B4-BE49-F238E27FC236}">
-                <a16:creationId xmlns:a16="http://schemas.microsoft.com/office/drawing/2014/main" id="{620FF28E-684B-47EF-8C19-C2FAF7471EDE}"/>
-              </a:ext>
-            </a:extLst>
-          </p:cNvPr>
-          <p:cNvSpPr>
-            <a:spLocks xmlns:a="http://schemas.openxmlformats.org/drawingml/2006/main" noGrp="1"/>
-          </p:cNvSpPr>
-          <p:nvPr/>
-        </p:nvSpPr>
-        <p:spPr>
-          <a:xfrm xmlns:a="http://schemas.openxmlformats.org/drawingml/2006/main">
-            <a:off x="6524625" y="2209800"/>
-            <a:ext cx="5143500" cy="438150"/>
+              <a:defRPr sz="2475" b="1">
+                <a:solidFill>
+                  <a:srgbClr val="37D67A"/>
+                </a:solidFill>
+                <a:latin typeface="Arial"/>
+                <a:ea typeface="Arial"/>
+                <a:cs typeface="Arial"/>
+              </a:defRPr>
+            </a:pPr>
+            <a:r>
+              <a:rPr sz="2475" b="1">
+                <a:solidFill>
+                  <a:srgbClr val="37D67A"/>
+                </a:solidFill>
+                <a:latin typeface="Arial"/>
+                <a:ea typeface="Arial"/>
+                <a:cs typeface="Arial"/>
+              </a:rPr>
+              <a:t>3 puts: deliver 3 AAPL, receive 1,200 USDG</a:t>
+            </a:r>
+          </a:p>
+        </p:txBody>
+      </p:sp>
+      <p:sp>
+        <p:nvSpPr>
+          <p:cNvPr id="7" name="Book AAPL">
+            <a:extLst xmlns:a="http://schemas.openxmlformats.org/drawingml/2006/main">
+              <a:ext uri="{FF2B5EF4-FFF2-40B4-BE49-F238E27FC236}">
+                <a16:creationId xmlns:a16="http://schemas.microsoft.com/office/drawing/2014/main" id="{40CC9FEE-CD81-4A89-8D83-2D104903781C}"/>
+              </a:ext>
+            </a:extLst>
+          </p:cNvPr>
+          <p:cNvSpPr>
+            <a:spLocks xmlns:a="http://schemas.openxmlformats.org/drawingml/2006/main" noGrp="1"/>
+          </p:cNvSpPr>
+          <p:nvPr/>
+        </p:nvSpPr>
+        <p:spPr>
+          <a:xfrm xmlns:a="http://schemas.openxmlformats.org/drawingml/2006/main">
+            <a:off x="676275" y="2209800"/>
+            <a:ext cx="5286375" cy="438150"/>
           </a:xfrm>
           <a:prstGeom xmlns:a="http://schemas.openxmlformats.org/drawingml/2006/main" prst="rect">
             <a:avLst/>
@@ -8211,6 +8425,63 @@
                 <a:ea typeface="Arial"/>
                 <a:cs typeface="Arial"/>
               </a:rPr>
+              <a:t>Book AAPL</a:t>
+            </a:r>
+          </a:p>
+        </p:txBody>
+      </p:sp>
+      <p:sp>
+        <p:nvSpPr>
+          <p:cNvPr id="8" name="Book USDG">
+            <a:extLst xmlns:a="http://schemas.openxmlformats.org/drawingml/2006/main">
+              <a:ext uri="{FF2B5EF4-FFF2-40B4-BE49-F238E27FC236}">
+                <a16:creationId xmlns:a16="http://schemas.microsoft.com/office/drawing/2014/main" id="{516E221E-53BC-4012-A9AF-049EA9C82E8E}"/>
+              </a:ext>
+            </a:extLst>
+          </p:cNvPr>
+          <p:cNvSpPr>
+            <a:spLocks xmlns:a="http://schemas.openxmlformats.org/drawingml/2006/main" noGrp="1"/>
+          </p:cNvSpPr>
+          <p:nvPr/>
+        </p:nvSpPr>
+        <p:spPr>
+          <a:xfrm xmlns:a="http://schemas.openxmlformats.org/drawingml/2006/main">
+            <a:off x="6524625" y="2209800"/>
+            <a:ext cx="5143500" cy="438150"/>
+          </a:xfrm>
+          <a:prstGeom xmlns:a="http://schemas.openxmlformats.org/drawingml/2006/main" prst="rect">
+            <a:avLst/>
+          </a:prstGeom>
+          <a:noFill xmlns:a="http://schemas.openxmlformats.org/drawingml/2006/main"/>
+          <a:ln xmlns:a="http://schemas.openxmlformats.org/drawingml/2006/main" w="0">
+            <a:noFill/>
+          </a:ln>
+        </p:spPr>
+        <p:txBody>
+          <a:bodyPr xmlns:a="http://schemas.openxmlformats.org/drawingml/2006/main" wrap="none" lIns="0" tIns="0" rIns="0" bIns="0" anchor="ctr">
+            <a:noAutofit/>
+          </a:bodyPr>
+          <a:lstStyle xmlns:a="http://schemas.openxmlformats.org/drawingml/2006/main"/>
+          <a:p xmlns:a="http://schemas.openxmlformats.org/drawingml/2006/main">
+            <a:pPr algn="l">
+              <a:defRPr sz="2175" b="1">
+                <a:solidFill>
+                  <a:srgbClr val="FAFAFA"/>
+                </a:solidFill>
+                <a:latin typeface="Arial"/>
+                <a:ea typeface="Arial"/>
+                <a:cs typeface="Arial"/>
+              </a:defRPr>
+            </a:pPr>
+            <a:r>
+              <a:rPr sz="2175" b="1">
+                <a:solidFill>
+                  <a:srgbClr val="FAFAFA"/>
+                </a:solidFill>
+                <a:latin typeface="Arial"/>
+                <a:ea typeface="Arial"/>
+                <a:cs typeface="Arial"/>
+              </a:rPr>
               <a:t>Book USDG</a:t>
             </a:r>
           </a:p>
@@ -8218,7 +8489,7 @@
       </p:sp>
       <p:graphicFrame>
         <p:nvGraphicFramePr>
-          <p:cNvPr id="18" name="Chart"/>
+          <p:cNvPr id="20" name="Chart"/>
           <p:cNvGraphicFramePr/>
           <p:nvPr/>
         </p:nvGraphicFramePr>
@@ -8228,13 +8499,13 @@
         </p:xfrm>
         <a:graphic xmlns:a="http://schemas.openxmlformats.org/drawingml/2006/main">
           <a:graphicData uri="http://schemas.openxmlformats.org/drawingml/2006/chart">
-            <c:chart xmlns:r="http://schemas.openxmlformats.org/officeDocument/2006/relationships" xmlns:c="http://schemas.openxmlformats.org/drawingml/2006/chart" r:id="Rdc46a0ef1da547ad"/>
+            <c:chart xmlns:r="http://schemas.openxmlformats.org/officeDocument/2006/relationships" xmlns:c="http://schemas.openxmlformats.org/drawingml/2006/chart" r:id="Rce84acccfcdb4544"/>
           </a:graphicData>
         </a:graphic>
       </p:graphicFrame>
       <p:graphicFrame>
         <p:nvGraphicFramePr>
-          <p:cNvPr id="19" name="Chart"/>
+          <p:cNvPr id="21" name="Chart"/>
           <p:cNvGraphicFramePr/>
           <p:nvPr/>
         </p:nvGraphicFramePr>
@@ -8244,16 +8515,16 @@
         </p:xfrm>
         <a:graphic xmlns:a="http://schemas.openxmlformats.org/drawingml/2006/main">
           <a:graphicData uri="http://schemas.openxmlformats.org/drawingml/2006/chart">
-            <c:chart xmlns:r="http://schemas.openxmlformats.org/officeDocument/2006/relationships" xmlns:c="http://schemas.openxmlformats.org/drawingml/2006/chart" r:id="Rdf0782221e97402d"/>
+            <c:chart xmlns:r="http://schemas.openxmlformats.org/officeDocument/2006/relationships" xmlns:c="http://schemas.openxmlformats.org/drawingml/2006/chart" r:id="Re4ba92444624440b"/>
           </a:graphicData>
         </a:graphic>
       </p:graphicFrame>
       <p:sp>
         <p:nvSpPr>
-          <p:cNvPr id="10" name="Accepted price ≈378.269 &lt; strike 400. Calls OTM. Close and c">
-            <a:extLst xmlns:a="http://schemas.openxmlformats.org/drawingml/2006/main">
-              <a:ext uri="{FF2B5EF4-FFF2-40B4-BE49-F238E27FC236}">
-                <a16:creationId xmlns:a16="http://schemas.microsoft.com/office/drawing/2014/main" id="{BF8B11C4-1974-424F-93C8-6E59B05213FC}"/>
+          <p:cNvPr id="11" name="Illustrative price ≈378.269 &lt; strike 400. Calls OTM. Close a">
+            <a:extLst xmlns:a="http://schemas.openxmlformats.org/drawingml/2006/main">
+              <a:ext uri="{FF2B5EF4-FFF2-40B4-BE49-F238E27FC236}">
+                <a16:creationId xmlns:a16="http://schemas.microsoft.com/office/drawing/2014/main" id="{8BC64F16-152F-47A5-817E-88CB77B4AAE7}"/>
               </a:ext>
             </a:extLst>
           </p:cNvPr>
@@ -8300,7 +8571,7 @@
                 <a:ea typeface="Arial"/>
                 <a:cs typeface="Arial"/>
               </a:rPr>
-              <a:t>Accepted price ≈378.269 &lt; strike 400. Calls OTM. Close and claim are separate.</a:t>
+              <a:t>Illustrative price ≈378.269 &lt; strike 400. Calls OTM. Close and claim are separate.</a:t>
             </a:r>
           </a:p>
         </p:txBody>
@@ -8308,7 +8579,7 @@
     </p:spTree>
     <p:extLst>
       <p:ext uri="{BB962C8B-B14F-4D97-AF65-F5344CB8AC3E}">
-        <p14:creationId xmlns:p14="http://schemas.microsoft.com/office/powerpoint/2010/main" val="319290510"/>
+        <p14:creationId xmlns:p14="http://schemas.microsoft.com/office/powerpoint/2010/main" val="2141753124"/>
       </p:ext>
     </p:extLst>
   </p:cSld>
@@ -8336,10 +8607,10 @@
       </p:grpSpPr>
       <p:sp>
         <p:nvSpPr>
-          <p:cNvPr id="19" name="Four checks in the contract replay">
-            <a:extLst xmlns:a="http://schemas.openxmlformats.org/drawingml/2006/main">
-              <a:ext uri="{FF2B5EF4-FFF2-40B4-BE49-F238E27FC236}">
-                <a16:creationId xmlns:a16="http://schemas.microsoft.com/office/drawing/2014/main" id="{99CAC79A-5AF8-42EF-8F41-7216708B1F66}"/>
+          <p:cNvPr id="20" name="Four checks in the contract replay">
+            <a:extLst xmlns:a="http://schemas.openxmlformats.org/drawingml/2006/main">
+              <a:ext uri="{FF2B5EF4-FFF2-40B4-BE49-F238E27FC236}">
+                <a16:creationId xmlns:a16="http://schemas.microsoft.com/office/drawing/2014/main" id="{5792E985-0353-4E19-9402-DF9992B1E8DC}"/>
               </a:ext>
             </a:extLst>
           </p:cNvPr>
@@ -8393,14 +8664,14 @@
       </p:sp>
       <p:pic>
         <p:nvPicPr>
-          <p:cNvPr id="20" name=""/>
+          <p:cNvPr id="21" name=""/>
           <p:cNvPicPr>
             <a:picLocks xmlns:a="http://schemas.openxmlformats.org/drawingml/2006/main" noChangeAspect="1"/>
           </p:cNvPicPr>
           <p:nvPr/>
         </p:nvPicPr>
         <p:blipFill>
-          <a:blip xmlns:r="http://schemas.openxmlformats.org/officeDocument/2006/relationships" xmlns:a="http://schemas.openxmlformats.org/drawingml/2006/main" r:embed="R7c0cad10566a47f5"/>
+          <a:blip xmlns:r="http://schemas.openxmlformats.org/officeDocument/2006/relationships" xmlns:a="http://schemas.openxmlformats.org/drawingml/2006/main" r:embed="Rcfe684ed920041f5"/>
           <a:stretch xmlns:a="http://schemas.openxmlformats.org/drawingml/2006/main"/>
         </p:blipFill>
         <p:spPr>
@@ -8418,7 +8689,7 @@
           <p:cNvPr id="3" name="Vexi Hakari">
             <a:extLst xmlns:a="http://schemas.openxmlformats.org/drawingml/2006/main">
               <a:ext uri="{FF2B5EF4-FFF2-40B4-BE49-F238E27FC236}">
-                <a16:creationId xmlns:a16="http://schemas.microsoft.com/office/drawing/2014/main" id="{158346D2-9F9C-4B18-917B-CB55E6835061}"/>
+                <a16:creationId xmlns:a16="http://schemas.microsoft.com/office/drawing/2014/main" id="{E588881F-3ABE-4430-BE13-36A21AD9A6B7}"/>
               </a:ext>
             </a:extLst>
           </p:cNvPr>
@@ -8472,22 +8743,22 @@
       </p:sp>
       <p:sp>
         <p:nvSpPr>
-          <p:cNvPr id="4" name="13">
-            <a:extLst xmlns:a="http://schemas.openxmlformats.org/drawingml/2006/main">
-              <a:ext uri="{FF2B5EF4-FFF2-40B4-BE49-F238E27FC236}">
-                <a16:creationId xmlns:a16="http://schemas.microsoft.com/office/drawing/2014/main" id="{0340088C-08E8-4397-A78F-2B2EB6654B34}"/>
-              </a:ext>
-            </a:extLst>
-          </p:cNvPr>
-          <p:cNvSpPr>
-            <a:spLocks xmlns:a="http://schemas.openxmlformats.org/drawingml/2006/main" noGrp="1"/>
-          </p:cNvSpPr>
-          <p:nvPr/>
-        </p:nvSpPr>
-        <p:spPr>
-          <a:xfrm xmlns:a="http://schemas.openxmlformats.org/drawingml/2006/main">
-            <a:off x="11001375" y="6153150"/>
-            <a:ext cx="619125" cy="342900"/>
+          <p:cNvPr id="4" name="AAPL example / illustrative amounts">
+            <a:extLst xmlns:a="http://schemas.openxmlformats.org/drawingml/2006/main">
+              <a:ext uri="{FF2B5EF4-FFF2-40B4-BE49-F238E27FC236}">
+                <a16:creationId xmlns:a16="http://schemas.microsoft.com/office/drawing/2014/main" id="{899852EB-A524-4AB2-9690-139FA4AB04D5}"/>
+              </a:ext>
+            </a:extLst>
+          </p:cNvPr>
+          <p:cNvSpPr>
+            <a:spLocks xmlns:a="http://schemas.openxmlformats.org/drawingml/2006/main" noGrp="1"/>
+          </p:cNvSpPr>
+          <p:nvPr/>
+        </p:nvSpPr>
+        <p:spPr>
+          <a:xfrm xmlns:a="http://schemas.openxmlformats.org/drawingml/2006/main">
+            <a:off x="3905250" y="6153150"/>
+            <a:ext cx="6667500" cy="342900"/>
           </a:xfrm>
           <a:prstGeom xmlns:a="http://schemas.openxmlformats.org/drawingml/2006/main" prst="rect">
             <a:avLst/>
@@ -8503,7 +8774,7 @@
           </a:bodyPr>
           <a:lstStyle xmlns:a="http://schemas.openxmlformats.org/drawingml/2006/main"/>
           <a:p xmlns:a="http://schemas.openxmlformats.org/drawingml/2006/main">
-            <a:pPr algn="r">
+            <a:pPr algn="l">
               <a:defRPr sz="1275" b="0">
                 <a:solidFill>
                   <a:srgbClr val="A8A8B2"/>
@@ -8522,29 +8793,29 @@
                 <a:ea typeface="Arial"/>
                 <a:cs typeface="Arial"/>
               </a:rPr>
-              <a:t>13</a:t>
-            </a:r>
-          </a:p>
-        </p:txBody>
-      </p:sp>
-      <p:sp>
-        <p:nvSpPr>
-          <p:cNvPr id="5" name="05">
-            <a:extLst xmlns:a="http://schemas.openxmlformats.org/drawingml/2006/main">
-              <a:ext uri="{FF2B5EF4-FFF2-40B4-BE49-F238E27FC236}">
-                <a16:creationId xmlns:a16="http://schemas.microsoft.com/office/drawing/2014/main" id="{D9353091-AA72-4518-9776-DB90FCBB7461}"/>
-              </a:ext>
-            </a:extLst>
-          </p:cNvPr>
-          <p:cNvSpPr>
-            <a:spLocks xmlns:a="http://schemas.openxmlformats.org/drawingml/2006/main" noGrp="1"/>
-          </p:cNvSpPr>
-          <p:nvPr/>
-        </p:nvSpPr>
-        <p:spPr>
-          <a:xfrm xmlns:a="http://schemas.openxmlformats.org/drawingml/2006/main">
-            <a:off x="685800" y="1962150"/>
-            <a:ext cx="2333625" cy="1209675"/>
+              <a:t>AAPL example / illustrative amounts</a:t>
+            </a:r>
+          </a:p>
+        </p:txBody>
+      </p:sp>
+      <p:sp>
+        <p:nvSpPr>
+          <p:cNvPr id="5" name="13">
+            <a:extLst xmlns:a="http://schemas.openxmlformats.org/drawingml/2006/main">
+              <a:ext uri="{FF2B5EF4-FFF2-40B4-BE49-F238E27FC236}">
+                <a16:creationId xmlns:a16="http://schemas.microsoft.com/office/drawing/2014/main" id="{184E16E7-608D-4FE5-9176-D67B7B6DE458}"/>
+              </a:ext>
+            </a:extLst>
+          </p:cNvPr>
+          <p:cNvSpPr>
+            <a:spLocks xmlns:a="http://schemas.openxmlformats.org/drawingml/2006/main" noGrp="1"/>
+          </p:cNvSpPr>
+          <p:nvPr/>
+        </p:nvSpPr>
+        <p:spPr>
+          <a:xfrm xmlns:a="http://schemas.openxmlformats.org/drawingml/2006/main">
+            <a:off x="11001375" y="6153150"/>
+            <a:ext cx="619125" cy="342900"/>
           </a:xfrm>
           <a:prstGeom xmlns:a="http://schemas.openxmlformats.org/drawingml/2006/main" prst="rect">
             <a:avLst/>
@@ -8560,48 +8831,48 @@
           </a:bodyPr>
           <a:lstStyle xmlns:a="http://schemas.openxmlformats.org/drawingml/2006/main"/>
           <a:p xmlns:a="http://schemas.openxmlformats.org/drawingml/2006/main">
-            <a:pPr algn="l">
-              <a:defRPr sz="7200" b="1">
-                <a:solidFill>
-                  <a:srgbClr val="37D67A"/>
-                </a:solidFill>
-                <a:latin typeface="Arial"/>
-                <a:ea typeface="Arial"/>
-                <a:cs typeface="Arial"/>
-              </a:defRPr>
-            </a:pPr>
-            <a:r>
-              <a:rPr sz="7200" b="1">
-                <a:solidFill>
-                  <a:srgbClr val="37D67A"/>
-                </a:solidFill>
-                <a:latin typeface="Arial"/>
-                <a:ea typeface="Arial"/>
-                <a:cs typeface="Arial"/>
-              </a:rPr>
-              <a:t>05</a:t>
-            </a:r>
-          </a:p>
-        </p:txBody>
-      </p:sp>
-      <p:sp>
-        <p:nvSpPr>
-          <p:cNvPr id="6" name="Collateral in">
-            <a:extLst xmlns:a="http://schemas.openxmlformats.org/drawingml/2006/main">
-              <a:ext uri="{FF2B5EF4-FFF2-40B4-BE49-F238E27FC236}">
-                <a16:creationId xmlns:a16="http://schemas.microsoft.com/office/drawing/2014/main" id="{6C313149-E8BB-49DB-9351-73F9516CF697}"/>
-              </a:ext>
-            </a:extLst>
-          </p:cNvPr>
-          <p:cNvSpPr>
-            <a:spLocks xmlns:a="http://schemas.openxmlformats.org/drawingml/2006/main" noGrp="1"/>
-          </p:cNvSpPr>
-          <p:nvPr/>
-        </p:nvSpPr>
-        <p:spPr>
-          <a:xfrm xmlns:a="http://schemas.openxmlformats.org/drawingml/2006/main">
-            <a:off x="685800" y="3486150"/>
-            <a:ext cx="2428875" cy="476250"/>
+            <a:pPr algn="r">
+              <a:defRPr sz="1275" b="0">
+                <a:solidFill>
+                  <a:srgbClr val="A8A8B2"/>
+                </a:solidFill>
+                <a:latin typeface="Arial"/>
+                <a:ea typeface="Arial"/>
+                <a:cs typeface="Arial"/>
+              </a:defRPr>
+            </a:pPr>
+            <a:r>
+              <a:rPr sz="1275" b="0">
+                <a:solidFill>
+                  <a:srgbClr val="A8A8B2"/>
+                </a:solidFill>
+                <a:latin typeface="Arial"/>
+                <a:ea typeface="Arial"/>
+                <a:cs typeface="Arial"/>
+              </a:rPr>
+              <a:t>13</a:t>
+            </a:r>
+          </a:p>
+        </p:txBody>
+      </p:sp>
+      <p:sp>
+        <p:nvSpPr>
+          <p:cNvPr id="6" name="05">
+            <a:extLst xmlns:a="http://schemas.openxmlformats.org/drawingml/2006/main">
+              <a:ext uri="{FF2B5EF4-FFF2-40B4-BE49-F238E27FC236}">
+                <a16:creationId xmlns:a16="http://schemas.microsoft.com/office/drawing/2014/main" id="{2668BDBE-9E23-4436-A53F-B1880AEEB15A}"/>
+              </a:ext>
+            </a:extLst>
+          </p:cNvPr>
+          <p:cNvSpPr>
+            <a:spLocks xmlns:a="http://schemas.openxmlformats.org/drawingml/2006/main" noGrp="1"/>
+          </p:cNvSpPr>
+          <p:nvPr/>
+        </p:nvSpPr>
+        <p:spPr>
+          <a:xfrm xmlns:a="http://schemas.openxmlformats.org/drawingml/2006/main">
+            <a:off x="685800" y="1962150"/>
+            <a:ext cx="2333625" cy="1209675"/>
           </a:xfrm>
           <a:prstGeom xmlns:a="http://schemas.openxmlformats.org/drawingml/2006/main" prst="rect">
             <a:avLst/>
@@ -8618,47 +8889,47 @@
           <a:lstStyle xmlns:a="http://schemas.openxmlformats.org/drawingml/2006/main"/>
           <a:p xmlns:a="http://schemas.openxmlformats.org/drawingml/2006/main">
             <a:pPr algn="l">
-              <a:defRPr sz="2100" b="1">
-                <a:solidFill>
-                  <a:srgbClr val="FAFAFA"/>
-                </a:solidFill>
-                <a:latin typeface="Arial"/>
-                <a:ea typeface="Arial"/>
-                <a:cs typeface="Arial"/>
-              </a:defRPr>
-            </a:pPr>
-            <a:r>
-              <a:rPr sz="2100" b="1">
-                <a:solidFill>
-                  <a:srgbClr val="FAFAFA"/>
-                </a:solidFill>
-                <a:latin typeface="Arial"/>
-                <a:ea typeface="Arial"/>
-                <a:cs typeface="Arial"/>
-              </a:rPr>
-              <a:t>Collateral in</a:t>
-            </a:r>
-          </a:p>
-        </p:txBody>
-      </p:sp>
-      <p:sp>
-        <p:nvSpPr>
-          <p:cNvPr id="7" name="5 TSLA">
-            <a:extLst xmlns:a="http://schemas.openxmlformats.org/drawingml/2006/main">
-              <a:ext uri="{FF2B5EF4-FFF2-40B4-BE49-F238E27FC236}">
-                <a16:creationId xmlns:a16="http://schemas.microsoft.com/office/drawing/2014/main" id="{4DAACDB1-1206-4A2F-9D7A-0195DEB3BED4}"/>
-              </a:ext>
-            </a:extLst>
-          </p:cNvPr>
-          <p:cNvSpPr>
-            <a:spLocks xmlns:a="http://schemas.openxmlformats.org/drawingml/2006/main" noGrp="1"/>
-          </p:cNvSpPr>
-          <p:nvPr/>
-        </p:nvSpPr>
-        <p:spPr>
-          <a:xfrm xmlns:a="http://schemas.openxmlformats.org/drawingml/2006/main">
-            <a:off x="685800" y="4086225"/>
-            <a:ext cx="2428875" cy="438150"/>
+              <a:defRPr sz="7200" b="1">
+                <a:solidFill>
+                  <a:srgbClr val="37D67A"/>
+                </a:solidFill>
+                <a:latin typeface="Arial"/>
+                <a:ea typeface="Arial"/>
+                <a:cs typeface="Arial"/>
+              </a:defRPr>
+            </a:pPr>
+            <a:r>
+              <a:rPr sz="7200" b="1">
+                <a:solidFill>
+                  <a:srgbClr val="37D67A"/>
+                </a:solidFill>
+                <a:latin typeface="Arial"/>
+                <a:ea typeface="Arial"/>
+                <a:cs typeface="Arial"/>
+              </a:rPr>
+              <a:t>05</a:t>
+            </a:r>
+          </a:p>
+        </p:txBody>
+      </p:sp>
+      <p:sp>
+        <p:nvSpPr>
+          <p:cNvPr id="7" name="Collateral in">
+            <a:extLst xmlns:a="http://schemas.openxmlformats.org/drawingml/2006/main">
+              <a:ext uri="{FF2B5EF4-FFF2-40B4-BE49-F238E27FC236}">
+                <a16:creationId xmlns:a16="http://schemas.microsoft.com/office/drawing/2014/main" id="{9C5F952F-7B1B-45BA-A6B2-3CD3E3F6BBC0}"/>
+              </a:ext>
+            </a:extLst>
+          </p:cNvPr>
+          <p:cNvSpPr>
+            <a:spLocks xmlns:a="http://schemas.openxmlformats.org/drawingml/2006/main" noGrp="1"/>
+          </p:cNvSpPr>
+          <p:nvPr/>
+        </p:nvSpPr>
+        <p:spPr>
+          <a:xfrm xmlns:a="http://schemas.openxmlformats.org/drawingml/2006/main">
+            <a:off x="685800" y="3486150"/>
+            <a:ext cx="2428875" cy="476250"/>
           </a:xfrm>
           <a:prstGeom xmlns:a="http://schemas.openxmlformats.org/drawingml/2006/main" prst="rect">
             <a:avLst/>
@@ -8675,47 +8946,47 @@
           <a:lstStyle xmlns:a="http://schemas.openxmlformats.org/drawingml/2006/main"/>
           <a:p xmlns:a="http://schemas.openxmlformats.org/drawingml/2006/main">
             <a:pPr algn="l">
-              <a:defRPr sz="1875" b="0">
-                <a:solidFill>
-                  <a:srgbClr val="A8A8B2"/>
-                </a:solidFill>
-                <a:latin typeface="Arial"/>
-                <a:ea typeface="Arial"/>
-                <a:cs typeface="Arial"/>
-              </a:defRPr>
-            </a:pPr>
-            <a:r>
-              <a:rPr sz="1875" b="0">
-                <a:solidFill>
-                  <a:srgbClr val="A8A8B2"/>
-                </a:solidFill>
-                <a:latin typeface="Arial"/>
-                <a:ea typeface="Arial"/>
-                <a:cs typeface="Arial"/>
-              </a:rPr>
-              <a:t>5 TSLA</a:t>
-            </a:r>
-          </a:p>
-        </p:txBody>
-      </p:sp>
-      <p:sp>
-        <p:nvSpPr>
-          <p:cNvPr id="8" name="07">
-            <a:extLst xmlns:a="http://schemas.openxmlformats.org/drawingml/2006/main">
-              <a:ext uri="{FF2B5EF4-FFF2-40B4-BE49-F238E27FC236}">
-                <a16:creationId xmlns:a16="http://schemas.microsoft.com/office/drawing/2014/main" id="{E8479AEF-2ACE-4CC2-B5D7-640A825CCF44}"/>
-              </a:ext>
-            </a:extLst>
-          </p:cNvPr>
-          <p:cNvSpPr>
-            <a:spLocks xmlns:a="http://schemas.openxmlformats.org/drawingml/2006/main" noGrp="1"/>
-          </p:cNvSpPr>
-          <p:nvPr/>
-        </p:nvSpPr>
-        <p:spPr>
-          <a:xfrm xmlns:a="http://schemas.openxmlformats.org/drawingml/2006/main">
-            <a:off x="3590925" y="1962150"/>
-            <a:ext cx="2333625" cy="1209675"/>
+              <a:defRPr sz="2100" b="1">
+                <a:solidFill>
+                  <a:srgbClr val="FAFAFA"/>
+                </a:solidFill>
+                <a:latin typeface="Arial"/>
+                <a:ea typeface="Arial"/>
+                <a:cs typeface="Arial"/>
+              </a:defRPr>
+            </a:pPr>
+            <a:r>
+              <a:rPr sz="2100" b="1">
+                <a:solidFill>
+                  <a:srgbClr val="FAFAFA"/>
+                </a:solidFill>
+                <a:latin typeface="Arial"/>
+                <a:ea typeface="Arial"/>
+                <a:cs typeface="Arial"/>
+              </a:rPr>
+              <a:t>Collateral in</a:t>
+            </a:r>
+          </a:p>
+        </p:txBody>
+      </p:sp>
+      <p:sp>
+        <p:nvSpPr>
+          <p:cNvPr id="8" name="5 AAPL">
+            <a:extLst xmlns:a="http://schemas.openxmlformats.org/drawingml/2006/main">
+              <a:ext uri="{FF2B5EF4-FFF2-40B4-BE49-F238E27FC236}">
+                <a16:creationId xmlns:a16="http://schemas.microsoft.com/office/drawing/2014/main" id="{3D2B60A1-9A1F-4F92-BC51-8EFCAFE3D66C}"/>
+              </a:ext>
+            </a:extLst>
+          </p:cNvPr>
+          <p:cNvSpPr>
+            <a:spLocks xmlns:a="http://schemas.openxmlformats.org/drawingml/2006/main" noGrp="1"/>
+          </p:cNvSpPr>
+          <p:nvPr/>
+        </p:nvSpPr>
+        <p:spPr>
+          <a:xfrm xmlns:a="http://schemas.openxmlformats.org/drawingml/2006/main">
+            <a:off x="685800" y="4086225"/>
+            <a:ext cx="2428875" cy="438150"/>
           </a:xfrm>
           <a:prstGeom xmlns:a="http://schemas.openxmlformats.org/drawingml/2006/main" prst="rect">
             <a:avLst/>
@@ -8732,47 +9003,47 @@
           <a:lstStyle xmlns:a="http://schemas.openxmlformats.org/drawingml/2006/main"/>
           <a:p xmlns:a="http://schemas.openxmlformats.org/drawingml/2006/main">
             <a:pPr algn="l">
-              <a:defRPr sz="7200" b="1">
-                <a:solidFill>
-                  <a:srgbClr val="FF5470"/>
-                </a:solidFill>
-                <a:latin typeface="Arial"/>
-                <a:ea typeface="Arial"/>
-                <a:cs typeface="Arial"/>
-              </a:defRPr>
-            </a:pPr>
-            <a:r>
-              <a:rPr sz="7200" b="1">
-                <a:solidFill>
-                  <a:srgbClr val="FF5470"/>
-                </a:solidFill>
-                <a:latin typeface="Arial"/>
-                <a:ea typeface="Arial"/>
-                <a:cs typeface="Arial"/>
-              </a:rPr>
-              <a:t>07</a:t>
-            </a:r>
-          </a:p>
-        </p:txBody>
-      </p:sp>
-      <p:sp>
-        <p:nvSpPr>
-          <p:cNvPr id="9" name="Band refusal">
-            <a:extLst xmlns:a="http://schemas.openxmlformats.org/drawingml/2006/main">
-              <a:ext uri="{FF2B5EF4-FFF2-40B4-BE49-F238E27FC236}">
-                <a16:creationId xmlns:a16="http://schemas.microsoft.com/office/drawing/2014/main" id="{BFCE5736-4A99-4EC0-946A-E7E101A43DA6}"/>
-              </a:ext>
-            </a:extLst>
-          </p:cNvPr>
-          <p:cNvSpPr>
-            <a:spLocks xmlns:a="http://schemas.openxmlformats.org/drawingml/2006/main" noGrp="1"/>
-          </p:cNvSpPr>
-          <p:nvPr/>
-        </p:nvSpPr>
-        <p:spPr>
-          <a:xfrm xmlns:a="http://schemas.openxmlformats.org/drawingml/2006/main">
-            <a:off x="3590925" y="3486150"/>
-            <a:ext cx="2428875" cy="476250"/>
+              <a:defRPr sz="1875" b="0">
+                <a:solidFill>
+                  <a:srgbClr val="A8A8B2"/>
+                </a:solidFill>
+                <a:latin typeface="Arial"/>
+                <a:ea typeface="Arial"/>
+                <a:cs typeface="Arial"/>
+              </a:defRPr>
+            </a:pPr>
+            <a:r>
+              <a:rPr sz="1875" b="0">
+                <a:solidFill>
+                  <a:srgbClr val="A8A8B2"/>
+                </a:solidFill>
+                <a:latin typeface="Arial"/>
+                <a:ea typeface="Arial"/>
+                <a:cs typeface="Arial"/>
+              </a:rPr>
+              <a:t>5 AAPL</a:t>
+            </a:r>
+          </a:p>
+        </p:txBody>
+      </p:sp>
+      <p:sp>
+        <p:nvSpPr>
+          <p:cNvPr id="9" name="07">
+            <a:extLst xmlns:a="http://schemas.openxmlformats.org/drawingml/2006/main">
+              <a:ext uri="{FF2B5EF4-FFF2-40B4-BE49-F238E27FC236}">
+                <a16:creationId xmlns:a16="http://schemas.microsoft.com/office/drawing/2014/main" id="{A681447C-AF24-4AE0-949A-515A592EBF69}"/>
+              </a:ext>
+            </a:extLst>
+          </p:cNvPr>
+          <p:cNvSpPr>
+            <a:spLocks xmlns:a="http://schemas.openxmlformats.org/drawingml/2006/main" noGrp="1"/>
+          </p:cNvSpPr>
+          <p:nvPr/>
+        </p:nvSpPr>
+        <p:spPr>
+          <a:xfrm xmlns:a="http://schemas.openxmlformats.org/drawingml/2006/main">
+            <a:off x="3590925" y="1962150"/>
+            <a:ext cx="2333625" cy="1209675"/>
           </a:xfrm>
           <a:prstGeom xmlns:a="http://schemas.openxmlformats.org/drawingml/2006/main" prst="rect">
             <a:avLst/>
@@ -8789,47 +9060,47 @@
           <a:lstStyle xmlns:a="http://schemas.openxmlformats.org/drawingml/2006/main"/>
           <a:p xmlns:a="http://schemas.openxmlformats.org/drawingml/2006/main">
             <a:pPr algn="l">
-              <a:defRPr sz="2100" b="1">
-                <a:solidFill>
-                  <a:srgbClr val="FAFAFA"/>
-                </a:solidFill>
-                <a:latin typeface="Arial"/>
-                <a:ea typeface="Arial"/>
-                <a:cs typeface="Arial"/>
-              </a:defRPr>
-            </a:pPr>
-            <a:r>
-              <a:rPr sz="2100" b="1">
-                <a:solidFill>
-                  <a:srgbClr val="FAFAFA"/>
-                </a:solidFill>
-                <a:latin typeface="Arial"/>
-                <a:ea typeface="Arial"/>
-                <a:cs typeface="Arial"/>
-              </a:rPr>
-              <a:t>Band refusal</a:t>
-            </a:r>
-          </a:p>
-        </p:txBody>
-      </p:sp>
-      <p:sp>
-        <p:nvSpPr>
-          <p:cNvPr id="10" name="No token change">
-            <a:extLst xmlns:a="http://schemas.openxmlformats.org/drawingml/2006/main">
-              <a:ext uri="{FF2B5EF4-FFF2-40B4-BE49-F238E27FC236}">
-                <a16:creationId xmlns:a16="http://schemas.microsoft.com/office/drawing/2014/main" id="{69D7231C-DEAE-41F0-A430-0967FCBC6B5A}"/>
-              </a:ext>
-            </a:extLst>
-          </p:cNvPr>
-          <p:cNvSpPr>
-            <a:spLocks xmlns:a="http://schemas.openxmlformats.org/drawingml/2006/main" noGrp="1"/>
-          </p:cNvSpPr>
-          <p:nvPr/>
-        </p:nvSpPr>
-        <p:spPr>
-          <a:xfrm xmlns:a="http://schemas.openxmlformats.org/drawingml/2006/main">
-            <a:off x="3590925" y="4086225"/>
-            <a:ext cx="2428875" cy="438150"/>
+              <a:defRPr sz="7200" b="1">
+                <a:solidFill>
+                  <a:srgbClr val="FF5470"/>
+                </a:solidFill>
+                <a:latin typeface="Arial"/>
+                <a:ea typeface="Arial"/>
+                <a:cs typeface="Arial"/>
+              </a:defRPr>
+            </a:pPr>
+            <a:r>
+              <a:rPr sz="7200" b="1">
+                <a:solidFill>
+                  <a:srgbClr val="FF5470"/>
+                </a:solidFill>
+                <a:latin typeface="Arial"/>
+                <a:ea typeface="Arial"/>
+                <a:cs typeface="Arial"/>
+              </a:rPr>
+              <a:t>07</a:t>
+            </a:r>
+          </a:p>
+        </p:txBody>
+      </p:sp>
+      <p:sp>
+        <p:nvSpPr>
+          <p:cNvPr id="10" name="Band refusal">
+            <a:extLst xmlns:a="http://schemas.openxmlformats.org/drawingml/2006/main">
+              <a:ext uri="{FF2B5EF4-FFF2-40B4-BE49-F238E27FC236}">
+                <a16:creationId xmlns:a16="http://schemas.microsoft.com/office/drawing/2014/main" id="{697B45F1-5CD3-4032-AB96-3349801E71AA}"/>
+              </a:ext>
+            </a:extLst>
+          </p:cNvPr>
+          <p:cNvSpPr>
+            <a:spLocks xmlns:a="http://schemas.openxmlformats.org/drawingml/2006/main" noGrp="1"/>
+          </p:cNvSpPr>
+          <p:nvPr/>
+        </p:nvSpPr>
+        <p:spPr>
+          <a:xfrm xmlns:a="http://schemas.openxmlformats.org/drawingml/2006/main">
+            <a:off x="3590925" y="3486150"/>
+            <a:ext cx="2428875" cy="476250"/>
           </a:xfrm>
           <a:prstGeom xmlns:a="http://schemas.openxmlformats.org/drawingml/2006/main" prst="rect">
             <a:avLst/>
@@ -8846,47 +9117,47 @@
           <a:lstStyle xmlns:a="http://schemas.openxmlformats.org/drawingml/2006/main"/>
           <a:p xmlns:a="http://schemas.openxmlformats.org/drawingml/2006/main">
             <a:pPr algn="l">
-              <a:defRPr sz="1875" b="0">
-                <a:solidFill>
-                  <a:srgbClr val="A8A8B2"/>
-                </a:solidFill>
-                <a:latin typeface="Arial"/>
-                <a:ea typeface="Arial"/>
-                <a:cs typeface="Arial"/>
-              </a:defRPr>
-            </a:pPr>
-            <a:r>
-              <a:rPr sz="1875" b="0">
-                <a:solidFill>
-                  <a:srgbClr val="A8A8B2"/>
-                </a:solidFill>
-                <a:latin typeface="Arial"/>
-                <a:ea typeface="Arial"/>
-                <a:cs typeface="Arial"/>
-              </a:rPr>
-              <a:t>No token change</a:t>
-            </a:r>
-          </a:p>
-        </p:txBody>
-      </p:sp>
-      <p:sp>
-        <p:nvSpPr>
-          <p:cNvPr id="11" name="09">
-            <a:extLst xmlns:a="http://schemas.openxmlformats.org/drawingml/2006/main">
-              <a:ext uri="{FF2B5EF4-FFF2-40B4-BE49-F238E27FC236}">
-                <a16:creationId xmlns:a16="http://schemas.microsoft.com/office/drawing/2014/main" id="{A7681CE9-A63E-450C-BBAB-AD324D9889DF}"/>
-              </a:ext>
-            </a:extLst>
-          </p:cNvPr>
-          <p:cNvSpPr>
-            <a:spLocks xmlns:a="http://schemas.openxmlformats.org/drawingml/2006/main" noGrp="1"/>
-          </p:cNvSpPr>
-          <p:nvPr/>
-        </p:nvSpPr>
-        <p:spPr>
-          <a:xfrm xmlns:a="http://schemas.openxmlformats.org/drawingml/2006/main">
-            <a:off x="6496050" y="1962150"/>
-            <a:ext cx="2333625" cy="1209675"/>
+              <a:defRPr sz="2100" b="1">
+                <a:solidFill>
+                  <a:srgbClr val="FAFAFA"/>
+                </a:solidFill>
+                <a:latin typeface="Arial"/>
+                <a:ea typeface="Arial"/>
+                <a:cs typeface="Arial"/>
+              </a:defRPr>
+            </a:pPr>
+            <a:r>
+              <a:rPr sz="2100" b="1">
+                <a:solidFill>
+                  <a:srgbClr val="FAFAFA"/>
+                </a:solidFill>
+                <a:latin typeface="Arial"/>
+                <a:ea typeface="Arial"/>
+                <a:cs typeface="Arial"/>
+              </a:rPr>
+              <a:t>Band refusal</a:t>
+            </a:r>
+          </a:p>
+        </p:txBody>
+      </p:sp>
+      <p:sp>
+        <p:nvSpPr>
+          <p:cNvPr id="11" name="No token change">
+            <a:extLst xmlns:a="http://schemas.openxmlformats.org/drawingml/2006/main">
+              <a:ext uri="{FF2B5EF4-FFF2-40B4-BE49-F238E27FC236}">
+                <a16:creationId xmlns:a16="http://schemas.microsoft.com/office/drawing/2014/main" id="{7BA7AE59-1CAF-456E-BBFA-032C44E47F8D}"/>
+              </a:ext>
+            </a:extLst>
+          </p:cNvPr>
+          <p:cNvSpPr>
+            <a:spLocks xmlns:a="http://schemas.openxmlformats.org/drawingml/2006/main" noGrp="1"/>
+          </p:cNvSpPr>
+          <p:nvPr/>
+        </p:nvSpPr>
+        <p:spPr>
+          <a:xfrm xmlns:a="http://schemas.openxmlformats.org/drawingml/2006/main">
+            <a:off x="3590925" y="4086225"/>
+            <a:ext cx="2428875" cy="438150"/>
           </a:xfrm>
           <a:prstGeom xmlns:a="http://schemas.openxmlformats.org/drawingml/2006/main" prst="rect">
             <a:avLst/>
@@ -8903,47 +9174,47 @@
           <a:lstStyle xmlns:a="http://schemas.openxmlformats.org/drawingml/2006/main"/>
           <a:p xmlns:a="http://schemas.openxmlformats.org/drawingml/2006/main">
             <a:pPr algn="l">
-              <a:defRPr sz="7200" b="1">
-                <a:solidFill>
-                  <a:srgbClr val="FF5470"/>
-                </a:solidFill>
-                <a:latin typeface="Arial"/>
-                <a:ea typeface="Arial"/>
-                <a:cs typeface="Arial"/>
-              </a:defRPr>
-            </a:pPr>
-            <a:r>
-              <a:rPr sz="7200" b="1">
-                <a:solidFill>
-                  <a:srgbClr val="FF5470"/>
-                </a:solidFill>
-                <a:latin typeface="Arial"/>
-                <a:ea typeface="Arial"/>
-                <a:cs typeface="Arial"/>
-              </a:rPr>
-              <a:t>09</a:t>
-            </a:r>
-          </a:p>
-        </p:txBody>
-      </p:sp>
-      <p:sp>
-        <p:nvSpPr>
-          <p:cNvPr id="12" name="Quote expiry">
-            <a:extLst xmlns:a="http://schemas.openxmlformats.org/drawingml/2006/main">
-              <a:ext uri="{FF2B5EF4-FFF2-40B4-BE49-F238E27FC236}">
-                <a16:creationId xmlns:a16="http://schemas.microsoft.com/office/drawing/2014/main" id="{C2E744A7-6579-4AFF-A45E-710418542F88}"/>
-              </a:ext>
-            </a:extLst>
-          </p:cNvPr>
-          <p:cNvSpPr>
-            <a:spLocks xmlns:a="http://schemas.openxmlformats.org/drawingml/2006/main" noGrp="1"/>
-          </p:cNvSpPr>
-          <p:nvPr/>
-        </p:nvSpPr>
-        <p:spPr>
-          <a:xfrm xmlns:a="http://schemas.openxmlformats.org/drawingml/2006/main">
-            <a:off x="6496050" y="3486150"/>
-            <a:ext cx="2428875" cy="476250"/>
+              <a:defRPr sz="1875" b="0">
+                <a:solidFill>
+                  <a:srgbClr val="A8A8B2"/>
+                </a:solidFill>
+                <a:latin typeface="Arial"/>
+                <a:ea typeface="Arial"/>
+                <a:cs typeface="Arial"/>
+              </a:defRPr>
+            </a:pPr>
+            <a:r>
+              <a:rPr sz="1875" b="0">
+                <a:solidFill>
+                  <a:srgbClr val="A8A8B2"/>
+                </a:solidFill>
+                <a:latin typeface="Arial"/>
+                <a:ea typeface="Arial"/>
+                <a:cs typeface="Arial"/>
+              </a:rPr>
+              <a:t>No token change</a:t>
+            </a:r>
+          </a:p>
+        </p:txBody>
+      </p:sp>
+      <p:sp>
+        <p:nvSpPr>
+          <p:cNvPr id="12" name="09">
+            <a:extLst xmlns:a="http://schemas.openxmlformats.org/drawingml/2006/main">
+              <a:ext uri="{FF2B5EF4-FFF2-40B4-BE49-F238E27FC236}">
+                <a16:creationId xmlns:a16="http://schemas.microsoft.com/office/drawing/2014/main" id="{F7674700-466B-4A59-A6F6-7B58C865E945}"/>
+              </a:ext>
+            </a:extLst>
+          </p:cNvPr>
+          <p:cNvSpPr>
+            <a:spLocks xmlns:a="http://schemas.openxmlformats.org/drawingml/2006/main" noGrp="1"/>
+          </p:cNvSpPr>
+          <p:nvPr/>
+        </p:nvSpPr>
+        <p:spPr>
+          <a:xfrm xmlns:a="http://schemas.openxmlformats.org/drawingml/2006/main">
+            <a:off x="6496050" y="1962150"/>
+            <a:ext cx="2333625" cy="1209675"/>
           </a:xfrm>
           <a:prstGeom xmlns:a="http://schemas.openxmlformats.org/drawingml/2006/main" prst="rect">
             <a:avLst/>
@@ -8960,47 +9231,47 @@
           <a:lstStyle xmlns:a="http://schemas.openxmlformats.org/drawingml/2006/main"/>
           <a:p xmlns:a="http://schemas.openxmlformats.org/drawingml/2006/main">
             <a:pPr algn="l">
-              <a:defRPr sz="2100" b="1">
-                <a:solidFill>
-                  <a:srgbClr val="FAFAFA"/>
-                </a:solidFill>
-                <a:latin typeface="Arial"/>
-                <a:ea typeface="Arial"/>
-                <a:cs typeface="Arial"/>
-              </a:defRPr>
-            </a:pPr>
-            <a:r>
-              <a:rPr sz="2100" b="1">
-                <a:solidFill>
-                  <a:srgbClr val="FAFAFA"/>
-                </a:solidFill>
-                <a:latin typeface="Arial"/>
-                <a:ea typeface="Arial"/>
-                <a:cs typeface="Arial"/>
-              </a:rPr>
-              <a:t>Quote expiry</a:t>
-            </a:r>
-          </a:p>
-        </p:txBody>
-      </p:sp>
-      <p:sp>
-        <p:nvSpPr>
-          <p:cNvPr id="13" name="Maker renews">
-            <a:extLst xmlns:a="http://schemas.openxmlformats.org/drawingml/2006/main">
-              <a:ext uri="{FF2B5EF4-FFF2-40B4-BE49-F238E27FC236}">
-                <a16:creationId xmlns:a16="http://schemas.microsoft.com/office/drawing/2014/main" id="{3EF4B3D8-D098-49A5-A3D5-A1626640FC16}"/>
-              </a:ext>
-            </a:extLst>
-          </p:cNvPr>
-          <p:cNvSpPr>
-            <a:spLocks xmlns:a="http://schemas.openxmlformats.org/drawingml/2006/main" noGrp="1"/>
-          </p:cNvSpPr>
-          <p:nvPr/>
-        </p:nvSpPr>
-        <p:spPr>
-          <a:xfrm xmlns:a="http://schemas.openxmlformats.org/drawingml/2006/main">
-            <a:off x="6496050" y="4086225"/>
-            <a:ext cx="2428875" cy="438150"/>
+              <a:defRPr sz="7200" b="1">
+                <a:solidFill>
+                  <a:srgbClr val="FF5470"/>
+                </a:solidFill>
+                <a:latin typeface="Arial"/>
+                <a:ea typeface="Arial"/>
+                <a:cs typeface="Arial"/>
+              </a:defRPr>
+            </a:pPr>
+            <a:r>
+              <a:rPr sz="7200" b="1">
+                <a:solidFill>
+                  <a:srgbClr val="FF5470"/>
+                </a:solidFill>
+                <a:latin typeface="Arial"/>
+                <a:ea typeface="Arial"/>
+                <a:cs typeface="Arial"/>
+              </a:rPr>
+              <a:t>09</a:t>
+            </a:r>
+          </a:p>
+        </p:txBody>
+      </p:sp>
+      <p:sp>
+        <p:nvSpPr>
+          <p:cNvPr id="13" name="Quote expiry">
+            <a:extLst xmlns:a="http://schemas.openxmlformats.org/drawingml/2006/main">
+              <a:ext uri="{FF2B5EF4-FFF2-40B4-BE49-F238E27FC236}">
+                <a16:creationId xmlns:a16="http://schemas.microsoft.com/office/drawing/2014/main" id="{C3FF6628-2581-4EC4-B6AC-856919FB5B1F}"/>
+              </a:ext>
+            </a:extLst>
+          </p:cNvPr>
+          <p:cNvSpPr>
+            <a:spLocks xmlns:a="http://schemas.openxmlformats.org/drawingml/2006/main" noGrp="1"/>
+          </p:cNvSpPr>
+          <p:nvPr/>
+        </p:nvSpPr>
+        <p:spPr>
+          <a:xfrm xmlns:a="http://schemas.openxmlformats.org/drawingml/2006/main">
+            <a:off x="6496050" y="3486150"/>
+            <a:ext cx="2428875" cy="476250"/>
           </a:xfrm>
           <a:prstGeom xmlns:a="http://schemas.openxmlformats.org/drawingml/2006/main" prst="rect">
             <a:avLst/>
@@ -9017,47 +9288,47 @@
           <a:lstStyle xmlns:a="http://schemas.openxmlformats.org/drawingml/2006/main"/>
           <a:p xmlns:a="http://schemas.openxmlformats.org/drawingml/2006/main">
             <a:pPr algn="l">
-              <a:defRPr sz="1875" b="0">
-                <a:solidFill>
-                  <a:srgbClr val="A8A8B2"/>
-                </a:solidFill>
-                <a:latin typeface="Arial"/>
-                <a:ea typeface="Arial"/>
-                <a:cs typeface="Arial"/>
-              </a:defRPr>
-            </a:pPr>
-            <a:r>
-              <a:rPr sz="1875" b="0">
-                <a:solidFill>
-                  <a:srgbClr val="A8A8B2"/>
-                </a:solidFill>
-                <a:latin typeface="Arial"/>
-                <a:ea typeface="Arial"/>
-                <a:cs typeface="Arial"/>
-              </a:rPr>
-              <a:t>Maker renews</a:t>
-            </a:r>
-          </a:p>
-        </p:txBody>
-      </p:sp>
-      <p:sp>
-        <p:nvSpPr>
-          <p:cNvPr id="14" name="14">
-            <a:extLst xmlns:a="http://schemas.openxmlformats.org/drawingml/2006/main">
-              <a:ext uri="{FF2B5EF4-FFF2-40B4-BE49-F238E27FC236}">
-                <a16:creationId xmlns:a16="http://schemas.microsoft.com/office/drawing/2014/main" id="{833985AB-EEE7-4F87-8CA5-0E79541F14B1}"/>
-              </a:ext>
-            </a:extLst>
-          </p:cNvPr>
-          <p:cNvSpPr>
-            <a:spLocks xmlns:a="http://schemas.openxmlformats.org/drawingml/2006/main" noGrp="1"/>
-          </p:cNvSpPr>
-          <p:nvPr/>
-        </p:nvSpPr>
-        <p:spPr>
-          <a:xfrm xmlns:a="http://schemas.openxmlformats.org/drawingml/2006/main">
-            <a:off x="9401175" y="1962150"/>
-            <a:ext cx="2333625" cy="1209675"/>
+              <a:defRPr sz="2100" b="1">
+                <a:solidFill>
+                  <a:srgbClr val="FAFAFA"/>
+                </a:solidFill>
+                <a:latin typeface="Arial"/>
+                <a:ea typeface="Arial"/>
+                <a:cs typeface="Arial"/>
+              </a:defRPr>
+            </a:pPr>
+            <a:r>
+              <a:rPr sz="2100" b="1">
+                <a:solidFill>
+                  <a:srgbClr val="FAFAFA"/>
+                </a:solidFill>
+                <a:latin typeface="Arial"/>
+                <a:ea typeface="Arial"/>
+                <a:cs typeface="Arial"/>
+              </a:rPr>
+              <a:t>Quote expiry</a:t>
+            </a:r>
+          </a:p>
+        </p:txBody>
+      </p:sp>
+      <p:sp>
+        <p:nvSpPr>
+          <p:cNvPr id="14" name="Maker renews">
+            <a:extLst xmlns:a="http://schemas.openxmlformats.org/drawingml/2006/main">
+              <a:ext uri="{FF2B5EF4-FFF2-40B4-BE49-F238E27FC236}">
+                <a16:creationId xmlns:a16="http://schemas.microsoft.com/office/drawing/2014/main" id="{CDFE2B08-7C85-497F-91D5-C2BB7ADC7357}"/>
+              </a:ext>
+            </a:extLst>
+          </p:cNvPr>
+          <p:cNvSpPr>
+            <a:spLocks xmlns:a="http://schemas.openxmlformats.org/drawingml/2006/main" noGrp="1"/>
+          </p:cNvSpPr>
+          <p:nvPr/>
+        </p:nvSpPr>
+        <p:spPr>
+          <a:xfrm xmlns:a="http://schemas.openxmlformats.org/drawingml/2006/main">
+            <a:off x="6496050" y="4086225"/>
+            <a:ext cx="2428875" cy="438150"/>
           </a:xfrm>
           <a:prstGeom xmlns:a="http://schemas.openxmlformats.org/drawingml/2006/main" prst="rect">
             <a:avLst/>
@@ -9074,47 +9345,47 @@
           <a:lstStyle xmlns:a="http://schemas.openxmlformats.org/drawingml/2006/main"/>
           <a:p xmlns:a="http://schemas.openxmlformats.org/drawingml/2006/main">
             <a:pPr algn="l">
-              <a:defRPr sz="7200" b="1">
-                <a:solidFill>
-                  <a:srgbClr val="37D67A"/>
-                </a:solidFill>
-                <a:latin typeface="Arial"/>
-                <a:ea typeface="Arial"/>
-                <a:cs typeface="Arial"/>
-              </a:defRPr>
-            </a:pPr>
-            <a:r>
-              <a:rPr sz="7200" b="1">
-                <a:solidFill>
-                  <a:srgbClr val="37D67A"/>
-                </a:solidFill>
-                <a:latin typeface="Arial"/>
-                <a:ea typeface="Arial"/>
-                <a:cs typeface="Arial"/>
-              </a:rPr>
-              <a:t>14</a:t>
-            </a:r>
-          </a:p>
-        </p:txBody>
-      </p:sp>
-      <p:sp>
-        <p:nvSpPr>
-          <p:cNvPr id="15" name="Premium out">
-            <a:extLst xmlns:a="http://schemas.openxmlformats.org/drawingml/2006/main">
-              <a:ext uri="{FF2B5EF4-FFF2-40B4-BE49-F238E27FC236}">
-                <a16:creationId xmlns:a16="http://schemas.microsoft.com/office/drawing/2014/main" id="{BF775CB8-0154-457D-AB94-B685BD70C99A}"/>
-              </a:ext>
-            </a:extLst>
-          </p:cNvPr>
-          <p:cNvSpPr>
-            <a:spLocks xmlns:a="http://schemas.openxmlformats.org/drawingml/2006/main" noGrp="1"/>
-          </p:cNvSpPr>
-          <p:nvPr/>
-        </p:nvSpPr>
-        <p:spPr>
-          <a:xfrm xmlns:a="http://schemas.openxmlformats.org/drawingml/2006/main">
-            <a:off x="9401175" y="3486150"/>
-            <a:ext cx="2428875" cy="476250"/>
+              <a:defRPr sz="1875" b="0">
+                <a:solidFill>
+                  <a:srgbClr val="A8A8B2"/>
+                </a:solidFill>
+                <a:latin typeface="Arial"/>
+                <a:ea typeface="Arial"/>
+                <a:cs typeface="Arial"/>
+              </a:defRPr>
+            </a:pPr>
+            <a:r>
+              <a:rPr sz="1875" b="0">
+                <a:solidFill>
+                  <a:srgbClr val="A8A8B2"/>
+                </a:solidFill>
+                <a:latin typeface="Arial"/>
+                <a:ea typeface="Arial"/>
+                <a:cs typeface="Arial"/>
+              </a:rPr>
+              <a:t>Maker renews</a:t>
+            </a:r>
+          </a:p>
+        </p:txBody>
+      </p:sp>
+      <p:sp>
+        <p:nvSpPr>
+          <p:cNvPr id="15" name="14">
+            <a:extLst xmlns:a="http://schemas.openxmlformats.org/drawingml/2006/main">
+              <a:ext uri="{FF2B5EF4-FFF2-40B4-BE49-F238E27FC236}">
+                <a16:creationId xmlns:a16="http://schemas.microsoft.com/office/drawing/2014/main" id="{1EC7D28F-A1D7-4217-A4C1-D1690E8D026D}"/>
+              </a:ext>
+            </a:extLst>
+          </p:cNvPr>
+          <p:cNvSpPr>
+            <a:spLocks xmlns:a="http://schemas.openxmlformats.org/drawingml/2006/main" noGrp="1"/>
+          </p:cNvSpPr>
+          <p:nvPr/>
+        </p:nvSpPr>
+        <p:spPr>
+          <a:xfrm xmlns:a="http://schemas.openxmlformats.org/drawingml/2006/main">
+            <a:off x="9401175" y="1962150"/>
+            <a:ext cx="2333625" cy="1209675"/>
           </a:xfrm>
           <a:prstGeom xmlns:a="http://schemas.openxmlformats.org/drawingml/2006/main" prst="rect">
             <a:avLst/>
@@ -9131,47 +9402,47 @@
           <a:lstStyle xmlns:a="http://schemas.openxmlformats.org/drawingml/2006/main"/>
           <a:p xmlns:a="http://schemas.openxmlformats.org/drawingml/2006/main">
             <a:pPr algn="l">
-              <a:defRPr sz="2100" b="1">
-                <a:solidFill>
-                  <a:srgbClr val="FAFAFA"/>
-                </a:solidFill>
-                <a:latin typeface="Arial"/>
-                <a:ea typeface="Arial"/>
-                <a:cs typeface="Arial"/>
-              </a:defRPr>
-            </a:pPr>
-            <a:r>
-              <a:rPr sz="2100" b="1">
-                <a:solidFill>
-                  <a:srgbClr val="FAFAFA"/>
-                </a:solidFill>
-                <a:latin typeface="Arial"/>
-                <a:ea typeface="Arial"/>
-                <a:cs typeface="Arial"/>
-              </a:rPr>
-              <a:t>Premium out</a:t>
-            </a:r>
-          </a:p>
-        </p:txBody>
-      </p:sp>
-      <p:sp>
-        <p:nvSpPr>
-          <p:cNvPr id="16" name="Book = 0">
-            <a:extLst xmlns:a="http://schemas.openxmlformats.org/drawingml/2006/main">
-              <a:ext uri="{FF2B5EF4-FFF2-40B4-BE49-F238E27FC236}">
-                <a16:creationId xmlns:a16="http://schemas.microsoft.com/office/drawing/2014/main" id="{60C2DDA9-0791-40BE-901F-62D48E1D5C44}"/>
-              </a:ext>
-            </a:extLst>
-          </p:cNvPr>
-          <p:cNvSpPr>
-            <a:spLocks xmlns:a="http://schemas.openxmlformats.org/drawingml/2006/main" noGrp="1"/>
-          </p:cNvSpPr>
-          <p:nvPr/>
-        </p:nvSpPr>
-        <p:spPr>
-          <a:xfrm xmlns:a="http://schemas.openxmlformats.org/drawingml/2006/main">
-            <a:off x="9401175" y="4086225"/>
-            <a:ext cx="2428875" cy="438150"/>
+              <a:defRPr sz="7200" b="1">
+                <a:solidFill>
+                  <a:srgbClr val="37D67A"/>
+                </a:solidFill>
+                <a:latin typeface="Arial"/>
+                <a:ea typeface="Arial"/>
+                <a:cs typeface="Arial"/>
+              </a:defRPr>
+            </a:pPr>
+            <a:r>
+              <a:rPr sz="7200" b="1">
+                <a:solidFill>
+                  <a:srgbClr val="37D67A"/>
+                </a:solidFill>
+                <a:latin typeface="Arial"/>
+                <a:ea typeface="Arial"/>
+                <a:cs typeface="Arial"/>
+              </a:rPr>
+              <a:t>14</a:t>
+            </a:r>
+          </a:p>
+        </p:txBody>
+      </p:sp>
+      <p:sp>
+        <p:nvSpPr>
+          <p:cNvPr id="16" name="Premium out">
+            <a:extLst xmlns:a="http://schemas.openxmlformats.org/drawingml/2006/main">
+              <a:ext uri="{FF2B5EF4-FFF2-40B4-BE49-F238E27FC236}">
+                <a16:creationId xmlns:a16="http://schemas.microsoft.com/office/drawing/2014/main" id="{A47D71EB-0E0B-48EA-A8E5-A7773DAD32F6}"/>
+              </a:ext>
+            </a:extLst>
+          </p:cNvPr>
+          <p:cNvSpPr>
+            <a:spLocks xmlns:a="http://schemas.openxmlformats.org/drawingml/2006/main" noGrp="1"/>
+          </p:cNvSpPr>
+          <p:nvPr/>
+        </p:nvSpPr>
+        <p:spPr>
+          <a:xfrm xmlns:a="http://schemas.openxmlformats.org/drawingml/2006/main">
+            <a:off x="9401175" y="3486150"/>
+            <a:ext cx="2428875" cy="476250"/>
           </a:xfrm>
           <a:prstGeom xmlns:a="http://schemas.openxmlformats.org/drawingml/2006/main" prst="rect">
             <a:avLst/>
@@ -9188,47 +9459,47 @@
           <a:lstStyle xmlns:a="http://schemas.openxmlformats.org/drawingml/2006/main"/>
           <a:p xmlns:a="http://schemas.openxmlformats.org/drawingml/2006/main">
             <a:pPr algn="l">
-              <a:defRPr sz="1875" b="0">
-                <a:solidFill>
-                  <a:srgbClr val="A8A8B2"/>
-                </a:solidFill>
-                <a:latin typeface="Arial"/>
-                <a:ea typeface="Arial"/>
-                <a:cs typeface="Arial"/>
-              </a:defRPr>
-            </a:pPr>
-            <a:r>
-              <a:rPr sz="1875" b="0">
-                <a:solidFill>
-                  <a:srgbClr val="A8A8B2"/>
-                </a:solidFill>
-                <a:latin typeface="Arial"/>
-                <a:ea typeface="Arial"/>
-                <a:cs typeface="Arial"/>
-              </a:rPr>
-              <a:t>Book = 0</a:t>
-            </a:r>
-          </a:p>
-        </p:txBody>
-      </p:sp>
-      <p:sp>
-        <p:nvSpPr>
-          <p:cNvPr id="17" name="Open the contract replay">
-            <a:extLst xmlns:a="http://schemas.openxmlformats.org/drawingml/2006/main">
-              <a:ext uri="{FF2B5EF4-FFF2-40B4-BE49-F238E27FC236}">
-                <a16:creationId xmlns:a16="http://schemas.microsoft.com/office/drawing/2014/main" id="{504212BD-2FBD-4B09-80BC-D90660819CC4}"/>
-              </a:ext>
-            </a:extLst>
-          </p:cNvPr>
-          <p:cNvSpPr>
-            <a:spLocks xmlns:a="http://schemas.openxmlformats.org/drawingml/2006/main" noGrp="1"/>
-          </p:cNvSpPr>
-          <p:nvPr/>
-        </p:nvSpPr>
-        <p:spPr>
-          <a:xfrm xmlns:a="http://schemas.openxmlformats.org/drawingml/2006/main">
-            <a:off x="695325" y="5105400"/>
-            <a:ext cx="10858500" cy="552450"/>
+              <a:defRPr sz="2100" b="1">
+                <a:solidFill>
+                  <a:srgbClr val="FAFAFA"/>
+                </a:solidFill>
+                <a:latin typeface="Arial"/>
+                <a:ea typeface="Arial"/>
+                <a:cs typeface="Arial"/>
+              </a:defRPr>
+            </a:pPr>
+            <a:r>
+              <a:rPr sz="2100" b="1">
+                <a:solidFill>
+                  <a:srgbClr val="FAFAFA"/>
+                </a:solidFill>
+                <a:latin typeface="Arial"/>
+                <a:ea typeface="Arial"/>
+                <a:cs typeface="Arial"/>
+              </a:rPr>
+              <a:t>Premium out</a:t>
+            </a:r>
+          </a:p>
+        </p:txBody>
+      </p:sp>
+      <p:sp>
+        <p:nvSpPr>
+          <p:cNvPr id="17" name="Book = 0">
+            <a:extLst xmlns:a="http://schemas.openxmlformats.org/drawingml/2006/main">
+              <a:ext uri="{FF2B5EF4-FFF2-40B4-BE49-F238E27FC236}">
+                <a16:creationId xmlns:a16="http://schemas.microsoft.com/office/drawing/2014/main" id="{C1FC0C0F-A70C-482A-A474-5B0383696190}"/>
+              </a:ext>
+            </a:extLst>
+          </p:cNvPr>
+          <p:cNvSpPr>
+            <a:spLocks xmlns:a="http://schemas.openxmlformats.org/drawingml/2006/main" noGrp="1"/>
+          </p:cNvSpPr>
+          <p:nvPr/>
+        </p:nvSpPr>
+        <p:spPr>
+          <a:xfrm xmlns:a="http://schemas.openxmlformats.org/drawingml/2006/main">
+            <a:off x="9401175" y="4086225"/>
+            <a:ext cx="2428875" cy="438150"/>
           </a:xfrm>
           <a:prstGeom xmlns:a="http://schemas.openxmlformats.org/drawingml/2006/main" prst="rect">
             <a:avLst/>
@@ -9245,48 +9516,47 @@
           <a:lstStyle xmlns:a="http://schemas.openxmlformats.org/drawingml/2006/main"/>
           <a:p xmlns:a="http://schemas.openxmlformats.org/drawingml/2006/main">
             <a:pPr algn="l">
-              <a:defRPr sz="2550" b="0">
-                <a:solidFill>
-                  <a:srgbClr val="37D67A"/>
-                </a:solidFill>
-                <a:latin typeface="Arial"/>
-                <a:ea typeface="Arial"/>
-                <a:cs typeface="Arial"/>
-              </a:defRPr>
-            </a:pPr>
-            <a:r>
-              <a:rPr sz="2550" b="0" u="sng">
-                <a:solidFill>
-                  <a:srgbClr val="37D67A"/>
-                </a:solidFill>
-                <a:latin typeface="Arial"/>
-                <a:ea typeface="Arial"/>
-                <a:cs typeface="Arial"/>
-                <a:hlinkClick xmlns:r="http://schemas.openxmlformats.org/officeDocument/2006/relationships" r:id="R50d465fd974f4508"/>
-              </a:rPr>
-              <a:t>Open the contract replay</a:t>
-            </a:r>
-          </a:p>
-        </p:txBody>
-      </p:sp>
-      <p:sp>
-        <p:nvSpPr>
-          <p:cNvPr id="18" name="Same accounts, wallet and orders across all 15 steps">
-            <a:extLst xmlns:a="http://schemas.openxmlformats.org/drawingml/2006/main">
-              <a:ext uri="{FF2B5EF4-FFF2-40B4-BE49-F238E27FC236}">
-                <a16:creationId xmlns:a16="http://schemas.microsoft.com/office/drawing/2014/main" id="{EC138A24-6A39-48D5-9652-127F0E5ABE1D}"/>
-              </a:ext>
-            </a:extLst>
-          </p:cNvPr>
-          <p:cNvSpPr>
-            <a:spLocks xmlns:a="http://schemas.openxmlformats.org/drawingml/2006/main" noGrp="1"/>
-          </p:cNvSpPr>
-          <p:nvPr/>
-        </p:nvSpPr>
-        <p:spPr>
-          <a:xfrm xmlns:a="http://schemas.openxmlformats.org/drawingml/2006/main">
-            <a:off x="695325" y="5753100"/>
-            <a:ext cx="10839450" cy="323850"/>
+              <a:defRPr sz="1875" b="0">
+                <a:solidFill>
+                  <a:srgbClr val="A8A8B2"/>
+                </a:solidFill>
+                <a:latin typeface="Arial"/>
+                <a:ea typeface="Arial"/>
+                <a:cs typeface="Arial"/>
+              </a:defRPr>
+            </a:pPr>
+            <a:r>
+              <a:rPr sz="1875" b="0">
+                <a:solidFill>
+                  <a:srgbClr val="A8A8B2"/>
+                </a:solidFill>
+                <a:latin typeface="Arial"/>
+                <a:ea typeface="Arial"/>
+                <a:cs typeface="Arial"/>
+              </a:rPr>
+              <a:t>Book = 0</a:t>
+            </a:r>
+          </a:p>
+        </p:txBody>
+      </p:sp>
+      <p:sp>
+        <p:nvSpPr>
+          <p:cNvPr id="18" name="Open the contract replay">
+            <a:extLst xmlns:a="http://schemas.openxmlformats.org/drawingml/2006/main">
+              <a:ext uri="{FF2B5EF4-FFF2-40B4-BE49-F238E27FC236}">
+                <a16:creationId xmlns:a16="http://schemas.microsoft.com/office/drawing/2014/main" id="{AC3247EE-49B6-417A-91F5-9309C56A8245}"/>
+              </a:ext>
+            </a:extLst>
+          </p:cNvPr>
+          <p:cNvSpPr>
+            <a:spLocks xmlns:a="http://schemas.openxmlformats.org/drawingml/2006/main" noGrp="1"/>
+          </p:cNvSpPr>
+          <p:nvPr/>
+        </p:nvSpPr>
+        <p:spPr>
+          <a:xfrm xmlns:a="http://schemas.openxmlformats.org/drawingml/2006/main">
+            <a:off x="695325" y="5105400"/>
+            <a:ext cx="10858500" cy="552450"/>
           </a:xfrm>
           <a:prstGeom xmlns:a="http://schemas.openxmlformats.org/drawingml/2006/main" prst="rect">
             <a:avLst/>
@@ -9303,6 +9573,64 @@
           <a:lstStyle xmlns:a="http://schemas.openxmlformats.org/drawingml/2006/main"/>
           <a:p xmlns:a="http://schemas.openxmlformats.org/drawingml/2006/main">
             <a:pPr algn="l">
+              <a:defRPr sz="2550" b="0">
+                <a:solidFill>
+                  <a:srgbClr val="37D67A"/>
+                </a:solidFill>
+                <a:latin typeface="Arial"/>
+                <a:ea typeface="Arial"/>
+                <a:cs typeface="Arial"/>
+              </a:defRPr>
+            </a:pPr>
+            <a:r>
+              <a:rPr sz="2550" b="0" u="sng">
+                <a:solidFill>
+                  <a:srgbClr val="37D67A"/>
+                </a:solidFill>
+                <a:latin typeface="Arial"/>
+                <a:ea typeface="Arial"/>
+                <a:cs typeface="Arial"/>
+                <a:hlinkClick xmlns:r="http://schemas.openxmlformats.org/officeDocument/2006/relationships" r:id="R50647a4388154be9"/>
+              </a:rPr>
+              <a:t>Open the contract replay</a:t>
+            </a:r>
+          </a:p>
+        </p:txBody>
+      </p:sp>
+      <p:sp>
+        <p:nvSpPr>
+          <p:cNvPr id="19" name="Source replay: TSLA/USDG fixture. Slides illustrate AAPL.">
+            <a:extLst xmlns:a="http://schemas.openxmlformats.org/drawingml/2006/main">
+              <a:ext uri="{FF2B5EF4-FFF2-40B4-BE49-F238E27FC236}">
+                <a16:creationId xmlns:a16="http://schemas.microsoft.com/office/drawing/2014/main" id="{F54BD212-B44A-4FC3-86BE-1F6DBBFFA35B}"/>
+              </a:ext>
+            </a:extLst>
+          </p:cNvPr>
+          <p:cNvSpPr>
+            <a:spLocks xmlns:a="http://schemas.openxmlformats.org/drawingml/2006/main" noGrp="1"/>
+          </p:cNvSpPr>
+          <p:nvPr/>
+        </p:nvSpPr>
+        <p:spPr>
+          <a:xfrm xmlns:a="http://schemas.openxmlformats.org/drawingml/2006/main">
+            <a:off x="695325" y="5753100"/>
+            <a:ext cx="10839450" cy="323850"/>
+          </a:xfrm>
+          <a:prstGeom xmlns:a="http://schemas.openxmlformats.org/drawingml/2006/main" prst="rect">
+            <a:avLst/>
+          </a:prstGeom>
+          <a:noFill xmlns:a="http://schemas.openxmlformats.org/drawingml/2006/main"/>
+          <a:ln xmlns:a="http://schemas.openxmlformats.org/drawingml/2006/main" w="0">
+            <a:noFill/>
+          </a:ln>
+        </p:spPr>
+        <p:txBody>
+          <a:bodyPr xmlns:a="http://schemas.openxmlformats.org/drawingml/2006/main" wrap="none" lIns="0" tIns="0" rIns="0" bIns="0" anchor="ctr">
+            <a:noAutofit/>
+          </a:bodyPr>
+          <a:lstStyle xmlns:a="http://schemas.openxmlformats.org/drawingml/2006/main"/>
+          <a:p xmlns:a="http://schemas.openxmlformats.org/drawingml/2006/main">
+            <a:pPr algn="l">
               <a:defRPr sz="1725" b="0">
                 <a:solidFill>
                   <a:srgbClr val="A8A8B2"/>
@@ -9321,7 +9649,7 @@
                 <a:ea typeface="Arial"/>
                 <a:cs typeface="Arial"/>
               </a:rPr>
-              <a:t>Same accounts, wallet and orders across all 15 steps</a:t>
+              <a:t>Source replay: TSLA/USDG fixture. Slides illustrate AAPL.</a:t>
             </a:r>
           </a:p>
         </p:txBody>
@@ -9329,7 +9657,7 @@
     </p:spTree>
     <p:extLst>
       <p:ext uri="{BB962C8B-B14F-4D97-AF65-F5344CB8AC3E}">
-        <p14:creationId xmlns:p14="http://schemas.microsoft.com/office/powerpoint/2010/main" val="475231312"/>
+        <p14:creationId xmlns:p14="http://schemas.microsoft.com/office/powerpoint/2010/main" val="1816741802"/>
       </p:ext>
     </p:extLst>
   </p:cSld>
@@ -9360,7 +9688,7 @@
           <p:cNvPr id="12" name="What Vexi Hakari contributes">
             <a:extLst xmlns:a="http://schemas.openxmlformats.org/drawingml/2006/main">
               <a:ext uri="{FF2B5EF4-FFF2-40B4-BE49-F238E27FC236}">
-                <a16:creationId xmlns:a16="http://schemas.microsoft.com/office/drawing/2014/main" id="{BF631417-08A1-42BB-839D-4CE003407B00}"/>
+                <a16:creationId xmlns:a16="http://schemas.microsoft.com/office/drawing/2014/main" id="{047AD1AE-E9B4-4650-B65B-19CCD8E50F58}"/>
               </a:ext>
             </a:extLst>
           </p:cNvPr>
@@ -9421,7 +9749,7 @@
           <p:nvPr/>
         </p:nvPicPr>
         <p:blipFill>
-          <a:blip xmlns:r="http://schemas.openxmlformats.org/officeDocument/2006/relationships" xmlns:a="http://schemas.openxmlformats.org/drawingml/2006/main" r:embed="Re6e4bd4f6a2642e6"/>
+          <a:blip xmlns:r="http://schemas.openxmlformats.org/officeDocument/2006/relationships" xmlns:a="http://schemas.openxmlformats.org/drawingml/2006/main" r:embed="Rf3b762b446304d5a"/>
           <a:stretch xmlns:a="http://schemas.openxmlformats.org/drawingml/2006/main"/>
         </p:blipFill>
         <p:spPr>
@@ -9439,7 +9767,7 @@
           <p:cNvPr id="3" name="Vexi Hakari">
             <a:extLst xmlns:a="http://schemas.openxmlformats.org/drawingml/2006/main">
               <a:ext uri="{FF2B5EF4-FFF2-40B4-BE49-F238E27FC236}">
-                <a16:creationId xmlns:a16="http://schemas.microsoft.com/office/drawing/2014/main" id="{62DCA6DC-8B92-42DF-86D2-AE1DE6359422}"/>
+                <a16:creationId xmlns:a16="http://schemas.microsoft.com/office/drawing/2014/main" id="{19252AD3-B7BE-4532-BFEA-A4885F55F71E}"/>
               </a:ext>
             </a:extLst>
           </p:cNvPr>
@@ -9496,7 +9824,7 @@
           <p:cNvPr id="4" name="14">
             <a:extLst xmlns:a="http://schemas.openxmlformats.org/drawingml/2006/main">
               <a:ext uri="{FF2B5EF4-FFF2-40B4-BE49-F238E27FC236}">
-                <a16:creationId xmlns:a16="http://schemas.microsoft.com/office/drawing/2014/main" id="{B6D4A726-91DF-4F4F-8F78-68FB88BE811C}"/>
+                <a16:creationId xmlns:a16="http://schemas.microsoft.com/office/drawing/2014/main" id="{68E07EEF-E28C-41D0-8BFB-2CE22000DD9D}"/>
               </a:ext>
             </a:extLst>
           </p:cNvPr>
@@ -9553,7 +9881,7 @@
           <p:cNvPr id="5" name="1inch Aqua + SwapVM">
             <a:extLst xmlns:a="http://schemas.openxmlformats.org/drawingml/2006/main">
               <a:ext uri="{FF2B5EF4-FFF2-40B4-BE49-F238E27FC236}">
-                <a16:creationId xmlns:a16="http://schemas.microsoft.com/office/drawing/2014/main" id="{26D0CC0D-F57B-4EFC-B963-586F942DAB00}"/>
+                <a16:creationId xmlns:a16="http://schemas.microsoft.com/office/drawing/2014/main" id="{6CA62349-D82E-44FF-8893-2DC103CD2A16}"/>
               </a:ext>
             </a:extLst>
           </p:cNvPr>
@@ -9610,7 +9938,7 @@
           <p:cNvPr id="6" name="Collateral at fill. Shared inventory guard.">
             <a:extLst xmlns:a="http://schemas.openxmlformats.org/drawingml/2006/main">
               <a:ext uri="{FF2B5EF4-FFF2-40B4-BE49-F238E27FC236}">
-                <a16:creationId xmlns:a16="http://schemas.microsoft.com/office/drawing/2014/main" id="{AC7077E6-C269-49F4-9584-CC907ABF436F}"/>
+                <a16:creationId xmlns:a16="http://schemas.microsoft.com/office/drawing/2014/main" id="{3BB8AC48-4A3B-45FC-B83D-F8986C6FABD8}"/>
               </a:ext>
             </a:extLst>
           </p:cNvPr>
@@ -9667,7 +9995,7 @@
           <p:cNvPr id="7" name="">
             <a:extLst xmlns:a="http://schemas.openxmlformats.org/drawingml/2006/main">
               <a:ext uri="{FF2B5EF4-FFF2-40B4-BE49-F238E27FC236}">
-                <a16:creationId xmlns:a16="http://schemas.microsoft.com/office/drawing/2014/main" id="{CC26D135-DF4A-46DD-BA51-B9ADDBFBC468}"/>
+                <a16:creationId xmlns:a16="http://schemas.microsoft.com/office/drawing/2014/main" id="{04704B29-F3B5-44FE-B235-DC617BE47F26}"/>
               </a:ext>
             </a:extLst>
           </p:cNvPr>
@@ -9697,7 +10025,7 @@
           <p:cNvPr id="8" name="Uniswap v4">
             <a:extLst xmlns:a="http://schemas.openxmlformats.org/drawingml/2006/main">
               <a:ext uri="{FF2B5EF4-FFF2-40B4-BE49-F238E27FC236}">
-                <a16:creationId xmlns:a16="http://schemas.microsoft.com/office/drawing/2014/main" id="{CC4D7E32-30AA-43FC-BF66-E40DA1FC7936}"/>
+                <a16:creationId xmlns:a16="http://schemas.microsoft.com/office/drawing/2014/main" id="{0A4F32B5-2DA1-4CF6-9075-4AB3C20691BA}"/>
               </a:ext>
             </a:extLst>
           </p:cNvPr>
@@ -9754,7 +10082,7 @@
           <p:cNvPr id="9" name="Hook observations change real option fills.">
             <a:extLst xmlns:a="http://schemas.openxmlformats.org/drawingml/2006/main">
               <a:ext uri="{FF2B5EF4-FFF2-40B4-BE49-F238E27FC236}">
-                <a16:creationId xmlns:a16="http://schemas.microsoft.com/office/drawing/2014/main" id="{D68F7E3B-9F39-4680-9471-EB1480E7948D}"/>
+                <a16:creationId xmlns:a16="http://schemas.microsoft.com/office/drawing/2014/main" id="{288475E5-BECF-4A1A-B12E-58A071FE16CB}"/>
               </a:ext>
             </a:extLst>
           </p:cNvPr>
@@ -9811,7 +10139,7 @@
           <p:cNvPr id="10" name="github.com/vexi-v1/vexi-hakari">
             <a:extLst xmlns:a="http://schemas.openxmlformats.org/drawingml/2006/main">
               <a:ext uri="{FF2B5EF4-FFF2-40B4-BE49-F238E27FC236}">
-                <a16:creationId xmlns:a16="http://schemas.microsoft.com/office/drawing/2014/main" id="{63B81020-62AA-49B9-BD0A-B09A51410007}"/>
+                <a16:creationId xmlns:a16="http://schemas.microsoft.com/office/drawing/2014/main" id="{4F346801-C404-457C-A013-F06B59C6295B}"/>
               </a:ext>
             </a:extLst>
           </p:cNvPr>
@@ -9857,7 +10185,7 @@
                 <a:latin typeface="Arial"/>
                 <a:ea typeface="Arial"/>
                 <a:cs typeface="Arial"/>
-                <a:hlinkClick xmlns:r="http://schemas.openxmlformats.org/officeDocument/2006/relationships" r:id="Rfd9c8259eee54ace"/>
+                <a:hlinkClick xmlns:r="http://schemas.openxmlformats.org/officeDocument/2006/relationships" r:id="R0d4e345c3fee4c0d"/>
               </a:rPr>
               <a:t>github.com/vexi-v1/vexi-hakari</a:t>
             </a:r>
@@ -9869,7 +10197,7 @@
           <p:cNvPr id="11" name="Public fork evidence. Hook + pool recorded on testnet.">
             <a:extLst xmlns:a="http://schemas.openxmlformats.org/drawingml/2006/main">
               <a:ext uri="{FF2B5EF4-FFF2-40B4-BE49-F238E27FC236}">
-                <a16:creationId xmlns:a16="http://schemas.microsoft.com/office/drawing/2014/main" id="{63275B11-418C-4F56-BF6F-A5A3FCB27BD4}"/>
+                <a16:creationId xmlns:a16="http://schemas.microsoft.com/office/drawing/2014/main" id="{FDFC9349-2C69-4465-BDEB-FAD7DD905F82}"/>
               </a:ext>
             </a:extLst>
           </p:cNvPr>
@@ -9924,7 +10252,7 @@
     </p:spTree>
     <p:extLst>
       <p:ext uri="{BB962C8B-B14F-4D97-AF65-F5344CB8AC3E}">
-        <p14:creationId xmlns:p14="http://schemas.microsoft.com/office/powerpoint/2010/main" val="212230407"/>
+        <p14:creationId xmlns:p14="http://schemas.microsoft.com/office/powerpoint/2010/main" val="1731088104"/>
       </p:ext>
     </p:extLst>
   </p:cSld>
@@ -9955,7 +10283,7 @@
           <p:cNvPr id="26" name="Settlement has two experimental branches">
             <a:extLst xmlns:a="http://schemas.openxmlformats.org/drawingml/2006/main">
               <a:ext uri="{FF2B5EF4-FFF2-40B4-BE49-F238E27FC236}">
-                <a16:creationId xmlns:a16="http://schemas.microsoft.com/office/drawing/2014/main" id="{271752B1-50CC-4375-A074-7EDA044AFD33}"/>
+                <a16:creationId xmlns:a16="http://schemas.microsoft.com/office/drawing/2014/main" id="{7E6DA1EA-B46C-486B-987E-A25125A1932E}"/>
               </a:ext>
             </a:extLst>
           </p:cNvPr>
@@ -10016,7 +10344,7 @@
           <p:nvPr/>
         </p:nvPicPr>
         <p:blipFill>
-          <a:blip xmlns:r="http://schemas.openxmlformats.org/officeDocument/2006/relationships" xmlns:a="http://schemas.openxmlformats.org/drawingml/2006/main" r:embed="R69400005933941a2"/>
+          <a:blip xmlns:r="http://schemas.openxmlformats.org/officeDocument/2006/relationships" xmlns:a="http://schemas.openxmlformats.org/drawingml/2006/main" r:embed="Rfd5966d9a72a4c39"/>
           <a:stretch xmlns:a="http://schemas.openxmlformats.org/drawingml/2006/main"/>
         </p:blipFill>
         <p:spPr>
@@ -10034,7 +10362,7 @@
           <p:cNvPr id="3" name="Vexi Hakari">
             <a:extLst xmlns:a="http://schemas.openxmlformats.org/drawingml/2006/main">
               <a:ext uri="{FF2B5EF4-FFF2-40B4-BE49-F238E27FC236}">
-                <a16:creationId xmlns:a16="http://schemas.microsoft.com/office/drawing/2014/main" id="{870EA952-98A4-4243-8F45-5547C3BBE485}"/>
+                <a16:creationId xmlns:a16="http://schemas.microsoft.com/office/drawing/2014/main" id="{D5C781CC-2B13-435F-9F67-3AD9FFCE86EC}"/>
               </a:ext>
             </a:extLst>
           </p:cNvPr>
@@ -10091,7 +10419,7 @@
           <p:cNvPr id="4" name="A1">
             <a:extLst xmlns:a="http://schemas.openxmlformats.org/drawingml/2006/main">
               <a:ext uri="{FF2B5EF4-FFF2-40B4-BE49-F238E27FC236}">
-                <a16:creationId xmlns:a16="http://schemas.microsoft.com/office/drawing/2014/main" id="{C18BEAEE-2515-48D4-B5A5-8212DF0CEE37}"/>
+                <a16:creationId xmlns:a16="http://schemas.microsoft.com/office/drawing/2014/main" id="{E493AF0B-5CCA-4EDD-A0E2-B470F35971A0}"/>
               </a:ext>
             </a:extLst>
           </p:cNvPr>
@@ -10148,7 +10476,7 @@
           <p:cNvPr id="5" name="Delayed acceptance">
             <a:extLst xmlns:a="http://schemas.openxmlformats.org/drawingml/2006/main">
               <a:ext uri="{FF2B5EF4-FFF2-40B4-BE49-F238E27FC236}">
-                <a16:creationId xmlns:a16="http://schemas.microsoft.com/office/drawing/2014/main" id="{EDD5C7DE-AB8F-4A5E-8BE9-BB4AEDD6FA32}"/>
+                <a16:creationId xmlns:a16="http://schemas.microsoft.com/office/drawing/2014/main" id="{8D4226E5-5DEB-455C-B3C4-B5C12E7F66AE}"/>
               </a:ext>
             </a:extLst>
           </p:cNvPr>
@@ -10205,7 +10533,7 @@
           <p:cNvPr id="6" name="Window 0&#10;Rejected">
             <a:extLst xmlns:a="http://schemas.openxmlformats.org/drawingml/2006/main">
               <a:ext uri="{FF2B5EF4-FFF2-40B4-BE49-F238E27FC236}">
-                <a16:creationId xmlns:a16="http://schemas.microsoft.com/office/drawing/2014/main" id="{0C2B68C4-55A8-4748-AC98-5DB1F71DD3AB}"/>
+                <a16:creationId xmlns:a16="http://schemas.microsoft.com/office/drawing/2014/main" id="{7F17E465-25A3-4070-B937-4F3A92207955}"/>
               </a:ext>
             </a:extLst>
           </p:cNvPr>
@@ -10289,7 +10617,7 @@
           <p:cNvPr id="7" name="Window 1&#10;Accepted">
             <a:extLst xmlns:a="http://schemas.openxmlformats.org/drawingml/2006/main">
               <a:ext uri="{FF2B5EF4-FFF2-40B4-BE49-F238E27FC236}">
-                <a16:creationId xmlns:a16="http://schemas.microsoft.com/office/drawing/2014/main" id="{E5015087-2B4B-46EB-8AA7-85AF253B6D74}"/>
+                <a16:creationId xmlns:a16="http://schemas.microsoft.com/office/drawing/2014/main" id="{2B616C18-0552-40AE-BF9C-45D34E857867}"/>
               </a:ext>
             </a:extLst>
           </p:cNvPr>
@@ -10399,7 +10727,7 @@
           <p:cNvPr id="9" name="Caller retries after 5 minutes">
             <a:extLst xmlns:a="http://schemas.openxmlformats.org/drawingml/2006/main">
               <a:ext uri="{FF2B5EF4-FFF2-40B4-BE49-F238E27FC236}">
-                <a16:creationId xmlns:a16="http://schemas.microsoft.com/office/drawing/2014/main" id="{96E4CDC5-F1F5-4E4F-9EC7-26BF197F1CC5}"/>
+                <a16:creationId xmlns:a16="http://schemas.microsoft.com/office/drawing/2014/main" id="{B85098F7-145C-42C4-B4B5-18FC165DC613}"/>
               </a:ext>
             </a:extLst>
           </p:cNvPr>
@@ -10456,7 +10784,7 @@
           <p:cNvPr id="10" name="">
             <a:extLst xmlns:a="http://schemas.openxmlformats.org/drawingml/2006/main">
               <a:ext uri="{FF2B5EF4-FFF2-40B4-BE49-F238E27FC236}">
-                <a16:creationId xmlns:a16="http://schemas.microsoft.com/office/drawing/2014/main" id="{D07D2D0F-4337-4E1F-A6C8-702A6F5A1B4D}"/>
+                <a16:creationId xmlns:a16="http://schemas.microsoft.com/office/drawing/2014/main" id="{31E942E2-A825-42C6-A362-372CB3AA0E75}"/>
               </a:ext>
             </a:extLst>
           </p:cNvPr>
@@ -10486,7 +10814,7 @@
           <p:cNvPr id="11" name="Persistent gap">
             <a:extLst xmlns:a="http://schemas.openxmlformats.org/drawingml/2006/main">
               <a:ext uri="{FF2B5EF4-FFF2-40B4-BE49-F238E27FC236}">
-                <a16:creationId xmlns:a16="http://schemas.microsoft.com/office/drawing/2014/main" id="{2B5F4F5B-B0EA-4A24-B137-49B23126E4F7}"/>
+                <a16:creationId xmlns:a16="http://schemas.microsoft.com/office/drawing/2014/main" id="{05D6E16F-DF23-4E74-A6D9-5A0C7B04D753}"/>
               </a:ext>
             </a:extLst>
           </p:cNvPr>
@@ -10543,7 +10871,7 @@
           <p:cNvPr id="12" name="0">
             <a:extLst xmlns:a="http://schemas.openxmlformats.org/drawingml/2006/main">
               <a:ext uri="{FF2B5EF4-FFF2-40B4-BE49-F238E27FC236}">
-                <a16:creationId xmlns:a16="http://schemas.microsoft.com/office/drawing/2014/main" id="{05593009-9F17-4C37-BD64-46E56C733A15}"/>
+                <a16:creationId xmlns:a16="http://schemas.microsoft.com/office/drawing/2014/main" id="{8DBF4C13-9BF4-4979-85CB-1D765CA0C657}"/>
               </a:ext>
             </a:extLst>
           </p:cNvPr>
@@ -10604,7 +10932,7 @@
           <p:cNvPr id="13" name="1">
             <a:extLst xmlns:a="http://schemas.openxmlformats.org/drawingml/2006/main">
               <a:ext uri="{FF2B5EF4-FFF2-40B4-BE49-F238E27FC236}">
-                <a16:creationId xmlns:a16="http://schemas.microsoft.com/office/drawing/2014/main" id="{B93ED3DE-F246-4568-810E-82F4F9189E2A}"/>
+                <a16:creationId xmlns:a16="http://schemas.microsoft.com/office/drawing/2014/main" id="{6736A22E-1EE1-46AC-9572-890D39278187}"/>
               </a:ext>
             </a:extLst>
           </p:cNvPr>
@@ -10665,7 +10993,7 @@
           <p:cNvPr id="14" name="2">
             <a:extLst xmlns:a="http://schemas.openxmlformats.org/drawingml/2006/main">
               <a:ext uri="{FF2B5EF4-FFF2-40B4-BE49-F238E27FC236}">
-                <a16:creationId xmlns:a16="http://schemas.microsoft.com/office/drawing/2014/main" id="{2393805E-C8C9-4A87-B946-8DD6216CD104}"/>
+                <a16:creationId xmlns:a16="http://schemas.microsoft.com/office/drawing/2014/main" id="{ADFA1707-4BF5-41B6-B6B5-9DCB65C15E34}"/>
               </a:ext>
             </a:extLst>
           </p:cNvPr>
@@ -10726,7 +11054,7 @@
           <p:cNvPr id="15" name="3">
             <a:extLst xmlns:a="http://schemas.openxmlformats.org/drawingml/2006/main">
               <a:ext uri="{FF2B5EF4-FFF2-40B4-BE49-F238E27FC236}">
-                <a16:creationId xmlns:a16="http://schemas.microsoft.com/office/drawing/2014/main" id="{706A91FE-C3DC-4B08-B22B-6B88BA116316}"/>
+                <a16:creationId xmlns:a16="http://schemas.microsoft.com/office/drawing/2014/main" id="{94710FF9-12AD-4E7C-92D4-AF9B831DC343}"/>
               </a:ext>
             </a:extLst>
           </p:cNvPr>
@@ -10787,7 +11115,7 @@
           <p:cNvPr id="16" name="4">
             <a:extLst xmlns:a="http://schemas.openxmlformats.org/drawingml/2006/main">
               <a:ext uri="{FF2B5EF4-FFF2-40B4-BE49-F238E27FC236}">
-                <a16:creationId xmlns:a16="http://schemas.microsoft.com/office/drawing/2014/main" id="{29499467-BB74-4537-87A8-4311672212D3}"/>
+                <a16:creationId xmlns:a16="http://schemas.microsoft.com/office/drawing/2014/main" id="{EDD57501-C643-4A1E-B816-BF8E31F9E4E6}"/>
               </a:ext>
             </a:extLst>
           </p:cNvPr>
@@ -10848,7 +11176,7 @@
           <p:cNvPr id="17" name="5">
             <a:extLst xmlns:a="http://schemas.openxmlformats.org/drawingml/2006/main">
               <a:ext uri="{FF2B5EF4-FFF2-40B4-BE49-F238E27FC236}">
-                <a16:creationId xmlns:a16="http://schemas.microsoft.com/office/drawing/2014/main" id="{2A21DAAD-2DA5-4CBA-B99D-04D8218A00C4}"/>
+                <a16:creationId xmlns:a16="http://schemas.microsoft.com/office/drawing/2014/main" id="{5F3E927D-50D5-4711-8DFE-7728D074E8EA}"/>
               </a:ext>
             </a:extLst>
           </p:cNvPr>
@@ -11039,7 +11367,7 @@
           <p:cNvPr id="23" name="6 candidate windows rejected">
             <a:extLst xmlns:a="http://schemas.openxmlformats.org/drawingml/2006/main">
               <a:ext uri="{FF2B5EF4-FFF2-40B4-BE49-F238E27FC236}">
-                <a16:creationId xmlns:a16="http://schemas.microsoft.com/office/drawing/2014/main" id="{9A336C0A-FEA2-43DE-AB33-2B9AC8D6FFD8}"/>
+                <a16:creationId xmlns:a16="http://schemas.microsoft.com/office/drawing/2014/main" id="{6DDA44DC-E0A0-434D-BB73-4C3FB1151F95}"/>
               </a:ext>
             </a:extLst>
           </p:cNvPr>
@@ -11096,7 +11424,7 @@
           <p:cNvPr id="24" name="After 1h grace: collateral return + pooled refunds">
             <a:extLst xmlns:a="http://schemas.openxmlformats.org/drawingml/2006/main">
               <a:ext uri="{FF2B5EF4-FFF2-40B4-BE49-F238E27FC236}">
-                <a16:creationId xmlns:a16="http://schemas.microsoft.com/office/drawing/2014/main" id="{8ED68AE9-8D26-4EBE-856E-6FDDE19E0FAD}"/>
+                <a16:creationId xmlns:a16="http://schemas.microsoft.com/office/drawing/2014/main" id="{CC86C320-7848-475C-BF2D-9D4ACA135BCE}"/>
               </a:ext>
             </a:extLst>
           </p:cNvPr>
@@ -11153,7 +11481,7 @@
           <p:cNvPr id="25" name="Later price or unwind changes the economics. Neither establi">
             <a:extLst xmlns:a="http://schemas.openxmlformats.org/drawingml/2006/main">
               <a:ext uri="{FF2B5EF4-FFF2-40B4-BE49-F238E27FC236}">
-                <a16:creationId xmlns:a16="http://schemas.microsoft.com/office/drawing/2014/main" id="{BADB07BA-7E6F-4340-B126-6E1366857437}"/>
+                <a16:creationId xmlns:a16="http://schemas.microsoft.com/office/drawing/2014/main" id="{080328DD-5F80-4AC5-9E88-D6612ECAF1F7}"/>
               </a:ext>
             </a:extLst>
           </p:cNvPr>
@@ -11208,7 +11536,7 @@
     </p:spTree>
     <p:extLst>
       <p:ext uri="{BB962C8B-B14F-4D97-AF65-F5344CB8AC3E}">
-        <p14:creationId xmlns:p14="http://schemas.microsoft.com/office/powerpoint/2010/main" val="1876921341"/>
+        <p14:creationId xmlns:p14="http://schemas.microsoft.com/office/powerpoint/2010/main" val="986164066"/>
       </p:ext>
     </p:extLst>
   </p:cSld>
@@ -11239,7 +11567,7 @@
           <p:cNvPr id="17" name="The v4 integration in detail">
             <a:extLst xmlns:a="http://schemas.openxmlformats.org/drawingml/2006/main">
               <a:ext uri="{FF2B5EF4-FFF2-40B4-BE49-F238E27FC236}">
-                <a16:creationId xmlns:a16="http://schemas.microsoft.com/office/drawing/2014/main" id="{89537CF1-B2FD-4F25-A26A-243567305D95}"/>
+                <a16:creationId xmlns:a16="http://schemas.microsoft.com/office/drawing/2014/main" id="{EA4F18F3-811A-4B6E-A13C-AEB74BF2BF83}"/>
               </a:ext>
             </a:extLst>
           </p:cNvPr>
@@ -11300,7 +11628,7 @@
           <p:nvPr/>
         </p:nvPicPr>
         <p:blipFill>
-          <a:blip xmlns:r="http://schemas.openxmlformats.org/officeDocument/2006/relationships" xmlns:a="http://schemas.openxmlformats.org/drawingml/2006/main" r:embed="Ra313dd4cc6384cf0"/>
+          <a:blip xmlns:r="http://schemas.openxmlformats.org/officeDocument/2006/relationships" xmlns:a="http://schemas.openxmlformats.org/drawingml/2006/main" r:embed="Rfccaf24ff00040bc"/>
           <a:stretch xmlns:a="http://schemas.openxmlformats.org/drawingml/2006/main"/>
         </p:blipFill>
         <p:spPr>
@@ -11318,7 +11646,7 @@
           <p:cNvPr id="3" name="Vexi Hakari">
             <a:extLst xmlns:a="http://schemas.openxmlformats.org/drawingml/2006/main">
               <a:ext uri="{FF2B5EF4-FFF2-40B4-BE49-F238E27FC236}">
-                <a16:creationId xmlns:a16="http://schemas.microsoft.com/office/drawing/2014/main" id="{B61D4CCB-7A3C-4613-AC31-05AF47F8396B}"/>
+                <a16:creationId xmlns:a16="http://schemas.microsoft.com/office/drawing/2014/main" id="{CBD8F1EF-0DD8-496C-A568-00F2569D2AF9}"/>
               </a:ext>
             </a:extLst>
           </p:cNvPr>
@@ -11375,7 +11703,7 @@
           <p:cNvPr id="4" name="A2">
             <a:extLst xmlns:a="http://schemas.openxmlformats.org/drawingml/2006/main">
               <a:ext uri="{FF2B5EF4-FFF2-40B4-BE49-F238E27FC236}">
-                <a16:creationId xmlns:a16="http://schemas.microsoft.com/office/drawing/2014/main" id="{EAB6507B-4417-4129-9A48-07C829346AC2}"/>
+                <a16:creationId xmlns:a16="http://schemas.microsoft.com/office/drawing/2014/main" id="{8C87607D-E4A1-4BAA-A726-6C62E7F706FE}"/>
               </a:ext>
             </a:extLst>
           </p:cNvPr>
@@ -11432,7 +11760,7 @@
           <p:cNvPr id="5" name="Pool key">
             <a:extLst xmlns:a="http://schemas.openxmlformats.org/drawingml/2006/main">
               <a:ext uri="{FF2B5EF4-FFF2-40B4-BE49-F238E27FC236}">
-                <a16:creationId xmlns:a16="http://schemas.microsoft.com/office/drawing/2014/main" id="{A617C4D5-A95D-4AB0-BD8E-378B27A9F1C0}"/>
+                <a16:creationId xmlns:a16="http://schemas.microsoft.com/office/drawing/2014/main" id="{C32E8231-974B-494C-A00F-8F632D091D23}"/>
               </a:ext>
             </a:extLst>
           </p:cNvPr>
@@ -11489,7 +11817,7 @@
           <p:cNvPr id="6" name="Hook belongs to the pool">
             <a:extLst xmlns:a="http://schemas.openxmlformats.org/drawingml/2006/main">
               <a:ext uri="{FF2B5EF4-FFF2-40B4-BE49-F238E27FC236}">
-                <a16:creationId xmlns:a16="http://schemas.microsoft.com/office/drawing/2014/main" id="{473FEB42-B946-43D1-9108-303ABA2D2279}"/>
+                <a16:creationId xmlns:a16="http://schemas.microsoft.com/office/drawing/2014/main" id="{9CE9A1AF-E283-4C0C-B917-FB0DFCB81AFD}"/>
               </a:ext>
             </a:extLst>
           </p:cNvPr>
@@ -11546,7 +11874,7 @@
           <p:cNvPr id="7" name="A dedicated hooked pool needs its own liquidity">
             <a:extLst xmlns:a="http://schemas.openxmlformats.org/drawingml/2006/main">
               <a:ext uri="{FF2B5EF4-FFF2-40B4-BE49-F238E27FC236}">
-                <a16:creationId xmlns:a16="http://schemas.microsoft.com/office/drawing/2014/main" id="{656E8069-0BF4-4CF7-8A95-119EDE75D7B7}"/>
+                <a16:creationId xmlns:a16="http://schemas.microsoft.com/office/drawing/2014/main" id="{FAE3F60E-B4E8-434B-99F0-C137049AC2AE}"/>
               </a:ext>
             </a:extLst>
           </p:cNvPr>
@@ -11603,7 +11931,7 @@
           <p:cNvPr id="8" name="">
             <a:extLst xmlns:a="http://schemas.openxmlformats.org/drawingml/2006/main">
               <a:ext uri="{FF2B5EF4-FFF2-40B4-BE49-F238E27FC236}">
-                <a16:creationId xmlns:a16="http://schemas.microsoft.com/office/drawing/2014/main" id="{5769B358-C892-4194-8E2D-01CA01D8A26E}"/>
+                <a16:creationId xmlns:a16="http://schemas.microsoft.com/office/drawing/2014/main" id="{F218672D-F7D9-4496-84AA-B8A618C11B2B}"/>
               </a:ext>
             </a:extLst>
           </p:cNvPr>
@@ -11633,7 +11961,7 @@
           <p:cNvPr id="9" name="Address bits">
             <a:extLst xmlns:a="http://schemas.openxmlformats.org/drawingml/2006/main">
               <a:ext uri="{FF2B5EF4-FFF2-40B4-BE49-F238E27FC236}">
-                <a16:creationId xmlns:a16="http://schemas.microsoft.com/office/drawing/2014/main" id="{F5E34A08-22B1-46B5-B385-945BC46EF281}"/>
+                <a16:creationId xmlns:a16="http://schemas.microsoft.com/office/drawing/2014/main" id="{8432C050-CE9C-41DD-BA65-798BF21CD8F6}"/>
               </a:ext>
             </a:extLst>
           </p:cNvPr>
@@ -11690,7 +12018,7 @@
           <p:cNvPr id="10" name="CREATE2 salt mining">
             <a:extLst xmlns:a="http://schemas.openxmlformats.org/drawingml/2006/main">
               <a:ext uri="{FF2B5EF4-FFF2-40B4-BE49-F238E27FC236}">
-                <a16:creationId xmlns:a16="http://schemas.microsoft.com/office/drawing/2014/main" id="{00D940E1-5B81-4E05-8750-E3551A98E037}"/>
+                <a16:creationId xmlns:a16="http://schemas.microsoft.com/office/drawing/2014/main" id="{DD76D8C4-ED36-4D51-A425-6D342DF3C66C}"/>
               </a:ext>
             </a:extLst>
           </p:cNvPr>
@@ -11747,7 +12075,7 @@
           <p:cNvPr id="11" name="Address bits encode hook permissions">
             <a:extLst xmlns:a="http://schemas.openxmlformats.org/drawingml/2006/main">
               <a:ext uri="{FF2B5EF4-FFF2-40B4-BE49-F238E27FC236}">
-                <a16:creationId xmlns:a16="http://schemas.microsoft.com/office/drawing/2014/main" id="{8C9008BE-8D56-42E4-BB2C-00D0500C38B5}"/>
+                <a16:creationId xmlns:a16="http://schemas.microsoft.com/office/drawing/2014/main" id="{1F7641F8-FC85-4E54-BAA2-3C0769C931B4}"/>
               </a:ext>
             </a:extLst>
           </p:cNvPr>
@@ -11804,7 +12132,7 @@
           <p:cNvPr id="12" name="">
             <a:extLst xmlns:a="http://schemas.openxmlformats.org/drawingml/2006/main">
               <a:ext uri="{FF2B5EF4-FFF2-40B4-BE49-F238E27FC236}">
-                <a16:creationId xmlns:a16="http://schemas.microsoft.com/office/drawing/2014/main" id="{6157FA3A-7198-44D2-BCAF-2E924708743E}"/>
+                <a16:creationId xmlns:a16="http://schemas.microsoft.com/office/drawing/2014/main" id="{49A5240A-B5F8-40C2-80D3-1F20EE4A3210}"/>
               </a:ext>
             </a:extLst>
           </p:cNvPr>
@@ -11834,7 +12162,7 @@
           <p:cNvPr id="13" name="State + observe">
             <a:extLst xmlns:a="http://schemas.openxmlformats.org/drawingml/2006/main">
               <a:ext uri="{FF2B5EF4-FFF2-40B4-BE49-F238E27FC236}">
-                <a16:creationId xmlns:a16="http://schemas.microsoft.com/office/drawing/2014/main" id="{48648589-1F22-488C-8847-0CA43D571E8C}"/>
+                <a16:creationId xmlns:a16="http://schemas.microsoft.com/office/drawing/2014/main" id="{F01BF225-2ACE-4F0B-AF0C-6560B8076779}"/>
               </a:ext>
             </a:extLst>
           </p:cNvPr>
@@ -11891,7 +12219,7 @@
           <p:cNvPr id="14" name="Live price and two TWAPs">
             <a:extLst xmlns:a="http://schemas.openxmlformats.org/drawingml/2006/main">
               <a:ext uri="{FF2B5EF4-FFF2-40B4-BE49-F238E27FC236}">
-                <a16:creationId xmlns:a16="http://schemas.microsoft.com/office/drawing/2014/main" id="{CF59921B-90C1-4170-A223-2EA824FEC4B6}"/>
+                <a16:creationId xmlns:a16="http://schemas.microsoft.com/office/drawing/2014/main" id="{E70EE110-4E82-4879-905F-0DB0C318A8C3}"/>
               </a:ext>
             </a:extLst>
           </p:cNvPr>
@@ -11948,7 +12276,7 @@
           <p:cNvPr id="15" name="StateLibrary reads PoolManager state">
             <a:extLst xmlns:a="http://schemas.openxmlformats.org/drawingml/2006/main">
               <a:ext uri="{FF2B5EF4-FFF2-40B4-BE49-F238E27FC236}">
-                <a16:creationId xmlns:a16="http://schemas.microsoft.com/office/drawing/2014/main" id="{BF0079DF-C430-4C9A-986B-DB07298F6C75}"/>
+                <a16:creationId xmlns:a16="http://schemas.microsoft.com/office/drawing/2014/main" id="{44FB767C-311D-412B-8E78-0E9687AFA3BB}"/>
               </a:ext>
             </a:extLst>
           </p:cNvPr>
@@ -12005,7 +12333,7 @@
           <p:cNvPr id="16" name="New pool on the real PoolManager. Canonical Aqua and SwapVM ">
             <a:extLst xmlns:a="http://schemas.openxmlformats.org/drawingml/2006/main">
               <a:ext uri="{FF2B5EF4-FFF2-40B4-BE49-F238E27FC236}">
-                <a16:creationId xmlns:a16="http://schemas.microsoft.com/office/drawing/2014/main" id="{E0E17B7D-297D-4D4D-AD23-1423F5D3125B}"/>
+                <a16:creationId xmlns:a16="http://schemas.microsoft.com/office/drawing/2014/main" id="{74880581-DB5E-4F22-9C21-9CC89F296C3C}"/>
               </a:ext>
             </a:extLst>
           </p:cNvPr>
@@ -12060,7 +12388,7 @@
     </p:spTree>
     <p:extLst>
       <p:ext uri="{BB962C8B-B14F-4D97-AF65-F5344CB8AC3E}">
-        <p14:creationId xmlns:p14="http://schemas.microsoft.com/office/powerpoint/2010/main" val="343671052"/>
+        <p14:creationId xmlns:p14="http://schemas.microsoft.com/office/powerpoint/2010/main" val="459423462"/>
       </p:ext>
     </p:extLst>
   </p:cSld>
@@ -12091,7 +12419,7 @@
           <p:cNvPr id="6" name="Questions and operating limits">
             <a:extLst xmlns:a="http://schemas.openxmlformats.org/drawingml/2006/main">
               <a:ext uri="{FF2B5EF4-FFF2-40B4-BE49-F238E27FC236}">
-                <a16:creationId xmlns:a16="http://schemas.microsoft.com/office/drawing/2014/main" id="{CE419471-6560-4382-BAC1-D11A1A6ED0D3}"/>
+                <a16:creationId xmlns:a16="http://schemas.microsoft.com/office/drawing/2014/main" id="{3D70B13E-5E2B-4379-90DF-60D4DA9ADA59}"/>
               </a:ext>
             </a:extLst>
           </p:cNvPr>
@@ -12152,7 +12480,7 @@
           <p:nvPr/>
         </p:nvPicPr>
         <p:blipFill>
-          <a:blip xmlns:r="http://schemas.openxmlformats.org/officeDocument/2006/relationships" xmlns:a="http://schemas.openxmlformats.org/drawingml/2006/main" r:embed="R00d31fcc13304b7d"/>
+          <a:blip xmlns:r="http://schemas.openxmlformats.org/officeDocument/2006/relationships" xmlns:a="http://schemas.openxmlformats.org/drawingml/2006/main" r:embed="R1ea11788217f42f2"/>
           <a:stretch xmlns:a="http://schemas.openxmlformats.org/drawingml/2006/main"/>
         </p:blipFill>
         <p:spPr>
@@ -12170,7 +12498,7 @@
           <p:cNvPr id="3" name="Vexi Hakari">
             <a:extLst xmlns:a="http://schemas.openxmlformats.org/drawingml/2006/main">
               <a:ext uri="{FF2B5EF4-FFF2-40B4-BE49-F238E27FC236}">
-                <a16:creationId xmlns:a16="http://schemas.microsoft.com/office/drawing/2014/main" id="{17891B13-7F48-4C01-8284-A545694C37ED}"/>
+                <a16:creationId xmlns:a16="http://schemas.microsoft.com/office/drawing/2014/main" id="{996F1D27-5C29-409D-84B3-0AB65FFC53E1}"/>
               </a:ext>
             </a:extLst>
           </p:cNvPr>
@@ -12227,7 +12555,7 @@
           <p:cNvPr id="4" name="A3">
             <a:extLst xmlns:a="http://schemas.openxmlformats.org/drawingml/2006/main">
               <a:ext uri="{FF2B5EF4-FFF2-40B4-BE49-F238E27FC236}">
-                <a16:creationId xmlns:a16="http://schemas.microsoft.com/office/drawing/2014/main" id="{7337D58A-CA1C-497B-B381-A553DD0BA813}"/>
+                <a16:creationId xmlns:a16="http://schemas.microsoft.com/office/drawing/2014/main" id="{F586E3F7-69E6-409B-8D69-EB0FABDD0AE5}"/>
               </a:ext>
             </a:extLst>
           </p:cNvPr>
@@ -12628,7 +12956,7 @@
     </p:spTree>
     <p:extLst>
       <p:ext uri="{BB962C8B-B14F-4D97-AF65-F5344CB8AC3E}">
-        <p14:creationId xmlns:p14="http://schemas.microsoft.com/office/powerpoint/2010/main" val="1789578075"/>
+        <p14:creationId xmlns:p14="http://schemas.microsoft.com/office/powerpoint/2010/main" val="355476039"/>
       </p:ext>
     </p:extLst>
   </p:cSld>
@@ -12659,7 +12987,7 @@
           <p:cNvPr id="18" name="Vexi and the hackathon contribution">
             <a:extLst xmlns:a="http://schemas.openxmlformats.org/drawingml/2006/main">
               <a:ext uri="{FF2B5EF4-FFF2-40B4-BE49-F238E27FC236}">
-                <a16:creationId xmlns:a16="http://schemas.microsoft.com/office/drawing/2014/main" id="{97B733A5-168C-4FBC-A5B1-CA6547DEA63C}"/>
+                <a16:creationId xmlns:a16="http://schemas.microsoft.com/office/drawing/2014/main" id="{4CDBDF97-CE2C-4264-BEA3-D706664CC823}"/>
               </a:ext>
             </a:extLst>
           </p:cNvPr>
@@ -12720,7 +13048,7 @@
           <p:nvPr/>
         </p:nvPicPr>
         <p:blipFill>
-          <a:blip xmlns:r="http://schemas.openxmlformats.org/officeDocument/2006/relationships" xmlns:a="http://schemas.openxmlformats.org/drawingml/2006/main" r:embed="R199562d5557e49b2"/>
+          <a:blip xmlns:r="http://schemas.openxmlformats.org/officeDocument/2006/relationships" xmlns:a="http://schemas.openxmlformats.org/drawingml/2006/main" r:embed="Rce181bcad54a4fa7"/>
           <a:stretch xmlns:a="http://schemas.openxmlformats.org/drawingml/2006/main"/>
         </p:blipFill>
         <p:spPr>
@@ -12738,7 +13066,7 @@
           <p:cNvPr id="3" name="Vexi Hakari">
             <a:extLst xmlns:a="http://schemas.openxmlformats.org/drawingml/2006/main">
               <a:ext uri="{FF2B5EF4-FFF2-40B4-BE49-F238E27FC236}">
-                <a16:creationId xmlns:a16="http://schemas.microsoft.com/office/drawing/2014/main" id="{913797E9-5231-42C9-858B-8898A1EAD40F}"/>
+                <a16:creationId xmlns:a16="http://schemas.microsoft.com/office/drawing/2014/main" id="{F3D0302A-35DC-40B7-BAEE-0197F8C6D5B5}"/>
               </a:ext>
             </a:extLst>
           </p:cNvPr>
@@ -12795,7 +13123,7 @@
           <p:cNvPr id="4" name="A4">
             <a:extLst xmlns:a="http://schemas.openxmlformats.org/drawingml/2006/main">
               <a:ext uri="{FF2B5EF4-FFF2-40B4-BE49-F238E27FC236}">
-                <a16:creationId xmlns:a16="http://schemas.microsoft.com/office/drawing/2014/main" id="{D583F086-E331-49B8-8E84-1285F45FA69E}"/>
+                <a16:creationId xmlns:a16="http://schemas.microsoft.com/office/drawing/2014/main" id="{115D97EA-E66D-4957-A587-BDDD24290EDF}"/>
               </a:ext>
             </a:extLst>
           </p:cNvPr>
@@ -12852,7 +13180,7 @@
           <p:cNvPr id="5" name="Before the event">
             <a:extLst xmlns:a="http://schemas.openxmlformats.org/drawingml/2006/main">
               <a:ext uri="{FF2B5EF4-FFF2-40B4-BE49-F238E27FC236}">
-                <a16:creationId xmlns:a16="http://schemas.microsoft.com/office/drawing/2014/main" id="{72A14676-CF12-436F-B9DD-6D56DADD741E}"/>
+                <a16:creationId xmlns:a16="http://schemas.microsoft.com/office/drawing/2014/main" id="{BB049913-1755-4036-8429-92A17AC2A4C6}"/>
               </a:ext>
             </a:extLst>
           </p:cNvPr>
@@ -12909,7 +13237,7 @@
           <p:cNvPr id="6" name="Vexi options venue / private product code">
             <a:extLst xmlns:a="http://schemas.openxmlformats.org/drawingml/2006/main">
               <a:ext uri="{FF2B5EF4-FFF2-40B4-BE49-F238E27FC236}">
-                <a16:creationId xmlns:a16="http://schemas.microsoft.com/office/drawing/2014/main" id="{C01C71B6-E873-46C6-954E-8DDA4E81ECA5}"/>
+                <a16:creationId xmlns:a16="http://schemas.microsoft.com/office/drawing/2014/main" id="{0CE3CC17-B3BB-4DE4-941B-13CE9B4D2E5A}"/>
               </a:ext>
             </a:extLst>
           </p:cNvPr>
@@ -12966,7 +13294,7 @@
           <p:cNvPr id="7" name="">
             <a:extLst xmlns:a="http://schemas.openxmlformats.org/drawingml/2006/main">
               <a:ext uri="{FF2B5EF4-FFF2-40B4-BE49-F238E27FC236}">
-                <a16:creationId xmlns:a16="http://schemas.microsoft.com/office/drawing/2014/main" id="{67850471-D71E-4AA1-ADC5-EF0A839EC6DF}"/>
+                <a16:creationId xmlns:a16="http://schemas.microsoft.com/office/drawing/2014/main" id="{89A9B78F-8F24-4A02-AB41-C6306DF1DD19}"/>
               </a:ext>
             </a:extLst>
           </p:cNvPr>
@@ -12996,7 +13324,7 @@
           <p:cNvPr id="8" name="09/25 22:26">
             <a:extLst xmlns:a="http://schemas.openxmlformats.org/drawingml/2006/main">
               <a:ext uri="{FF2B5EF4-FFF2-40B4-BE49-F238E27FC236}">
-                <a16:creationId xmlns:a16="http://schemas.microsoft.com/office/drawing/2014/main" id="{CF3608C2-0482-4AE3-BB40-9EEFFB1668DF}"/>
+                <a16:creationId xmlns:a16="http://schemas.microsoft.com/office/drawing/2014/main" id="{A7759623-1572-422F-8460-2328EEDB1CC9}"/>
               </a:ext>
             </a:extLst>
           </p:cNvPr>
@@ -13053,7 +13381,7 @@
           <p:cNvPr id="9" name="AquaWriter + book">
             <a:extLst xmlns:a="http://schemas.openxmlformats.org/drawingml/2006/main">
               <a:ext uri="{FF2B5EF4-FFF2-40B4-BE49-F238E27FC236}">
-                <a16:creationId xmlns:a16="http://schemas.microsoft.com/office/drawing/2014/main" id="{CED1BD39-DD61-4C07-824F-EE4DD87BBD1F}"/>
+                <a16:creationId xmlns:a16="http://schemas.microsoft.com/office/drawing/2014/main" id="{6937E907-00F9-434A-BF3C-7CAF466E046F}"/>
               </a:ext>
             </a:extLst>
           </p:cNvPr>
@@ -13110,7 +13438,7 @@
           <p:cNvPr id="10" name="09/25 23:39">
             <a:extLst xmlns:a="http://schemas.openxmlformats.org/drawingml/2006/main">
               <a:ext uri="{FF2B5EF4-FFF2-40B4-BE49-F238E27FC236}">
-                <a16:creationId xmlns:a16="http://schemas.microsoft.com/office/drawing/2014/main" id="{6F0ABC2E-4BE3-48A8-A81B-CF6897BCE688}"/>
+                <a16:creationId xmlns:a16="http://schemas.microsoft.com/office/drawing/2014/main" id="{AA8D064B-A847-4BA7-980A-61AD4B1EE401}"/>
               </a:ext>
             </a:extLst>
           </p:cNvPr>
@@ -13167,7 +13495,7 @@
           <p:cNvPr id="11" name="Hook deployed">
             <a:extLst xmlns:a="http://schemas.openxmlformats.org/drawingml/2006/main">
               <a:ext uri="{FF2B5EF4-FFF2-40B4-BE49-F238E27FC236}">
-                <a16:creationId xmlns:a16="http://schemas.microsoft.com/office/drawing/2014/main" id="{0B2AD30F-B722-43CC-9071-712C3B4ED205}"/>
+                <a16:creationId xmlns:a16="http://schemas.microsoft.com/office/drawing/2014/main" id="{9062BFD3-F867-4FD5-B1F4-05A0365FB544}"/>
               </a:ext>
             </a:extLst>
           </p:cNvPr>
@@ -13224,7 +13552,7 @@
           <p:cNvPr id="12" name="09/27 01:53">
             <a:extLst xmlns:a="http://schemas.openxmlformats.org/drawingml/2006/main">
               <a:ext uri="{FF2B5EF4-FFF2-40B4-BE49-F238E27FC236}">
-                <a16:creationId xmlns:a16="http://schemas.microsoft.com/office/drawing/2014/main" id="{F2DE500D-B75C-45E6-88B4-B7C543109F93}"/>
+                <a16:creationId xmlns:a16="http://schemas.microsoft.com/office/drawing/2014/main" id="{68599CED-43DB-4E46-B98D-93ECC95FBE2A}"/>
               </a:ext>
             </a:extLst>
           </p:cNvPr>
@@ -13281,7 +13609,7 @@
           <p:cNvPr id="13" name="Hooked pool">
             <a:extLst xmlns:a="http://schemas.openxmlformats.org/drawingml/2006/main">
               <a:ext uri="{FF2B5EF4-FFF2-40B4-BE49-F238E27FC236}">
-                <a16:creationId xmlns:a16="http://schemas.microsoft.com/office/drawing/2014/main" id="{A705243B-335E-4FDD-B146-E7FE0640674C}"/>
+                <a16:creationId xmlns:a16="http://schemas.microsoft.com/office/drawing/2014/main" id="{ACB18268-7421-4CCD-A9FE-38B135809DBC}"/>
               </a:ext>
             </a:extLst>
           </p:cNvPr>
@@ -13338,7 +13666,7 @@
           <p:cNvPr id="14" name="09/27 02:32">
             <a:extLst xmlns:a="http://schemas.openxmlformats.org/drawingml/2006/main">
               <a:ext uri="{FF2B5EF4-FFF2-40B4-BE49-F238E27FC236}">
-                <a16:creationId xmlns:a16="http://schemas.microsoft.com/office/drawing/2014/main" id="{559C0080-C930-4BE2-97F1-91AD326DF8A8}"/>
+                <a16:creationId xmlns:a16="http://schemas.microsoft.com/office/drawing/2014/main" id="{647E9C27-CE13-4F7A-A9E0-7ADBA4EA5AB6}"/>
               </a:ext>
             </a:extLst>
           </p:cNvPr>
@@ -13395,7 +13723,7 @@
           <p:cNvPr id="15" name="Band + settlement">
             <a:extLst xmlns:a="http://schemas.openxmlformats.org/drawingml/2006/main">
               <a:ext uri="{FF2B5EF4-FFF2-40B4-BE49-F238E27FC236}">
-                <a16:creationId xmlns:a16="http://schemas.microsoft.com/office/drawing/2014/main" id="{D7891AAE-696F-4014-BB95-5F7CC0AE81CB}"/>
+                <a16:creationId xmlns:a16="http://schemas.microsoft.com/office/drawing/2014/main" id="{37D96D56-FB9B-45F1-AD19-F9ADDC83DF73}"/>
               </a:ext>
             </a:extLst>
           </p:cNvPr>
@@ -13452,7 +13780,7 @@
           <p:cNvPr id="16" name="Public extraction: a small book + FixedPremium">
             <a:extLst xmlns:a="http://schemas.openxmlformats.org/drawingml/2006/main">
               <a:ext uri="{FF2B5EF4-FFF2-40B4-BE49-F238E27FC236}">
-                <a16:creationId xmlns:a16="http://schemas.microsoft.com/office/drawing/2014/main" id="{B207079F-EEE7-4D90-8C87-452862D8C6EB}"/>
+                <a16:creationId xmlns:a16="http://schemas.microsoft.com/office/drawing/2014/main" id="{26CD31C0-9F8D-4232-BC96-78585E8BC18B}"/>
               </a:ext>
             </a:extLst>
           </p:cNvPr>
@@ -13509,7 +13837,7 @@
           <p:cNvPr id="17" name="Event-time additions. JST timestamps. Private product pricin">
             <a:extLst xmlns:a="http://schemas.openxmlformats.org/drawingml/2006/main">
               <a:ext uri="{FF2B5EF4-FFF2-40B4-BE49-F238E27FC236}">
-                <a16:creationId xmlns:a16="http://schemas.microsoft.com/office/drawing/2014/main" id="{E0D5B50E-DBB6-4ADA-86A1-6476B4B26DE7}"/>
+                <a16:creationId xmlns:a16="http://schemas.microsoft.com/office/drawing/2014/main" id="{2663E9A6-8669-4501-AC9E-AF8E4BD54D6C}"/>
               </a:ext>
             </a:extLst>
           </p:cNvPr>
@@ -13564,7 +13892,7 @@
     </p:spTree>
     <p:extLst>
       <p:ext uri="{BB962C8B-B14F-4D97-AF65-F5344CB8AC3E}">
-        <p14:creationId xmlns:p14="http://schemas.microsoft.com/office/powerpoint/2010/main" val="1953809428"/>
+        <p14:creationId xmlns:p14="http://schemas.microsoft.com/office/powerpoint/2010/main" val="238728192"/>
       </p:ext>
     </p:extLst>
   </p:cSld>
@@ -13595,7 +13923,7 @@
           <p:cNvPr id="11" name="Historical motivation: HIMS">
             <a:extLst xmlns:a="http://schemas.openxmlformats.org/drawingml/2006/main">
               <a:ext uri="{FF2B5EF4-FFF2-40B4-BE49-F238E27FC236}">
-                <a16:creationId xmlns:a16="http://schemas.microsoft.com/office/drawing/2014/main" id="{4DE4DC64-9978-4CAF-B9FD-E853D4A37AE2}"/>
+                <a16:creationId xmlns:a16="http://schemas.microsoft.com/office/drawing/2014/main" id="{A5A8DFC5-36F3-4ECC-AC45-F3F4F4FA8335}"/>
               </a:ext>
             </a:extLst>
           </p:cNvPr>
@@ -13656,7 +13984,7 @@
           <p:nvPr/>
         </p:nvPicPr>
         <p:blipFill>
-          <a:blip xmlns:r="http://schemas.openxmlformats.org/officeDocument/2006/relationships" xmlns:a="http://schemas.openxmlformats.org/drawingml/2006/main" r:embed="R16da3c261c144916"/>
+          <a:blip xmlns:r="http://schemas.openxmlformats.org/officeDocument/2006/relationships" xmlns:a="http://schemas.openxmlformats.org/drawingml/2006/main" r:embed="R2dce1f94e1d84077"/>
           <a:stretch xmlns:a="http://schemas.openxmlformats.org/drawingml/2006/main"/>
         </p:blipFill>
         <p:spPr>
@@ -13674,7 +14002,7 @@
           <p:cNvPr id="3" name="Vexi Hakari">
             <a:extLst xmlns:a="http://schemas.openxmlformats.org/drawingml/2006/main">
               <a:ext uri="{FF2B5EF4-FFF2-40B4-BE49-F238E27FC236}">
-                <a16:creationId xmlns:a16="http://schemas.microsoft.com/office/drawing/2014/main" id="{64B0F8E2-A862-4F39-98E2-2146D113FCD4}"/>
+                <a16:creationId xmlns:a16="http://schemas.microsoft.com/office/drawing/2014/main" id="{C240CD58-B047-44E6-8D87-6F753D21FB44}"/>
               </a:ext>
             </a:extLst>
           </p:cNvPr>
@@ -13731,7 +14059,7 @@
           <p:cNvPr id="4" name="A5">
             <a:extLst xmlns:a="http://schemas.openxmlformats.org/drawingml/2006/main">
               <a:ext uri="{FF2B5EF4-FFF2-40B4-BE49-F238E27FC236}">
-                <a16:creationId xmlns:a16="http://schemas.microsoft.com/office/drawing/2014/main" id="{AD0F0A8D-9527-4115-AA6A-9CA4566FD1CF}"/>
+                <a16:creationId xmlns:a16="http://schemas.microsoft.com/office/drawing/2014/main" id="{BFCEA2EF-3F26-4B78-8F80-F6713C9F3041}"/>
               </a:ext>
             </a:extLst>
           </p:cNvPr>
@@ -13788,7 +14116,7 @@
           <p:cNvPr id="5" name="2026-08-30 weekend study">
             <a:extLst xmlns:a="http://schemas.openxmlformats.org/drawingml/2006/main">
               <a:ext uri="{FF2B5EF4-FFF2-40B4-BE49-F238E27FC236}">
-                <a16:creationId xmlns:a16="http://schemas.microsoft.com/office/drawing/2014/main" id="{A7F39288-573F-47A7-911C-386E55834CAF}"/>
+                <a16:creationId xmlns:a16="http://schemas.microsoft.com/office/drawing/2014/main" id="{3EB51B65-996D-4310-9B27-7CEC86459CF7}"/>
               </a:ext>
             </a:extLst>
           </p:cNvPr>
@@ -13852,7 +14180,7 @@
         </p:xfrm>
         <a:graphic xmlns:a="http://schemas.openxmlformats.org/drawingml/2006/main">
           <a:graphicData uri="http://schemas.openxmlformats.org/drawingml/2006/chart">
-            <c:chart xmlns:r="http://schemas.openxmlformats.org/officeDocument/2006/relationships" xmlns:c="http://schemas.openxmlformats.org/drawingml/2006/chart" r:id="Rd8854f3b010342eb"/>
+            <c:chart xmlns:r="http://schemas.openxmlformats.org/officeDocument/2006/relationships" xmlns:c="http://schemas.openxmlformats.org/drawingml/2006/chart" r:id="R6c71a00f8a954519"/>
           </a:graphicData>
         </a:graphic>
       </p:graphicFrame>
@@ -13861,7 +14189,7 @@
           <p:cNvPr id="7" name="12 USDG">
             <a:extLst xmlns:a="http://schemas.openxmlformats.org/drawingml/2006/main">
               <a:ext uri="{FF2B5EF4-FFF2-40B4-BE49-F238E27FC236}">
-                <a16:creationId xmlns:a16="http://schemas.microsoft.com/office/drawing/2014/main" id="{B1A821E0-BC22-43C0-B8A4-F9580E70046B}"/>
+                <a16:creationId xmlns:a16="http://schemas.microsoft.com/office/drawing/2014/main" id="{42BA926E-D747-4960-92F2-1C86B5174AAC}"/>
               </a:ext>
             </a:extLst>
           </p:cNvPr>
@@ -13918,7 +14246,7 @@
           <p:cNvPr id="8" name="Estimated round-trip fees">
             <a:extLst xmlns:a="http://schemas.openxmlformats.org/drawingml/2006/main">
               <a:ext uri="{FF2B5EF4-FFF2-40B4-BE49-F238E27FC236}">
-                <a16:creationId xmlns:a16="http://schemas.microsoft.com/office/drawing/2014/main" id="{7182C7A1-7963-4DC2-A69F-3C2EF96EBD74}"/>
+                <a16:creationId xmlns:a16="http://schemas.microsoft.com/office/drawing/2014/main" id="{72A59B6D-1741-4C4B-AAEF-1A6DDF3D043D}"/>
               </a:ext>
             </a:extLst>
           </p:cNvPr>
@@ -13975,7 +14303,7 @@
           <p:cNvPr id="9" name="10% push, separate snapshot">
             <a:extLst xmlns:a="http://schemas.openxmlformats.org/drawingml/2006/main">
               <a:ext uri="{FF2B5EF4-FFF2-40B4-BE49-F238E27FC236}">
-                <a16:creationId xmlns:a16="http://schemas.microsoft.com/office/drawing/2014/main" id="{93C79D54-D3B3-41A2-9A73-099D6FDC4CBF}"/>
+                <a16:creationId xmlns:a16="http://schemas.microsoft.com/office/drawing/2014/main" id="{26C4D853-9F46-4326-894E-559975705946}"/>
               </a:ext>
             </a:extLst>
           </p:cNvPr>
@@ -14032,7 +14360,7 @@
           <p:cNvPr id="10" name="Different timestamps. Historical motivation, not evidence th">
             <a:extLst xmlns:a="http://schemas.openxmlformats.org/drawingml/2006/main">
               <a:ext uri="{FF2B5EF4-FFF2-40B4-BE49-F238E27FC236}">
-                <a16:creationId xmlns:a16="http://schemas.microsoft.com/office/drawing/2014/main" id="{697B9127-0D2A-44D1-AE33-E06BABAD3CD8}"/>
+                <a16:creationId xmlns:a16="http://schemas.microsoft.com/office/drawing/2014/main" id="{DA3AFC69-8409-4A65-BCC3-6F6D0F0EC5DA}"/>
               </a:ext>
             </a:extLst>
           </p:cNvPr>
@@ -14087,7 +14415,7 @@
     </p:spTree>
     <p:extLst>
       <p:ext uri="{BB962C8B-B14F-4D97-AF65-F5344CB8AC3E}">
-        <p14:creationId xmlns:p14="http://schemas.microsoft.com/office/powerpoint/2010/main" val="1905602013"/>
+        <p14:creationId xmlns:p14="http://schemas.microsoft.com/office/powerpoint/2010/main" val="1166855100"/>
       </p:ext>
     </p:extLst>
   </p:cSld>
@@ -14115,10 +14443,10 @@
       </p:grpSpPr>
       <p:sp>
         <p:nvSpPr>
-          <p:cNvPr id="16" name="Covered calls and cash-secured puts">
-            <a:extLst xmlns:a="http://schemas.openxmlformats.org/drawingml/2006/main">
-              <a:ext uri="{FF2B5EF4-FFF2-40B4-BE49-F238E27FC236}">
-                <a16:creationId xmlns:a16="http://schemas.microsoft.com/office/drawing/2014/main" id="{071A08DB-D8D0-4A45-A1BD-252DCA7A9F46}"/>
+          <p:cNvPr id="17" name="Covered calls and cash-secured puts">
+            <a:extLst xmlns:a="http://schemas.openxmlformats.org/drawingml/2006/main">
+              <a:ext uri="{FF2B5EF4-FFF2-40B4-BE49-F238E27FC236}">
+                <a16:creationId xmlns:a16="http://schemas.microsoft.com/office/drawing/2014/main" id="{9D137881-B81C-4798-AC2B-D05632A0E589}"/>
               </a:ext>
             </a:extLst>
           </p:cNvPr>
@@ -14172,14 +14500,14 @@
       </p:sp>
       <p:pic>
         <p:nvPicPr>
-          <p:cNvPr id="17" name=""/>
+          <p:cNvPr id="18" name=""/>
           <p:cNvPicPr>
             <a:picLocks xmlns:a="http://schemas.openxmlformats.org/drawingml/2006/main" noChangeAspect="1"/>
           </p:cNvPicPr>
           <p:nvPr/>
         </p:nvPicPr>
         <p:blipFill>
-          <a:blip xmlns:r="http://schemas.openxmlformats.org/officeDocument/2006/relationships" xmlns:a="http://schemas.openxmlformats.org/drawingml/2006/main" r:embed="R3ba0720b3baa457a"/>
+          <a:blip xmlns:r="http://schemas.openxmlformats.org/officeDocument/2006/relationships" xmlns:a="http://schemas.openxmlformats.org/drawingml/2006/main" r:embed="R6cb3eff451b24c84"/>
           <a:stretch xmlns:a="http://schemas.openxmlformats.org/drawingml/2006/main"/>
         </p:blipFill>
         <p:spPr>
@@ -14197,7 +14525,7 @@
           <p:cNvPr id="3" name="Vexi Hakari">
             <a:extLst xmlns:a="http://schemas.openxmlformats.org/drawingml/2006/main">
               <a:ext uri="{FF2B5EF4-FFF2-40B4-BE49-F238E27FC236}">
-                <a16:creationId xmlns:a16="http://schemas.microsoft.com/office/drawing/2014/main" id="{46FE91CE-CB2F-4AD1-B4EE-BD1419E3BF00}"/>
+                <a16:creationId xmlns:a16="http://schemas.microsoft.com/office/drawing/2014/main" id="{E04B5E55-E0F9-43C1-B09D-38CC8E5F538E}"/>
               </a:ext>
             </a:extLst>
           </p:cNvPr>
@@ -14251,22 +14579,22 @@
       </p:sp>
       <p:sp>
         <p:nvSpPr>
-          <p:cNvPr id="4" name="2">
-            <a:extLst xmlns:a="http://schemas.openxmlformats.org/drawingml/2006/main">
-              <a:ext uri="{FF2B5EF4-FFF2-40B4-BE49-F238E27FC236}">
-                <a16:creationId xmlns:a16="http://schemas.microsoft.com/office/drawing/2014/main" id="{F0EF55A6-8361-43F9-B2B1-39B5E756A233}"/>
-              </a:ext>
-            </a:extLst>
-          </p:cNvPr>
-          <p:cNvSpPr>
-            <a:spLocks xmlns:a="http://schemas.openxmlformats.org/drawingml/2006/main" noGrp="1"/>
-          </p:cNvSpPr>
-          <p:nvPr/>
-        </p:nvSpPr>
-        <p:spPr>
-          <a:xfrm xmlns:a="http://schemas.openxmlformats.org/drawingml/2006/main">
-            <a:off x="11001375" y="6153150"/>
-            <a:ext cx="619125" cy="342900"/>
+          <p:cNvPr id="4" name="AAPL example / illustrative amounts">
+            <a:extLst xmlns:a="http://schemas.openxmlformats.org/drawingml/2006/main">
+              <a:ext uri="{FF2B5EF4-FFF2-40B4-BE49-F238E27FC236}">
+                <a16:creationId xmlns:a16="http://schemas.microsoft.com/office/drawing/2014/main" id="{678B2B24-1C0E-4C2D-8DB4-6C52EF2CCA64}"/>
+              </a:ext>
+            </a:extLst>
+          </p:cNvPr>
+          <p:cNvSpPr>
+            <a:spLocks xmlns:a="http://schemas.openxmlformats.org/drawingml/2006/main" noGrp="1"/>
+          </p:cNvSpPr>
+          <p:nvPr/>
+        </p:nvSpPr>
+        <p:spPr>
+          <a:xfrm xmlns:a="http://schemas.openxmlformats.org/drawingml/2006/main">
+            <a:off x="3905250" y="6153150"/>
+            <a:ext cx="6667500" cy="342900"/>
           </a:xfrm>
           <a:prstGeom xmlns:a="http://schemas.openxmlformats.org/drawingml/2006/main" prst="rect">
             <a:avLst/>
@@ -14282,7 +14610,7 @@
           </a:bodyPr>
           <a:lstStyle xmlns:a="http://schemas.openxmlformats.org/drawingml/2006/main"/>
           <a:p xmlns:a="http://schemas.openxmlformats.org/drawingml/2006/main">
-            <a:pPr algn="r">
+            <a:pPr algn="l">
               <a:defRPr sz="1275" b="0">
                 <a:solidFill>
                   <a:srgbClr val="A8A8B2"/>
@@ -14301,29 +14629,29 @@
                 <a:ea typeface="Arial"/>
                 <a:cs typeface="Arial"/>
               </a:rPr>
-              <a:t>2</a:t>
-            </a:r>
-          </a:p>
-        </p:txBody>
-      </p:sp>
-      <p:sp>
-        <p:nvSpPr>
-          <p:cNvPr id="5" name="1 TSLA">
-            <a:extLst xmlns:a="http://schemas.openxmlformats.org/drawingml/2006/main">
-              <a:ext uri="{FF2B5EF4-FFF2-40B4-BE49-F238E27FC236}">
-                <a16:creationId xmlns:a16="http://schemas.microsoft.com/office/drawing/2014/main" id="{6FA60153-B5ED-4B4F-916C-7299D0736735}"/>
-              </a:ext>
-            </a:extLst>
-          </p:cNvPr>
-          <p:cNvSpPr>
-            <a:spLocks xmlns:a="http://schemas.openxmlformats.org/drawingml/2006/main" noGrp="1"/>
-          </p:cNvSpPr>
-          <p:nvPr/>
-        </p:nvSpPr>
-        <p:spPr>
-          <a:xfrm xmlns:a="http://schemas.openxmlformats.org/drawingml/2006/main">
-            <a:off x="666750" y="1533525"/>
-            <a:ext cx="3429000" cy="600075"/>
+              <a:t>AAPL example / illustrative amounts</a:t>
+            </a:r>
+          </a:p>
+        </p:txBody>
+      </p:sp>
+      <p:sp>
+        <p:nvSpPr>
+          <p:cNvPr id="5" name="2">
+            <a:extLst xmlns:a="http://schemas.openxmlformats.org/drawingml/2006/main">
+              <a:ext uri="{FF2B5EF4-FFF2-40B4-BE49-F238E27FC236}">
+                <a16:creationId xmlns:a16="http://schemas.microsoft.com/office/drawing/2014/main" id="{ADFAB06D-A311-4B68-AD1C-F0E6C9343BF0}"/>
+              </a:ext>
+            </a:extLst>
+          </p:cNvPr>
+          <p:cNvSpPr>
+            <a:spLocks xmlns:a="http://schemas.openxmlformats.org/drawingml/2006/main" noGrp="1"/>
+          </p:cNvSpPr>
+          <p:nvPr/>
+        </p:nvSpPr>
+        <p:spPr>
+          <a:xfrm xmlns:a="http://schemas.openxmlformats.org/drawingml/2006/main">
+            <a:off x="11001375" y="6153150"/>
+            <a:ext cx="619125" cy="342900"/>
           </a:xfrm>
           <a:prstGeom xmlns:a="http://schemas.openxmlformats.org/drawingml/2006/main" prst="rect">
             <a:avLst/>
@@ -14339,48 +14667,48 @@
           </a:bodyPr>
           <a:lstStyle xmlns:a="http://schemas.openxmlformats.org/drawingml/2006/main"/>
           <a:p xmlns:a="http://schemas.openxmlformats.org/drawingml/2006/main">
-            <a:pPr algn="l">
-              <a:defRPr sz="3525" b="1">
-                <a:solidFill>
-                  <a:srgbClr val="37D67A"/>
-                </a:solidFill>
-                <a:latin typeface="Arial"/>
-                <a:ea typeface="Arial"/>
-                <a:cs typeface="Arial"/>
-              </a:defRPr>
-            </a:pPr>
-            <a:r>
-              <a:rPr sz="3525" b="1">
-                <a:solidFill>
-                  <a:srgbClr val="37D67A"/>
-                </a:solidFill>
-                <a:latin typeface="Arial"/>
-                <a:ea typeface="Arial"/>
-                <a:cs typeface="Arial"/>
-              </a:rPr>
-              <a:t>1 TSLA</a:t>
-            </a:r>
-          </a:p>
-        </p:txBody>
-      </p:sp>
-      <p:sp>
-        <p:nvSpPr>
-          <p:cNvPr id="6" name="Strike 400 USDG">
-            <a:extLst xmlns:a="http://schemas.openxmlformats.org/drawingml/2006/main">
-              <a:ext uri="{FF2B5EF4-FFF2-40B4-BE49-F238E27FC236}">
-                <a16:creationId xmlns:a16="http://schemas.microsoft.com/office/drawing/2014/main" id="{68B8E51B-122B-47CB-94B0-54EBB1B28CB8}"/>
-              </a:ext>
-            </a:extLst>
-          </p:cNvPr>
-          <p:cNvSpPr>
-            <a:spLocks xmlns:a="http://schemas.openxmlformats.org/drawingml/2006/main" noGrp="1"/>
-          </p:cNvSpPr>
-          <p:nvPr/>
-        </p:nvSpPr>
-        <p:spPr>
-          <a:xfrm xmlns:a="http://schemas.openxmlformats.org/drawingml/2006/main">
-            <a:off x="4419600" y="1571625"/>
-            <a:ext cx="6572250" cy="561975"/>
+            <a:pPr algn="r">
+              <a:defRPr sz="1275" b="0">
+                <a:solidFill>
+                  <a:srgbClr val="A8A8B2"/>
+                </a:solidFill>
+                <a:latin typeface="Arial"/>
+                <a:ea typeface="Arial"/>
+                <a:cs typeface="Arial"/>
+              </a:defRPr>
+            </a:pPr>
+            <a:r>
+              <a:rPr sz="1275" b="0">
+                <a:solidFill>
+                  <a:srgbClr val="A8A8B2"/>
+                </a:solidFill>
+                <a:latin typeface="Arial"/>
+                <a:ea typeface="Arial"/>
+                <a:cs typeface="Arial"/>
+              </a:rPr>
+              <a:t>2</a:t>
+            </a:r>
+          </a:p>
+        </p:txBody>
+      </p:sp>
+      <p:sp>
+        <p:nvSpPr>
+          <p:cNvPr id="6" name="1 AAPL">
+            <a:extLst xmlns:a="http://schemas.openxmlformats.org/drawingml/2006/main">
+              <a:ext uri="{FF2B5EF4-FFF2-40B4-BE49-F238E27FC236}">
+                <a16:creationId xmlns:a16="http://schemas.microsoft.com/office/drawing/2014/main" id="{223F4603-BD41-449C-9C5A-484ED91DC21E}"/>
+              </a:ext>
+            </a:extLst>
+          </p:cNvPr>
+          <p:cNvSpPr>
+            <a:spLocks xmlns:a="http://schemas.openxmlformats.org/drawingml/2006/main" noGrp="1"/>
+          </p:cNvSpPr>
+          <p:nvPr/>
+        </p:nvSpPr>
+        <p:spPr>
+          <a:xfrm xmlns:a="http://schemas.openxmlformats.org/drawingml/2006/main">
+            <a:off x="666750" y="1533525"/>
+            <a:ext cx="3429000" cy="600075"/>
           </a:xfrm>
           <a:prstGeom xmlns:a="http://schemas.openxmlformats.org/drawingml/2006/main" prst="rect">
             <a:avLst/>
@@ -14397,6 +14725,63 @@
           <a:lstStyle xmlns:a="http://schemas.openxmlformats.org/drawingml/2006/main"/>
           <a:p xmlns:a="http://schemas.openxmlformats.org/drawingml/2006/main">
             <a:pPr algn="l">
+              <a:defRPr sz="3525" b="1">
+                <a:solidFill>
+                  <a:srgbClr val="37D67A"/>
+                </a:solidFill>
+                <a:latin typeface="Arial"/>
+                <a:ea typeface="Arial"/>
+                <a:cs typeface="Arial"/>
+              </a:defRPr>
+            </a:pPr>
+            <a:r>
+              <a:rPr sz="3525" b="1">
+                <a:solidFill>
+                  <a:srgbClr val="37D67A"/>
+                </a:solidFill>
+                <a:latin typeface="Arial"/>
+                <a:ea typeface="Arial"/>
+                <a:cs typeface="Arial"/>
+              </a:rPr>
+              <a:t>1 AAPL</a:t>
+            </a:r>
+          </a:p>
+        </p:txBody>
+      </p:sp>
+      <p:sp>
+        <p:nvSpPr>
+          <p:cNvPr id="7" name="Strike 400 USDG">
+            <a:extLst xmlns:a="http://schemas.openxmlformats.org/drawingml/2006/main">
+              <a:ext uri="{FF2B5EF4-FFF2-40B4-BE49-F238E27FC236}">
+                <a16:creationId xmlns:a16="http://schemas.microsoft.com/office/drawing/2014/main" id="{4EB066B9-EE59-456B-8C0B-700F67B35446}"/>
+              </a:ext>
+            </a:extLst>
+          </p:cNvPr>
+          <p:cNvSpPr>
+            <a:spLocks xmlns:a="http://schemas.openxmlformats.org/drawingml/2006/main" noGrp="1"/>
+          </p:cNvSpPr>
+          <p:nvPr/>
+        </p:nvSpPr>
+        <p:spPr>
+          <a:xfrm xmlns:a="http://schemas.openxmlformats.org/drawingml/2006/main">
+            <a:off x="4419600" y="1571625"/>
+            <a:ext cx="6572250" cy="561975"/>
+          </a:xfrm>
+          <a:prstGeom xmlns:a="http://schemas.openxmlformats.org/drawingml/2006/main" prst="rect">
+            <a:avLst/>
+          </a:prstGeom>
+          <a:noFill xmlns:a="http://schemas.openxmlformats.org/drawingml/2006/main"/>
+          <a:ln xmlns:a="http://schemas.openxmlformats.org/drawingml/2006/main" w="0">
+            <a:noFill/>
+          </a:ln>
+        </p:spPr>
+        <p:txBody>
+          <a:bodyPr xmlns:a="http://schemas.openxmlformats.org/drawingml/2006/main" wrap="none" lIns="0" tIns="0" rIns="0" bIns="0" anchor="ctr">
+            <a:noAutofit/>
+          </a:bodyPr>
+          <a:lstStyle xmlns:a="http://schemas.openxmlformats.org/drawingml/2006/main"/>
+          <a:p xmlns:a="http://schemas.openxmlformats.org/drawingml/2006/main">
+            <a:pPr algn="l">
               <a:defRPr sz="3075" b="1">
                 <a:solidFill>
                   <a:srgbClr val="FAFAFA"/>
@@ -14422,10 +14807,10 @@
       </p:sp>
       <p:sp>
         <p:nvSpPr>
-          <p:cNvPr id="7" name="Alice / writer">
-            <a:extLst xmlns:a="http://schemas.openxmlformats.org/drawingml/2006/main">
-              <a:ext uri="{FF2B5EF4-FFF2-40B4-BE49-F238E27FC236}">
-                <a16:creationId xmlns:a16="http://schemas.microsoft.com/office/drawing/2014/main" id="{3C2D39F2-BCD8-415A-82C6-1BD9FC005CDE}"/>
+          <p:cNvPr id="8" name="Alice / writer">
+            <a:extLst xmlns:a="http://schemas.openxmlformats.org/drawingml/2006/main">
+              <a:ext uri="{FF2B5EF4-FFF2-40B4-BE49-F238E27FC236}">
+                <a16:creationId xmlns:a16="http://schemas.microsoft.com/office/drawing/2014/main" id="{53E48711-8FB5-429A-9735-8A90DC96A112}"/>
               </a:ext>
             </a:extLst>
           </p:cNvPr>
@@ -14483,10 +14868,10 @@
       </p:sp>
       <p:sp>
         <p:nvSpPr>
-          <p:cNvPr id="8" name="Bob / buyer">
-            <a:extLst xmlns:a="http://schemas.openxmlformats.org/drawingml/2006/main">
-              <a:ext uri="{FF2B5EF4-FFF2-40B4-BE49-F238E27FC236}">
-                <a16:creationId xmlns:a16="http://schemas.microsoft.com/office/drawing/2014/main" id="{323C9218-CEA0-4E9B-8BC3-8321F53EC912}"/>
+          <p:cNvPr id="9" name="Bob / buyer">
+            <a:extLst xmlns:a="http://schemas.openxmlformats.org/drawingml/2006/main">
+              <a:ext uri="{FF2B5EF4-FFF2-40B4-BE49-F238E27FC236}">
+                <a16:creationId xmlns:a16="http://schemas.microsoft.com/office/drawing/2014/main" id="{2604740D-D737-4DEF-B858-E9A5F39885A4}"/>
               </a:ext>
             </a:extLst>
           </p:cNvPr>
@@ -14544,10 +14929,10 @@
       </p:sp>
       <p:cxnSp>
         <p:nvCxnSpPr>
-          <p:cNvPr id="24" name=""/>
+          <p:cNvPr id="26" name=""/>
           <p:cNvCxnSpPr>
-            <a:stCxn xmlns:a="http://schemas.openxmlformats.org/drawingml/2006/main" id="8" idx="1"/>
-            <a:endCxn xmlns:a="http://schemas.openxmlformats.org/drawingml/2006/main" id="7" idx="3"/>
+            <a:stCxn xmlns:a="http://schemas.openxmlformats.org/drawingml/2006/main" id="9" idx="1"/>
+            <a:endCxn xmlns:a="http://schemas.openxmlformats.org/drawingml/2006/main" id="8" idx="3"/>
           </p:cNvCxnSpPr>
           <p:nvPr/>
         </p:nvCxnSpPr>
@@ -14570,10 +14955,10 @@
       </p:cxnSp>
       <p:sp>
         <p:nvSpPr>
-          <p:cNvPr id="10" name="5 USDG premium today">
-            <a:extLst xmlns:a="http://schemas.openxmlformats.org/drawingml/2006/main">
-              <a:ext uri="{FF2B5EF4-FFF2-40B4-BE49-F238E27FC236}">
-                <a16:creationId xmlns:a16="http://schemas.microsoft.com/office/drawing/2014/main" id="{794905D1-9E9D-4CAB-8689-00854418B733}"/>
+          <p:cNvPr id="11" name="5 USDG premium today">
+            <a:extLst xmlns:a="http://schemas.openxmlformats.org/drawingml/2006/main">
+              <a:ext uri="{FF2B5EF4-FFF2-40B4-BE49-F238E27FC236}">
+                <a16:creationId xmlns:a16="http://schemas.microsoft.com/office/drawing/2014/main" id="{8B2D1BD1-E724-42EF-A64C-DDE55C02FE10}"/>
               </a:ext>
             </a:extLst>
           </p:cNvPr>
@@ -14627,10 +15012,10 @@
       </p:sp>
       <p:sp>
         <p:nvSpPr>
-          <p:cNvPr id="11" name="350">
-            <a:extLst xmlns:a="http://schemas.openxmlformats.org/drawingml/2006/main">
-              <a:ext uri="{FF2B5EF4-FFF2-40B4-BE49-F238E27FC236}">
-                <a16:creationId xmlns:a16="http://schemas.microsoft.com/office/drawing/2014/main" id="{1A9C7C79-1BA2-4132-A86B-07F1A7367430}"/>
+          <p:cNvPr id="12" name="350">
+            <a:extLst xmlns:a="http://schemas.openxmlformats.org/drawingml/2006/main">
+              <a:ext uri="{FF2B5EF4-FFF2-40B4-BE49-F238E27FC236}">
+                <a16:creationId xmlns:a16="http://schemas.microsoft.com/office/drawing/2014/main" id="{C6D47413-6AE2-43F4-BD80-B13FC2DB0722}"/>
               </a:ext>
             </a:extLst>
           </p:cNvPr>
@@ -14684,10 +15069,10 @@
       </p:sp>
       <p:sp>
         <p:nvSpPr>
-          <p:cNvPr id="12" name="No exercise">
-            <a:extLst xmlns:a="http://schemas.openxmlformats.org/drawingml/2006/main">
-              <a:ext uri="{FF2B5EF4-FFF2-40B4-BE49-F238E27FC236}">
-                <a16:creationId xmlns:a16="http://schemas.microsoft.com/office/drawing/2014/main" id="{04BE3EF8-7570-4831-98BC-39B5EE057454}"/>
+          <p:cNvPr id="13" name="No exercise">
+            <a:extLst xmlns:a="http://schemas.openxmlformats.org/drawingml/2006/main">
+              <a:ext uri="{FF2B5EF4-FFF2-40B4-BE49-F238E27FC236}">
+                <a16:creationId xmlns:a16="http://schemas.microsoft.com/office/drawing/2014/main" id="{EF9F30CD-6160-4487-9601-6F44825FC8FE}"/>
               </a:ext>
             </a:extLst>
           </p:cNvPr>
@@ -14741,10 +15126,10 @@
       </p:sp>
       <p:sp>
         <p:nvSpPr>
-          <p:cNvPr id="13" name="450">
-            <a:extLst xmlns:a="http://schemas.openxmlformats.org/drawingml/2006/main">
-              <a:ext uri="{FF2B5EF4-FFF2-40B4-BE49-F238E27FC236}">
-                <a16:creationId xmlns:a16="http://schemas.microsoft.com/office/drawing/2014/main" id="{03217E04-60E5-4520-9499-4236AB74733F}"/>
+          <p:cNvPr id="14" name="450">
+            <a:extLst xmlns:a="http://schemas.openxmlformats.org/drawingml/2006/main">
+              <a:ext uri="{FF2B5EF4-FFF2-40B4-BE49-F238E27FC236}">
+                <a16:creationId xmlns:a16="http://schemas.microsoft.com/office/drawing/2014/main" id="{888E71A9-455E-4F8C-A067-9871014F3831}"/>
               </a:ext>
             </a:extLst>
           </p:cNvPr>
@@ -14798,10 +15183,10 @@
       </p:sp>
       <p:sp>
         <p:nvSpPr>
-          <p:cNvPr id="14" name="400 USDG buys 1 TSLA">
-            <a:extLst xmlns:a="http://schemas.openxmlformats.org/drawingml/2006/main">
-              <a:ext uri="{FF2B5EF4-FFF2-40B4-BE49-F238E27FC236}">
-                <a16:creationId xmlns:a16="http://schemas.microsoft.com/office/drawing/2014/main" id="{956F7884-4BE6-42C6-8062-D13427BBFB1D}"/>
+          <p:cNvPr id="15" name="400 USDG buys 1 AAPL">
+            <a:extLst xmlns:a="http://schemas.openxmlformats.org/drawingml/2006/main">
+              <a:ext uri="{FF2B5EF4-FFF2-40B4-BE49-F238E27FC236}">
+                <a16:creationId xmlns:a16="http://schemas.microsoft.com/office/drawing/2014/main" id="{F30A7E05-D7D1-4145-A29F-1CE93817CFB2}"/>
               </a:ext>
             </a:extLst>
           </p:cNvPr>
@@ -14848,17 +15233,17 @@
                 <a:ea typeface="Arial"/>
                 <a:cs typeface="Arial"/>
               </a:rPr>
-              <a:t>400 USDG buys 1 TSLA</a:t>
-            </a:r>
-          </a:p>
-        </p:txBody>
-      </p:sp>
-      <p:sp>
-        <p:nvSpPr>
-          <p:cNvPr id="15" name="Call writer reserves TSLA. Put writer reserves strike × quan">
-            <a:extLst xmlns:a="http://schemas.openxmlformats.org/drawingml/2006/main">
-              <a:ext uri="{FF2B5EF4-FFF2-40B4-BE49-F238E27FC236}">
-                <a16:creationId xmlns:a16="http://schemas.microsoft.com/office/drawing/2014/main" id="{A6319D5F-5157-4DC8-BB51-7E7D7D9901FC}"/>
+              <a:t>400 USDG buys 1 AAPL</a:t>
+            </a:r>
+          </a:p>
+        </p:txBody>
+      </p:sp>
+      <p:sp>
+        <p:nvSpPr>
+          <p:cNvPr id="16" name="Call writer reserves AAPL. Put writer reserves strike × quan">
+            <a:extLst xmlns:a="http://schemas.openxmlformats.org/drawingml/2006/main">
+              <a:ext uri="{FF2B5EF4-FFF2-40B4-BE49-F238E27FC236}">
+                <a16:creationId xmlns:a16="http://schemas.microsoft.com/office/drawing/2014/main" id="{9D4FAF7B-0964-4EF4-9444-EA10EC9449DD}"/>
               </a:ext>
             </a:extLst>
           </p:cNvPr>
@@ -14905,7 +15290,7 @@
                 <a:ea typeface="Arial"/>
                 <a:cs typeface="Arial"/>
               </a:rPr>
-              <a:t>Call writer reserves TSLA. Put writer reserves strike × quantity in USDG.</a:t>
+              <a:t>Call writer reserves AAPL. Put writer reserves strike × quantity in USDG.</a:t>
             </a:r>
           </a:p>
         </p:txBody>
@@ -14913,7 +15298,7 @@
     </p:spTree>
     <p:extLst>
       <p:ext uri="{BB962C8B-B14F-4D97-AF65-F5344CB8AC3E}">
-        <p14:creationId xmlns:p14="http://schemas.microsoft.com/office/powerpoint/2010/main" val="527458710"/>
+        <p14:creationId xmlns:p14="http://schemas.microsoft.com/office/powerpoint/2010/main" val="337895430"/>
       </p:ext>
     </p:extLst>
   </p:cSld>
@@ -14944,7 +15329,7 @@
           <p:cNvPr id="17" name="Evidence you can reproduce">
             <a:extLst xmlns:a="http://schemas.openxmlformats.org/drawingml/2006/main">
               <a:ext uri="{FF2B5EF4-FFF2-40B4-BE49-F238E27FC236}">
-                <a16:creationId xmlns:a16="http://schemas.microsoft.com/office/drawing/2014/main" id="{62454FD8-DFEA-46FF-A179-5D457F7898F2}"/>
+                <a16:creationId xmlns:a16="http://schemas.microsoft.com/office/drawing/2014/main" id="{4689237F-FBEC-40E3-A11F-A2567888D28F}"/>
               </a:ext>
             </a:extLst>
           </p:cNvPr>
@@ -15005,7 +15390,7 @@
           <p:nvPr/>
         </p:nvPicPr>
         <p:blipFill>
-          <a:blip xmlns:r="http://schemas.openxmlformats.org/officeDocument/2006/relationships" xmlns:a="http://schemas.openxmlformats.org/drawingml/2006/main" r:embed="R157df212f9894980"/>
+          <a:blip xmlns:r="http://schemas.openxmlformats.org/officeDocument/2006/relationships" xmlns:a="http://schemas.openxmlformats.org/drawingml/2006/main" r:embed="R9a66dc1d11584177"/>
           <a:stretch xmlns:a="http://schemas.openxmlformats.org/drawingml/2006/main"/>
         </p:blipFill>
         <p:spPr>
@@ -15023,7 +15408,7 @@
           <p:cNvPr id="3" name="Vexi Hakari">
             <a:extLst xmlns:a="http://schemas.openxmlformats.org/drawingml/2006/main">
               <a:ext uri="{FF2B5EF4-FFF2-40B4-BE49-F238E27FC236}">
-                <a16:creationId xmlns:a16="http://schemas.microsoft.com/office/drawing/2014/main" id="{23EFB8B0-AB88-4D9E-BD60-B156215FC07C}"/>
+                <a16:creationId xmlns:a16="http://schemas.microsoft.com/office/drawing/2014/main" id="{0D1EA15E-0601-4749-A40C-F5714C3AD68A}"/>
               </a:ext>
             </a:extLst>
           </p:cNvPr>
@@ -15080,7 +15465,7 @@
           <p:cNvPr id="4" name="A6">
             <a:extLst xmlns:a="http://schemas.openxmlformats.org/drawingml/2006/main">
               <a:ext uri="{FF2B5EF4-FFF2-40B4-BE49-F238E27FC236}">
-                <a16:creationId xmlns:a16="http://schemas.microsoft.com/office/drawing/2014/main" id="{94E0A920-C4EE-46B9-8785-0A1EE820F361}"/>
+                <a16:creationId xmlns:a16="http://schemas.microsoft.com/office/drawing/2014/main" id="{83FD02D4-8101-4188-A902-4B38AEE5C1DA}"/>
               </a:ext>
             </a:extLst>
           </p:cNvPr>
@@ -15137,7 +15522,7 @@
           <p:cNvPr id="5" name="1 + 4 = 5">
             <a:extLst xmlns:a="http://schemas.openxmlformats.org/drawingml/2006/main">
               <a:ext uri="{FF2B5EF4-FFF2-40B4-BE49-F238E27FC236}">
-                <a16:creationId xmlns:a16="http://schemas.microsoft.com/office/drawing/2014/main" id="{E83862D7-3910-4A87-AB85-0075ECAEF372}"/>
+                <a16:creationId xmlns:a16="http://schemas.microsoft.com/office/drawing/2014/main" id="{E9BD3858-3BB6-42CE-AB0B-B254A506EBDB}"/>
               </a:ext>
             </a:extLst>
           </p:cNvPr>
@@ -15194,7 +15579,7 @@
           <p:cNvPr id="6" name="One 15-step lifecycle + four independent cases = five tests">
             <a:extLst xmlns:a="http://schemas.openxmlformats.org/drawingml/2006/main">
               <a:ext uri="{FF2B5EF4-FFF2-40B4-BE49-F238E27FC236}">
-                <a16:creationId xmlns:a16="http://schemas.microsoft.com/office/drawing/2014/main" id="{5440F8C1-7342-4588-8951-14E08217DDC1}"/>
+                <a16:creationId xmlns:a16="http://schemas.microsoft.com/office/drawing/2014/main" id="{F0973B8D-2C2B-46D8-8984-DC61BFB79FC1}"/>
               </a:ext>
             </a:extLst>
           </p:cNvPr>
@@ -15251,7 +15636,7 @@
           <p:cNvPr id="7" name="Source">
             <a:extLst xmlns:a="http://schemas.openxmlformats.org/drawingml/2006/main">
               <a:ext uri="{FF2B5EF4-FFF2-40B4-BE49-F238E27FC236}">
-                <a16:creationId xmlns:a16="http://schemas.microsoft.com/office/drawing/2014/main" id="{B83D1B1A-24BB-42B3-AD56-BD76F4F9B550}"/>
+                <a16:creationId xmlns:a16="http://schemas.microsoft.com/office/drawing/2014/main" id="{F17EC842-6F95-43C6-9A67-955E0F01F4F8}"/>
               </a:ext>
             </a:extLst>
           </p:cNvPr>
@@ -15312,7 +15697,7 @@
           <p:cNvPr id="8" name="Foundry">
             <a:extLst xmlns:a="http://schemas.openxmlformats.org/drawingml/2006/main">
               <a:ext uri="{FF2B5EF4-FFF2-40B4-BE49-F238E27FC236}">
-                <a16:creationId xmlns:a16="http://schemas.microsoft.com/office/drawing/2014/main" id="{3CEC6C9F-C479-49CA-A998-0399903304E0}"/>
+                <a16:creationId xmlns:a16="http://schemas.microsoft.com/office/drawing/2014/main" id="{48FC2F39-D957-4D17-9CBD-5E2DF98231A8}"/>
               </a:ext>
             </a:extLst>
           </p:cNvPr>
@@ -15373,7 +15758,7 @@
           <p:cNvPr id="9" name="JSON + trace">
             <a:extLst xmlns:a="http://schemas.openxmlformats.org/drawingml/2006/main">
               <a:ext uri="{FF2B5EF4-FFF2-40B4-BE49-F238E27FC236}">
-                <a16:creationId xmlns:a16="http://schemas.microsoft.com/office/drawing/2014/main" id="{BA46421E-F9F1-4778-8C88-8384D2BAEB4D}"/>
+                <a16:creationId xmlns:a16="http://schemas.microsoft.com/office/drawing/2014/main" id="{F78ABABA-1D5F-4FA5-969A-04A9FA2E32F9}"/>
               </a:ext>
             </a:extLst>
           </p:cNvPr>
@@ -15434,7 +15819,7 @@
           <p:cNvPr id="10" name="Website">
             <a:extLst xmlns:a="http://schemas.openxmlformats.org/drawingml/2006/main">
               <a:ext uri="{FF2B5EF4-FFF2-40B4-BE49-F238E27FC236}">
-                <a16:creationId xmlns:a16="http://schemas.microsoft.com/office/drawing/2014/main" id="{BFE91B30-C0B1-438F-9C9E-D2E1B60D7AC0}"/>
+                <a16:creationId xmlns:a16="http://schemas.microsoft.com/office/drawing/2014/main" id="{D481EFE0-FA63-4BC5-A590-115F4000F189}"/>
               </a:ext>
             </a:extLst>
           </p:cNvPr>
@@ -15573,7 +15958,7 @@
           <p:cNvPr id="14" name="4663 fork @ 72,248,228">
             <a:extLst xmlns:a="http://schemas.openxmlformats.org/drawingml/2006/main">
               <a:ext uri="{FF2B5EF4-FFF2-40B4-BE49-F238E27FC236}">
-                <a16:creationId xmlns:a16="http://schemas.microsoft.com/office/drawing/2014/main" id="{AB3588B4-6A88-4382-AF5B-455C7BCE975D}"/>
+                <a16:creationId xmlns:a16="http://schemas.microsoft.com/office/drawing/2014/main" id="{D7723231-E10A-41EB-9510-8085436DF489}"/>
               </a:ext>
             </a:extLst>
           </p:cNvPr>
@@ -15630,7 +16015,7 @@
           <p:cNvPr id="15" name="0 mainnet broadcasts">
             <a:extLst xmlns:a="http://schemas.openxmlformats.org/drawingml/2006/main">
               <a:ext uri="{FF2B5EF4-FFF2-40B4-BE49-F238E27FC236}">
-                <a16:creationId xmlns:a16="http://schemas.microsoft.com/office/drawing/2014/main" id="{3AA65B85-331E-492E-BD73-B5AE7776D63E}"/>
+                <a16:creationId xmlns:a16="http://schemas.microsoft.com/office/drawing/2014/main" id="{B48CAC87-3545-4963-BCB5-E290DFCF877A}"/>
               </a:ext>
             </a:extLst>
           </p:cNvPr>
@@ -15687,7 +16072,7 @@
           <p:cNvPr id="16" name="github.com/vexi-v1/vexi-hakari">
             <a:extLst xmlns:a="http://schemas.openxmlformats.org/drawingml/2006/main">
               <a:ext uri="{FF2B5EF4-FFF2-40B4-BE49-F238E27FC236}">
-                <a16:creationId xmlns:a16="http://schemas.microsoft.com/office/drawing/2014/main" id="{B50F9222-45CC-439C-BF09-00C6DCE3A277}"/>
+                <a16:creationId xmlns:a16="http://schemas.microsoft.com/office/drawing/2014/main" id="{809A88CF-EF18-469C-A7CD-71BD81F0D4F4}"/>
               </a:ext>
             </a:extLst>
           </p:cNvPr>
@@ -15733,7 +16118,7 @@
                 <a:latin typeface="Arial"/>
                 <a:ea typeface="Arial"/>
                 <a:cs typeface="Arial"/>
-                <a:hlinkClick xmlns:r="http://schemas.openxmlformats.org/officeDocument/2006/relationships" r:id="Rf27e3ec583e047b8"/>
+                <a:hlinkClick xmlns:r="http://schemas.openxmlformats.org/officeDocument/2006/relationships" r:id="R991bd7c57b5f4b34"/>
               </a:rPr>
               <a:t>github.com/vexi-v1/vexi-hakari</a:t>
             </a:r>
@@ -15743,7 +16128,7 @@
     </p:spTree>
     <p:extLst>
       <p:ext uri="{BB962C8B-B14F-4D97-AF65-F5344CB8AC3E}">
-        <p14:creationId xmlns:p14="http://schemas.microsoft.com/office/powerpoint/2010/main" val="1259805597"/>
+        <p14:creationId xmlns:p14="http://schemas.microsoft.com/office/powerpoint/2010/main" val="1096163605"/>
       </p:ext>
     </p:extLst>
   </p:cSld>
@@ -15774,7 +16159,7 @@
           <p:cNvPr id="17" name="Idle collateral and stale quotes">
             <a:extLst xmlns:a="http://schemas.openxmlformats.org/drawingml/2006/main">
               <a:ext uri="{FF2B5EF4-FFF2-40B4-BE49-F238E27FC236}">
-                <a16:creationId xmlns:a16="http://schemas.microsoft.com/office/drawing/2014/main" id="{BC982F20-EA6F-4C8A-BD17-0F319CAC0555}"/>
+                <a16:creationId xmlns:a16="http://schemas.microsoft.com/office/drawing/2014/main" id="{81436C24-7F7A-4507-BDCC-E4F32D8FCD42}"/>
               </a:ext>
             </a:extLst>
           </p:cNvPr>
@@ -15835,7 +16220,7 @@
           <p:nvPr/>
         </p:nvPicPr>
         <p:blipFill>
-          <a:blip xmlns:r="http://schemas.openxmlformats.org/officeDocument/2006/relationships" xmlns:a="http://schemas.openxmlformats.org/drawingml/2006/main" r:embed="R66df66119f334d58"/>
+          <a:blip xmlns:r="http://schemas.openxmlformats.org/officeDocument/2006/relationships" xmlns:a="http://schemas.openxmlformats.org/drawingml/2006/main" r:embed="R4496b4996b084a0d"/>
           <a:stretch xmlns:a="http://schemas.openxmlformats.org/drawingml/2006/main"/>
         </p:blipFill>
         <p:spPr>
@@ -15853,7 +16238,7 @@
           <p:cNvPr id="3" name="Vexi Hakari">
             <a:extLst xmlns:a="http://schemas.openxmlformats.org/drawingml/2006/main">
               <a:ext uri="{FF2B5EF4-FFF2-40B4-BE49-F238E27FC236}">
-                <a16:creationId xmlns:a16="http://schemas.microsoft.com/office/drawing/2014/main" id="{11AD775D-E784-4C91-8508-2ABBFBD9D3CC}"/>
+                <a16:creationId xmlns:a16="http://schemas.microsoft.com/office/drawing/2014/main" id="{2FC5EBDA-22A9-4BCC-A546-950D5B16CBC1}"/>
               </a:ext>
             </a:extLst>
           </p:cNvPr>
@@ -15910,7 +16295,7 @@
           <p:cNvPr id="4" name="3">
             <a:extLst xmlns:a="http://schemas.openxmlformats.org/drawingml/2006/main">
               <a:ext uri="{FF2B5EF4-FFF2-40B4-BE49-F238E27FC236}">
-                <a16:creationId xmlns:a16="http://schemas.microsoft.com/office/drawing/2014/main" id="{DCDAE380-63EB-41ED-B271-E275B7CFDA88}"/>
+                <a16:creationId xmlns:a16="http://schemas.microsoft.com/office/drawing/2014/main" id="{85AD8814-49C2-4D27-90B7-0277AEA45E65}"/>
               </a:ext>
             </a:extLst>
           </p:cNvPr>
@@ -15967,7 +16352,7 @@
           <p:cNvPr id="5" name="Collateral before a buyer">
             <a:extLst xmlns:a="http://schemas.openxmlformats.org/drawingml/2006/main">
               <a:ext uri="{FF2B5EF4-FFF2-40B4-BE49-F238E27FC236}">
-                <a16:creationId xmlns:a16="http://schemas.microsoft.com/office/drawing/2014/main" id="{1AE41A9A-73F9-4C82-8140-8AF52D82F85A}"/>
+                <a16:creationId xmlns:a16="http://schemas.microsoft.com/office/drawing/2014/main" id="{ED993D77-E049-446F-AD3A-C3CC07BA0C46}"/>
               </a:ext>
             </a:extLst>
           </p:cNvPr>
@@ -16024,7 +16409,7 @@
           <p:cNvPr id="6" name="Pool moves, quote stays fixed">
             <a:extLst xmlns:a="http://schemas.openxmlformats.org/drawingml/2006/main">
               <a:ext uri="{FF2B5EF4-FFF2-40B4-BE49-F238E27FC236}">
-                <a16:creationId xmlns:a16="http://schemas.microsoft.com/office/drawing/2014/main" id="{BD8D0EE8-7C4F-4C04-AAB6-F03E74B542F5}"/>
+                <a16:creationId xmlns:a16="http://schemas.microsoft.com/office/drawing/2014/main" id="{4EF3A0D2-AA92-4A76-8068-76EDA1F651C3}"/>
               </a:ext>
             </a:extLst>
           </p:cNvPr>
@@ -16088,7 +16473,7 @@
         </p:xfrm>
         <a:graphic xmlns:a="http://schemas.openxmlformats.org/drawingml/2006/main">
           <a:graphicData uri="http://schemas.openxmlformats.org/drawingml/2006/chart">
-            <c:chart xmlns:r="http://schemas.openxmlformats.org/officeDocument/2006/relationships" xmlns:c="http://schemas.openxmlformats.org/drawingml/2006/chart" r:id="Rbecef2aa14984766"/>
+            <c:chart xmlns:r="http://schemas.openxmlformats.org/officeDocument/2006/relationships" xmlns:c="http://schemas.openxmlformats.org/drawingml/2006/chart" r:id="R1b2dbddcfa964eab"/>
           </a:graphicData>
         </a:graphic>
       </p:graphicFrame>
@@ -16097,7 +16482,7 @@
           <p:cNvPr id="8" name="━">
             <a:extLst xmlns:a="http://schemas.openxmlformats.org/drawingml/2006/main">
               <a:ext uri="{FF2B5EF4-FFF2-40B4-BE49-F238E27FC236}">
-                <a16:creationId xmlns:a16="http://schemas.microsoft.com/office/drawing/2014/main" id="{B8BCED37-666E-426A-9368-F3860578DA3B}"/>
+                <a16:creationId xmlns:a16="http://schemas.microsoft.com/office/drawing/2014/main" id="{DB890F1D-BB4B-4EDE-8149-BDFF519C64D8}"/>
               </a:ext>
             </a:extLst>
           </p:cNvPr>
@@ -16154,7 +16539,7 @@
           <p:cNvPr id="9" name="Sold">
             <a:extLst xmlns:a="http://schemas.openxmlformats.org/drawingml/2006/main">
               <a:ext uri="{FF2B5EF4-FFF2-40B4-BE49-F238E27FC236}">
-                <a16:creationId xmlns:a16="http://schemas.microsoft.com/office/drawing/2014/main" id="{D31D2709-0F3B-4856-B5FD-5067CEF1097D}"/>
+                <a16:creationId xmlns:a16="http://schemas.microsoft.com/office/drawing/2014/main" id="{7CF197B2-8B90-471B-AF2A-58C4F9DC9A9A}"/>
               </a:ext>
             </a:extLst>
           </p:cNvPr>
@@ -16211,7 +16596,7 @@
           <p:cNvPr id="10" name="━">
             <a:extLst xmlns:a="http://schemas.openxmlformats.org/drawingml/2006/main">
               <a:ext uri="{FF2B5EF4-FFF2-40B4-BE49-F238E27FC236}">
-                <a16:creationId xmlns:a16="http://schemas.microsoft.com/office/drawing/2014/main" id="{3FB5B0FF-E1A8-43F4-A7F5-11D3F80C5AF1}"/>
+                <a16:creationId xmlns:a16="http://schemas.microsoft.com/office/drawing/2014/main" id="{44A17C3B-AF29-4887-BB21-63A11272C4B6}"/>
               </a:ext>
             </a:extLst>
           </p:cNvPr>
@@ -16268,7 +16653,7 @@
           <p:cNvPr id="11" name="Unsold">
             <a:extLst xmlns:a="http://schemas.openxmlformats.org/drawingml/2006/main">
               <a:ext uri="{FF2B5EF4-FFF2-40B4-BE49-F238E27FC236}">
-                <a16:creationId xmlns:a16="http://schemas.microsoft.com/office/drawing/2014/main" id="{7A4CCEF7-0A56-4C97-B51C-24953E90E2F7}"/>
+                <a16:creationId xmlns:a16="http://schemas.microsoft.com/office/drawing/2014/main" id="{73277FB7-F399-4DF8-B561-B88629832F69}"/>
               </a:ext>
             </a:extLst>
           </p:cNvPr>
@@ -16332,7 +16717,7 @@
         </p:xfrm>
         <a:graphic xmlns:a="http://schemas.openxmlformats.org/drawingml/2006/main">
           <a:graphicData uri="http://schemas.openxmlformats.org/drawingml/2006/chart">
-            <c:chart xmlns:r="http://schemas.openxmlformats.org/officeDocument/2006/relationships" xmlns:c="http://schemas.openxmlformats.org/drawingml/2006/chart" r:id="R0ea9f841363248fd"/>
+            <c:chart xmlns:r="http://schemas.openxmlformats.org/officeDocument/2006/relationships" xmlns:c="http://schemas.openxmlformats.org/drawingml/2006/chart" r:id="Rb309ce8f39714406"/>
           </a:graphicData>
         </a:graphic>
       </p:graphicFrame>
@@ -16341,7 +16726,7 @@
           <p:cNvPr id="13" name="Illustrative deposit-first model">
             <a:extLst xmlns:a="http://schemas.openxmlformats.org/drawingml/2006/main">
               <a:ext uri="{FF2B5EF4-FFF2-40B4-BE49-F238E27FC236}">
-                <a16:creationId xmlns:a16="http://schemas.microsoft.com/office/drawing/2014/main" id="{12573175-4AE7-4DC5-B16F-1EC52EE7F0FE}"/>
+                <a16:creationId xmlns:a16="http://schemas.microsoft.com/office/drawing/2014/main" id="{A50355FD-57A3-4620-AE85-5F99FF8DAD86}"/>
               </a:ext>
             </a:extLst>
           </p:cNvPr>
@@ -16398,7 +16783,7 @@
           <p:cNvPr id="14" name="Schematic price path">
             <a:extLst xmlns:a="http://schemas.openxmlformats.org/drawingml/2006/main">
               <a:ext uri="{FF2B5EF4-FFF2-40B4-BE49-F238E27FC236}">
-                <a16:creationId xmlns:a16="http://schemas.microsoft.com/office/drawing/2014/main" id="{A66D1C27-6B9D-4BF7-85FB-4894D491D446}"/>
+                <a16:creationId xmlns:a16="http://schemas.microsoft.com/office/drawing/2014/main" id="{7E6F0B64-D0A9-4D35-8EE8-CA1A409366A4}"/>
               </a:ext>
             </a:extLst>
           </p:cNvPr>
@@ -16455,7 +16840,7 @@
           <p:cNvPr id="15" name="Aqua: transfer at fill">
             <a:extLst xmlns:a="http://schemas.openxmlformats.org/drawingml/2006/main">
               <a:ext uri="{FF2B5EF4-FFF2-40B4-BE49-F238E27FC236}">
-                <a16:creationId xmlns:a16="http://schemas.microsoft.com/office/drawing/2014/main" id="{C326677B-B6CC-40E2-949C-A190308C12AC}"/>
+                <a16:creationId xmlns:a16="http://schemas.microsoft.com/office/drawing/2014/main" id="{7FA5240E-3036-47E2-8D60-C39A7B6CC18D}"/>
               </a:ext>
             </a:extLst>
           </p:cNvPr>
@@ -16512,7 +16897,7 @@
           <p:cNvPr id="16" name="Band: recheck each quote">
             <a:extLst xmlns:a="http://schemas.openxmlformats.org/drawingml/2006/main">
               <a:ext uri="{FF2B5EF4-FFF2-40B4-BE49-F238E27FC236}">
-                <a16:creationId xmlns:a16="http://schemas.microsoft.com/office/drawing/2014/main" id="{5265482D-EE46-4E42-9439-5C142E09A886}"/>
+                <a16:creationId xmlns:a16="http://schemas.microsoft.com/office/drawing/2014/main" id="{FEBE98DB-7D47-4720-AB8B-AF7ABCA0DC91}"/>
               </a:ext>
             </a:extLst>
           </p:cNvPr>
@@ -16567,7 +16952,7 @@
     </p:spTree>
     <p:extLst>
       <p:ext uri="{BB962C8B-B14F-4D97-AF65-F5344CB8AC3E}">
-        <p14:creationId xmlns:p14="http://schemas.microsoft.com/office/powerpoint/2010/main" val="1603874327"/>
+        <p14:creationId xmlns:p14="http://schemas.microsoft.com/office/powerpoint/2010/main" val="125558721"/>
       </p:ext>
     </p:extLst>
   </p:cSld>
@@ -16598,7 +16983,7 @@
           <p:cNvPr id="22" name="The public integration">
             <a:extLst xmlns:a="http://schemas.openxmlformats.org/drawingml/2006/main">
               <a:ext uri="{FF2B5EF4-FFF2-40B4-BE49-F238E27FC236}">
-                <a16:creationId xmlns:a16="http://schemas.microsoft.com/office/drawing/2014/main" id="{BDC72A54-5CE7-464A-82FF-7E70FE869154}"/>
+                <a16:creationId xmlns:a16="http://schemas.microsoft.com/office/drawing/2014/main" id="{4A62D34E-ED2D-4678-9433-3DEADCA815B8}"/>
               </a:ext>
             </a:extLst>
           </p:cNvPr>
@@ -16659,7 +17044,7 @@
           <p:nvPr/>
         </p:nvPicPr>
         <p:blipFill>
-          <a:blip xmlns:r="http://schemas.openxmlformats.org/officeDocument/2006/relationships" xmlns:a="http://schemas.openxmlformats.org/drawingml/2006/main" r:embed="R664b1a87666b4075"/>
+          <a:blip xmlns:r="http://schemas.openxmlformats.org/officeDocument/2006/relationships" xmlns:a="http://schemas.openxmlformats.org/drawingml/2006/main" r:embed="Rd8abcd4631624975"/>
           <a:stretch xmlns:a="http://schemas.openxmlformats.org/drawingml/2006/main"/>
         </p:blipFill>
         <p:spPr>
@@ -16677,7 +17062,7 @@
           <p:cNvPr id="3" name="Vexi Hakari">
             <a:extLst xmlns:a="http://schemas.openxmlformats.org/drawingml/2006/main">
               <a:ext uri="{FF2B5EF4-FFF2-40B4-BE49-F238E27FC236}">
-                <a16:creationId xmlns:a16="http://schemas.microsoft.com/office/drawing/2014/main" id="{45C4466A-45E8-4807-B319-0137397435F6}"/>
+                <a16:creationId xmlns:a16="http://schemas.microsoft.com/office/drawing/2014/main" id="{C8C860C5-5F10-4C2A-ADCB-5AA932D71A12}"/>
               </a:ext>
             </a:extLst>
           </p:cNvPr>
@@ -16734,7 +17119,7 @@
           <p:cNvPr id="4" name="4">
             <a:extLst xmlns:a="http://schemas.openxmlformats.org/drawingml/2006/main">
               <a:ext uri="{FF2B5EF4-FFF2-40B4-BE49-F238E27FC236}">
-                <a16:creationId xmlns:a16="http://schemas.microsoft.com/office/drawing/2014/main" id="{56DF0E0E-96E4-45BC-AB31-19447490D841}"/>
+                <a16:creationId xmlns:a16="http://schemas.microsoft.com/office/drawing/2014/main" id="{606DA53A-DF00-44BE-896C-61B090219A1D}"/>
               </a:ext>
             </a:extLst>
           </p:cNvPr>
@@ -16791,7 +17176,7 @@
           <p:cNvPr id="5" name="Maker wallet">
             <a:extLst xmlns:a="http://schemas.openxmlformats.org/drawingml/2006/main">
               <a:ext uri="{FF2B5EF4-FFF2-40B4-BE49-F238E27FC236}">
-                <a16:creationId xmlns:a16="http://schemas.microsoft.com/office/drawing/2014/main" id="{AEBF1262-8FFC-4550-839E-79B522689701}"/>
+                <a16:creationId xmlns:a16="http://schemas.microsoft.com/office/drawing/2014/main" id="{F9227302-33EE-49E1-AE45-35E468406647}"/>
               </a:ext>
             </a:extLst>
           </p:cNvPr>
@@ -16852,7 +17237,7 @@
           <p:cNvPr id="6" name="Aqua">
             <a:extLst xmlns:a="http://schemas.openxmlformats.org/drawingml/2006/main">
               <a:ext uri="{FF2B5EF4-FFF2-40B4-BE49-F238E27FC236}">
-                <a16:creationId xmlns:a16="http://schemas.microsoft.com/office/drawing/2014/main" id="{1A3394C9-597A-45F3-869A-02790A7DA851}"/>
+                <a16:creationId xmlns:a16="http://schemas.microsoft.com/office/drawing/2014/main" id="{3088AB5B-A876-4AF4-AAAD-3730DF7333D7}"/>
               </a:ext>
             </a:extLst>
           </p:cNvPr>
@@ -16913,7 +17298,7 @@
           <p:cNvPr id="7" name="Writer">
             <a:extLst xmlns:a="http://schemas.openxmlformats.org/drawingml/2006/main">
               <a:ext uri="{FF2B5EF4-FFF2-40B4-BE49-F238E27FC236}">
-                <a16:creationId xmlns:a16="http://schemas.microsoft.com/office/drawing/2014/main" id="{C6F185C0-B86D-4C15-842E-A73A388DFD24}"/>
+                <a16:creationId xmlns:a16="http://schemas.microsoft.com/office/drawing/2014/main" id="{4714FEC9-853D-47D4-AD5C-5BDDF609985C}"/>
               </a:ext>
             </a:extLst>
           </p:cNvPr>
@@ -16974,7 +17359,7 @@
           <p:cNvPr id="8" name="Book">
             <a:extLst xmlns:a="http://schemas.openxmlformats.org/drawingml/2006/main">
               <a:ext uri="{FF2B5EF4-FFF2-40B4-BE49-F238E27FC236}">
-                <a16:creationId xmlns:a16="http://schemas.microsoft.com/office/drawing/2014/main" id="{C0BF4E42-EB03-47C0-9A9A-A43BA3F6641A}"/>
+                <a16:creationId xmlns:a16="http://schemas.microsoft.com/office/drawing/2014/main" id="{0038941D-6A8D-46A3-9FB3-9E0E79ED88F3}"/>
               </a:ext>
             </a:extLst>
           </p:cNvPr>
@@ -17035,7 +17420,7 @@
           <p:cNvPr id="9" name="SwapVM">
             <a:extLst xmlns:a="http://schemas.openxmlformats.org/drawingml/2006/main">
               <a:ext uri="{FF2B5EF4-FFF2-40B4-BE49-F238E27FC236}">
-                <a16:creationId xmlns:a16="http://schemas.microsoft.com/office/drawing/2014/main" id="{FCA87454-D2FC-49C1-B750-69C425D8DA88}"/>
+                <a16:creationId xmlns:a16="http://schemas.microsoft.com/office/drawing/2014/main" id="{B05C3D24-9BF3-4B53-934C-B6DC5D8A75F1}"/>
               </a:ext>
             </a:extLst>
           </p:cNvPr>
@@ -17096,7 +17481,7 @@
           <p:cNvPr id="10" name="Guard">
             <a:extLst xmlns:a="http://schemas.openxmlformats.org/drawingml/2006/main">
               <a:ext uri="{FF2B5EF4-FFF2-40B4-BE49-F238E27FC236}">
-                <a16:creationId xmlns:a16="http://schemas.microsoft.com/office/drawing/2014/main" id="{C77B1CE1-8C59-4A23-8366-C2E126464A5F}"/>
+                <a16:creationId xmlns:a16="http://schemas.microsoft.com/office/drawing/2014/main" id="{DCF2AB1A-2073-4D78-9F4A-B9D686C7FEE2}"/>
               </a:ext>
             </a:extLst>
           </p:cNvPr>
@@ -17157,7 +17542,7 @@
           <p:cNvPr id="11" name="v4 hook&#10;+ band">
             <a:extLst xmlns:a="http://schemas.openxmlformats.org/drawingml/2006/main">
               <a:ext uri="{FF2B5EF4-FFF2-40B4-BE49-F238E27FC236}">
-                <a16:creationId xmlns:a16="http://schemas.microsoft.com/office/drawing/2014/main" id="{3CA7D8BD-39F5-4C82-99BE-FC8AB285B05B}"/>
+                <a16:creationId xmlns:a16="http://schemas.microsoft.com/office/drawing/2014/main" id="{B10999F2-8EDC-4428-9C3A-5FECC52AEB0E}"/>
               </a:ext>
             </a:extLst>
           </p:cNvPr>
@@ -17403,7 +17788,7 @@
           <p:cNvPr id="18" name="Asset access">
             <a:extLst xmlns:a="http://schemas.openxmlformats.org/drawingml/2006/main">
               <a:ext uri="{FF2B5EF4-FFF2-40B4-BE49-F238E27FC236}">
-                <a16:creationId xmlns:a16="http://schemas.microsoft.com/office/drawing/2014/main" id="{E4858FDD-DB11-4689-AADC-F783F5E85969}"/>
+                <a16:creationId xmlns:a16="http://schemas.microsoft.com/office/drawing/2014/main" id="{E13C2319-80DF-4FFE-A143-5E894D8B73B8}"/>
               </a:ext>
             </a:extLst>
           </p:cNvPr>
@@ -17460,7 +17845,7 @@
           <p:cNvPr id="19" name="Options">
             <a:extLst xmlns:a="http://schemas.openxmlformats.org/drawingml/2006/main">
               <a:ext uri="{FF2B5EF4-FFF2-40B4-BE49-F238E27FC236}">
-                <a16:creationId xmlns:a16="http://schemas.microsoft.com/office/drawing/2014/main" id="{01684875-16BB-4666-B78F-F25F23109BE8}"/>
+                <a16:creationId xmlns:a16="http://schemas.microsoft.com/office/drawing/2014/main" id="{FE2129AD-FFCA-4DC1-B7ED-8AF3231A0FB8}"/>
               </a:ext>
             </a:extLst>
           </p:cNvPr>
@@ -17517,7 +17902,7 @@
           <p:cNvPr id="20" name="Spot">
             <a:extLst xmlns:a="http://schemas.openxmlformats.org/drawingml/2006/main">
               <a:ext uri="{FF2B5EF4-FFF2-40B4-BE49-F238E27FC236}">
-                <a16:creationId xmlns:a16="http://schemas.microsoft.com/office/drawing/2014/main" id="{84092C94-D8C4-428D-95CC-35C628E168E8}"/>
+                <a16:creationId xmlns:a16="http://schemas.microsoft.com/office/drawing/2014/main" id="{025C9F3C-3C80-46CF-9083-14C36AB9DDD5}"/>
               </a:ext>
             </a:extLst>
           </p:cNvPr>
@@ -17574,7 +17959,7 @@
           <p:cNvPr id="21" name="One inventory, shared strategy accounting">
             <a:extLst xmlns:a="http://schemas.openxmlformats.org/drawingml/2006/main">
               <a:ext uri="{FF2B5EF4-FFF2-40B4-BE49-F238E27FC236}">
-                <a16:creationId xmlns:a16="http://schemas.microsoft.com/office/drawing/2014/main" id="{7300DB5D-9322-4476-83A9-3520F1656456}"/>
+                <a16:creationId xmlns:a16="http://schemas.microsoft.com/office/drawing/2014/main" id="{07500FD4-7094-453A-B0AC-9BFE5700D1CF}"/>
               </a:ext>
             </a:extLst>
           </p:cNvPr>
@@ -17629,7 +18014,7 @@
     </p:spTree>
     <p:extLst>
       <p:ext uri="{BB962C8B-B14F-4D97-AF65-F5344CB8AC3E}">
-        <p14:creationId xmlns:p14="http://schemas.microsoft.com/office/powerpoint/2010/main" val="121985167"/>
+        <p14:creationId xmlns:p14="http://schemas.microsoft.com/office/powerpoint/2010/main" val="293560068"/>
       </p:ext>
     </p:extLst>
   </p:cSld>
@@ -17657,10 +18042,10 @@
       </p:grpSpPr>
       <p:sp>
         <p:nvSpPr>
-          <p:cNvPr id="18" name="Promises stay in the maker wallet">
-            <a:extLst xmlns:a="http://schemas.openxmlformats.org/drawingml/2006/main">
-              <a:ext uri="{FF2B5EF4-FFF2-40B4-BE49-F238E27FC236}">
-                <a16:creationId xmlns:a16="http://schemas.microsoft.com/office/drawing/2014/main" id="{4A7AB30E-74A2-4F2E-A5D0-61C3B1DD852F}"/>
+          <p:cNvPr id="19" name="Promises stay in the maker wallet">
+            <a:extLst xmlns:a="http://schemas.openxmlformats.org/drawingml/2006/main">
+              <a:ext uri="{FF2B5EF4-FFF2-40B4-BE49-F238E27FC236}">
+                <a16:creationId xmlns:a16="http://schemas.microsoft.com/office/drawing/2014/main" id="{9AE260FB-6482-44D9-93CB-BBC9EF43B60C}"/>
               </a:ext>
             </a:extLst>
           </p:cNvPr>
@@ -17714,14 +18099,14 @@
       </p:sp>
       <p:pic>
         <p:nvPicPr>
-          <p:cNvPr id="19" name=""/>
+          <p:cNvPr id="20" name=""/>
           <p:cNvPicPr>
             <a:picLocks xmlns:a="http://schemas.openxmlformats.org/drawingml/2006/main" noChangeAspect="1"/>
           </p:cNvPicPr>
           <p:nvPr/>
         </p:nvPicPr>
         <p:blipFill>
-          <a:blip xmlns:r="http://schemas.openxmlformats.org/officeDocument/2006/relationships" xmlns:a="http://schemas.openxmlformats.org/drawingml/2006/main" r:embed="Raca4cf703c154d8d"/>
+          <a:blip xmlns:r="http://schemas.openxmlformats.org/officeDocument/2006/relationships" xmlns:a="http://schemas.openxmlformats.org/drawingml/2006/main" r:embed="R470d8ddcf39a4b89"/>
           <a:stretch xmlns:a="http://schemas.openxmlformats.org/drawingml/2006/main"/>
         </p:blipFill>
         <p:spPr>
@@ -17739,7 +18124,7 @@
           <p:cNvPr id="3" name="Vexi Hakari">
             <a:extLst xmlns:a="http://schemas.openxmlformats.org/drawingml/2006/main">
               <a:ext uri="{FF2B5EF4-FFF2-40B4-BE49-F238E27FC236}">
-                <a16:creationId xmlns:a16="http://schemas.microsoft.com/office/drawing/2014/main" id="{CAC49F95-B325-4B7A-8CD7-956015DECA93}"/>
+                <a16:creationId xmlns:a16="http://schemas.microsoft.com/office/drawing/2014/main" id="{D365996D-6550-4279-A56F-971E4860DE3C}"/>
               </a:ext>
             </a:extLst>
           </p:cNvPr>
@@ -17793,22 +18178,22 @@
       </p:sp>
       <p:sp>
         <p:nvSpPr>
-          <p:cNvPr id="4" name="5">
-            <a:extLst xmlns:a="http://schemas.openxmlformats.org/drawingml/2006/main">
-              <a:ext uri="{FF2B5EF4-FFF2-40B4-BE49-F238E27FC236}">
-                <a16:creationId xmlns:a16="http://schemas.microsoft.com/office/drawing/2014/main" id="{3E262DDA-91AB-4086-8731-0CDCCED18C61}"/>
-              </a:ext>
-            </a:extLst>
-          </p:cNvPr>
-          <p:cNvSpPr>
-            <a:spLocks xmlns:a="http://schemas.openxmlformats.org/drawingml/2006/main" noGrp="1"/>
-          </p:cNvSpPr>
-          <p:nvPr/>
-        </p:nvSpPr>
-        <p:spPr>
-          <a:xfrm xmlns:a="http://schemas.openxmlformats.org/drawingml/2006/main">
-            <a:off x="11001375" y="6153150"/>
-            <a:ext cx="619125" cy="342900"/>
+          <p:cNvPr id="4" name="AAPL example / illustrative amounts">
+            <a:extLst xmlns:a="http://schemas.openxmlformats.org/drawingml/2006/main">
+              <a:ext uri="{FF2B5EF4-FFF2-40B4-BE49-F238E27FC236}">
+                <a16:creationId xmlns:a16="http://schemas.microsoft.com/office/drawing/2014/main" id="{31613FF2-0DE1-4E2C-B57D-12CFBF03A223}"/>
+              </a:ext>
+            </a:extLst>
+          </p:cNvPr>
+          <p:cNvSpPr>
+            <a:spLocks xmlns:a="http://schemas.openxmlformats.org/drawingml/2006/main" noGrp="1"/>
+          </p:cNvSpPr>
+          <p:nvPr/>
+        </p:nvSpPr>
+        <p:spPr>
+          <a:xfrm xmlns:a="http://schemas.openxmlformats.org/drawingml/2006/main">
+            <a:off x="3905250" y="6153150"/>
+            <a:ext cx="6667500" cy="342900"/>
           </a:xfrm>
           <a:prstGeom xmlns:a="http://schemas.openxmlformats.org/drawingml/2006/main" prst="rect">
             <a:avLst/>
@@ -17824,7 +18209,7 @@
           </a:bodyPr>
           <a:lstStyle xmlns:a="http://schemas.openxmlformats.org/drawingml/2006/main"/>
           <a:p xmlns:a="http://schemas.openxmlformats.org/drawingml/2006/main">
-            <a:pPr algn="r">
+            <a:pPr algn="l">
               <a:defRPr sz="1275" b="0">
                 <a:solidFill>
                   <a:srgbClr val="A8A8B2"/>
@@ -17843,29 +18228,29 @@
                 <a:ea typeface="Arial"/>
                 <a:cs typeface="Arial"/>
               </a:rPr>
-              <a:t>5</a:t>
-            </a:r>
-          </a:p>
-        </p:txBody>
-      </p:sp>
-      <p:sp>
-        <p:nvSpPr>
-          <p:cNvPr id="5" name="10 calls">
-            <a:extLst xmlns:a="http://schemas.openxmlformats.org/drawingml/2006/main">
-              <a:ext uri="{FF2B5EF4-FFF2-40B4-BE49-F238E27FC236}">
-                <a16:creationId xmlns:a16="http://schemas.microsoft.com/office/drawing/2014/main" id="{22704C1E-10D4-4C45-83D9-59FBCDF5C25D}"/>
-              </a:ext>
-            </a:extLst>
-          </p:cNvPr>
-          <p:cNvSpPr>
-            <a:spLocks xmlns:a="http://schemas.openxmlformats.org/drawingml/2006/main" noGrp="1"/>
-          </p:cNvSpPr>
-          <p:nvPr/>
-        </p:nvSpPr>
-        <p:spPr>
-          <a:xfrm xmlns:a="http://schemas.openxmlformats.org/drawingml/2006/main">
-            <a:off x="714375" y="1495425"/>
-            <a:ext cx="3905250" cy="495300"/>
+              <a:t>AAPL example / illustrative amounts</a:t>
+            </a:r>
+          </a:p>
+        </p:txBody>
+      </p:sp>
+      <p:sp>
+        <p:nvSpPr>
+          <p:cNvPr id="5" name="5">
+            <a:extLst xmlns:a="http://schemas.openxmlformats.org/drawingml/2006/main">
+              <a:ext uri="{FF2B5EF4-FFF2-40B4-BE49-F238E27FC236}">
+                <a16:creationId xmlns:a16="http://schemas.microsoft.com/office/drawing/2014/main" id="{7D06C247-7BD4-4536-81EA-3BF254973CE3}"/>
+              </a:ext>
+            </a:extLst>
+          </p:cNvPr>
+          <p:cNvSpPr>
+            <a:spLocks xmlns:a="http://schemas.openxmlformats.org/drawingml/2006/main" noGrp="1"/>
+          </p:cNvSpPr>
+          <p:nvPr/>
+        </p:nvSpPr>
+        <p:spPr>
+          <a:xfrm xmlns:a="http://schemas.openxmlformats.org/drawingml/2006/main">
+            <a:off x="11001375" y="6153150"/>
+            <a:ext cx="619125" cy="342900"/>
           </a:xfrm>
           <a:prstGeom xmlns:a="http://schemas.openxmlformats.org/drawingml/2006/main" prst="rect">
             <a:avLst/>
@@ -17881,48 +18266,48 @@
           </a:bodyPr>
           <a:lstStyle xmlns:a="http://schemas.openxmlformats.org/drawingml/2006/main"/>
           <a:p xmlns:a="http://schemas.openxmlformats.org/drawingml/2006/main">
-            <a:pPr algn="l">
-              <a:defRPr sz="2325" b="1">
-                <a:solidFill>
-                  <a:srgbClr val="FAFAFA"/>
-                </a:solidFill>
-                <a:latin typeface="Arial"/>
-                <a:ea typeface="Arial"/>
-                <a:cs typeface="Arial"/>
-              </a:defRPr>
-            </a:pPr>
-            <a:r>
-              <a:rPr sz="2325" b="1">
-                <a:solidFill>
-                  <a:srgbClr val="FAFAFA"/>
-                </a:solidFill>
-                <a:latin typeface="Arial"/>
-                <a:ea typeface="Arial"/>
-                <a:cs typeface="Arial"/>
-              </a:rPr>
-              <a:t>10 calls</a:t>
-            </a:r>
-          </a:p>
-        </p:txBody>
-      </p:sp>
-      <p:sp>
-        <p:nvSpPr>
-          <p:cNvPr id="6" name="10 puts at strike 400">
-            <a:extLst xmlns:a="http://schemas.openxmlformats.org/drawingml/2006/main">
-              <a:ext uri="{FF2B5EF4-FFF2-40B4-BE49-F238E27FC236}">
-                <a16:creationId xmlns:a16="http://schemas.microsoft.com/office/drawing/2014/main" id="{243656C7-E4DB-40C5-AD70-BD2381158BA6}"/>
-              </a:ext>
-            </a:extLst>
-          </p:cNvPr>
-          <p:cNvSpPr>
-            <a:spLocks xmlns:a="http://schemas.openxmlformats.org/drawingml/2006/main" noGrp="1"/>
-          </p:cNvSpPr>
-          <p:nvPr/>
-        </p:nvSpPr>
-        <p:spPr>
-          <a:xfrm xmlns:a="http://schemas.openxmlformats.org/drawingml/2006/main">
-            <a:off x="4857750" y="1495425"/>
-            <a:ext cx="4333875" cy="495300"/>
+            <a:pPr algn="r">
+              <a:defRPr sz="1275" b="0">
+                <a:solidFill>
+                  <a:srgbClr val="A8A8B2"/>
+                </a:solidFill>
+                <a:latin typeface="Arial"/>
+                <a:ea typeface="Arial"/>
+                <a:cs typeface="Arial"/>
+              </a:defRPr>
+            </a:pPr>
+            <a:r>
+              <a:rPr sz="1275" b="0">
+                <a:solidFill>
+                  <a:srgbClr val="A8A8B2"/>
+                </a:solidFill>
+                <a:latin typeface="Arial"/>
+                <a:ea typeface="Arial"/>
+                <a:cs typeface="Arial"/>
+              </a:rPr>
+              <a:t>5</a:t>
+            </a:r>
+          </a:p>
+        </p:txBody>
+      </p:sp>
+      <p:sp>
+        <p:nvSpPr>
+          <p:cNvPr id="6" name="10 calls">
+            <a:extLst xmlns:a="http://schemas.openxmlformats.org/drawingml/2006/main">
+              <a:ext uri="{FF2B5EF4-FFF2-40B4-BE49-F238E27FC236}">
+                <a16:creationId xmlns:a16="http://schemas.microsoft.com/office/drawing/2014/main" id="{6E8D128F-3E05-479B-A7AF-869B7904F62A}"/>
+              </a:ext>
+            </a:extLst>
+          </p:cNvPr>
+          <p:cNvSpPr>
+            <a:spLocks xmlns:a="http://schemas.openxmlformats.org/drawingml/2006/main" noGrp="1"/>
+          </p:cNvSpPr>
+          <p:nvPr/>
+        </p:nvSpPr>
+        <p:spPr>
+          <a:xfrm xmlns:a="http://schemas.openxmlformats.org/drawingml/2006/main">
+            <a:off x="714375" y="1495425"/>
+            <a:ext cx="3905250" cy="495300"/>
           </a:xfrm>
           <a:prstGeom xmlns:a="http://schemas.openxmlformats.org/drawingml/2006/main" prst="rect">
             <a:avLst/>
@@ -17957,6 +18342,63 @@
                 <a:ea typeface="Arial"/>
                 <a:cs typeface="Arial"/>
               </a:rPr>
+              <a:t>10 calls</a:t>
+            </a:r>
+          </a:p>
+        </p:txBody>
+      </p:sp>
+      <p:sp>
+        <p:nvSpPr>
+          <p:cNvPr id="7" name="10 puts at strike 400">
+            <a:extLst xmlns:a="http://schemas.openxmlformats.org/drawingml/2006/main">
+              <a:ext uri="{FF2B5EF4-FFF2-40B4-BE49-F238E27FC236}">
+                <a16:creationId xmlns:a16="http://schemas.microsoft.com/office/drawing/2014/main" id="{D3CD9554-CA7D-49DB-B64E-8FA6A1392B98}"/>
+              </a:ext>
+            </a:extLst>
+          </p:cNvPr>
+          <p:cNvSpPr>
+            <a:spLocks xmlns:a="http://schemas.openxmlformats.org/drawingml/2006/main" noGrp="1"/>
+          </p:cNvSpPr>
+          <p:nvPr/>
+        </p:nvSpPr>
+        <p:spPr>
+          <a:xfrm xmlns:a="http://schemas.openxmlformats.org/drawingml/2006/main">
+            <a:off x="4857750" y="1495425"/>
+            <a:ext cx="4333875" cy="495300"/>
+          </a:xfrm>
+          <a:prstGeom xmlns:a="http://schemas.openxmlformats.org/drawingml/2006/main" prst="rect">
+            <a:avLst/>
+          </a:prstGeom>
+          <a:noFill xmlns:a="http://schemas.openxmlformats.org/drawingml/2006/main"/>
+          <a:ln xmlns:a="http://schemas.openxmlformats.org/drawingml/2006/main" w="0">
+            <a:noFill/>
+          </a:ln>
+        </p:spPr>
+        <p:txBody>
+          <a:bodyPr xmlns:a="http://schemas.openxmlformats.org/drawingml/2006/main" wrap="none" lIns="0" tIns="0" rIns="0" bIns="0" anchor="ctr">
+            <a:noAutofit/>
+          </a:bodyPr>
+          <a:lstStyle xmlns:a="http://schemas.openxmlformats.org/drawingml/2006/main"/>
+          <a:p xmlns:a="http://schemas.openxmlformats.org/drawingml/2006/main">
+            <a:pPr algn="l">
+              <a:defRPr sz="2325" b="1">
+                <a:solidFill>
+                  <a:srgbClr val="FAFAFA"/>
+                </a:solidFill>
+                <a:latin typeface="Arial"/>
+                <a:ea typeface="Arial"/>
+                <a:cs typeface="Arial"/>
+              </a:defRPr>
+            </a:pPr>
+            <a:r>
+              <a:rPr sz="2325" b="1">
+                <a:solidFill>
+                  <a:srgbClr val="FAFAFA"/>
+                </a:solidFill>
+                <a:latin typeface="Arial"/>
+                <a:ea typeface="Arial"/>
+                <a:cs typeface="Arial"/>
+              </a:rPr>
               <a:t>10 puts at strike 400</a:t>
             </a:r>
           </a:p>
@@ -17964,7 +18406,7 @@
       </p:sp>
       <p:graphicFrame>
         <p:nvGraphicFramePr>
-          <p:cNvPr id="24" name="Chart"/>
+          <p:cNvPr id="26" name="Chart"/>
           <p:cNvGraphicFramePr/>
           <p:nvPr/>
         </p:nvGraphicFramePr>
@@ -17974,13 +18416,13 @@
         </p:xfrm>
         <a:graphic xmlns:a="http://schemas.openxmlformats.org/drawingml/2006/main">
           <a:graphicData uri="http://schemas.openxmlformats.org/drawingml/2006/chart">
-            <c:chart xmlns:r="http://schemas.openxmlformats.org/officeDocument/2006/relationships" xmlns:c="http://schemas.openxmlformats.org/drawingml/2006/chart" r:id="Rb6b90ade1a10408f"/>
+            <c:chart xmlns:r="http://schemas.openxmlformats.org/officeDocument/2006/relationships" xmlns:c="http://schemas.openxmlformats.org/drawingml/2006/chart" r:id="Rb9c16dc1465143da"/>
           </a:graphicData>
         </a:graphic>
       </p:graphicFrame>
       <p:graphicFrame>
         <p:nvGraphicFramePr>
-          <p:cNvPr id="25" name="Chart"/>
+          <p:cNvPr id="27" name="Chart"/>
           <p:cNvGraphicFramePr/>
           <p:nvPr/>
         </p:nvGraphicFramePr>
@@ -17990,16 +18432,16 @@
         </p:xfrm>
         <a:graphic xmlns:a="http://schemas.openxmlformats.org/drawingml/2006/main">
           <a:graphicData uri="http://schemas.openxmlformats.org/drawingml/2006/chart">
-            <c:chart xmlns:r="http://schemas.openxmlformats.org/officeDocument/2006/relationships" xmlns:c="http://schemas.openxmlformats.org/drawingml/2006/chart" r:id="Rfc36ee6014e041b8"/>
+            <c:chart xmlns:r="http://schemas.openxmlformats.org/officeDocument/2006/relationships" xmlns:c="http://schemas.openxmlformats.org/drawingml/2006/chart" r:id="R2bf910b8fc73423a"/>
           </a:graphicData>
         </a:graphic>
       </p:graphicFrame>
       <p:sp>
         <p:nvSpPr>
-          <p:cNvPr id="9" name="30 TSLA">
-            <a:extLst xmlns:a="http://schemas.openxmlformats.org/drawingml/2006/main">
-              <a:ext uri="{FF2B5EF4-FFF2-40B4-BE49-F238E27FC236}">
-                <a16:creationId xmlns:a16="http://schemas.microsoft.com/office/drawing/2014/main" id="{C602DB0E-7FAC-4D29-B2A1-A6DB713CDFE3}"/>
+          <p:cNvPr id="10" name="30 AAPL">
+            <a:extLst xmlns:a="http://schemas.openxmlformats.org/drawingml/2006/main">
+              <a:ext uri="{FF2B5EF4-FFF2-40B4-BE49-F238E27FC236}">
+                <a16:creationId xmlns:a16="http://schemas.microsoft.com/office/drawing/2014/main" id="{1C04E622-FF34-4D6C-908E-BE47BB6C7931}"/>
               </a:ext>
             </a:extLst>
           </p:cNvPr>
@@ -18046,17 +18488,17 @@
                 <a:ea typeface="Arial"/>
                 <a:cs typeface="Arial"/>
               </a:rPr>
-              <a:t>30 TSLA</a:t>
-            </a:r>
-          </a:p>
-        </p:txBody>
-      </p:sp>
-      <p:sp>
-        <p:nvSpPr>
-          <p:cNvPr id="10" name="20,000 USDG">
-            <a:extLst xmlns:a="http://schemas.openxmlformats.org/drawingml/2006/main">
-              <a:ext uri="{FF2B5EF4-FFF2-40B4-BE49-F238E27FC236}">
-                <a16:creationId xmlns:a16="http://schemas.microsoft.com/office/drawing/2014/main" id="{0F3742D2-FD1A-48A6-9F65-C27D406A9A67}"/>
+              <a:t>30 AAPL</a:t>
+            </a:r>
+          </a:p>
+        </p:txBody>
+      </p:sp>
+      <p:sp>
+        <p:nvSpPr>
+          <p:cNvPr id="11" name="20,000 USDG">
+            <a:extLst xmlns:a="http://schemas.openxmlformats.org/drawingml/2006/main">
+              <a:ext uri="{FF2B5EF4-FFF2-40B4-BE49-F238E27FC236}">
+                <a16:creationId xmlns:a16="http://schemas.microsoft.com/office/drawing/2014/main" id="{778461C7-8611-46F2-AFD9-F1393707B593}"/>
               </a:ext>
             </a:extLst>
           </p:cNvPr>
@@ -18110,10 +18552,10 @@
       </p:sp>
       <p:sp>
         <p:nvSpPr>
-          <p:cNvPr id="11" name="0">
-            <a:extLst xmlns:a="http://schemas.openxmlformats.org/drawingml/2006/main">
-              <a:ext uri="{FF2B5EF4-FFF2-40B4-BE49-F238E27FC236}">
-                <a16:creationId xmlns:a16="http://schemas.microsoft.com/office/drawing/2014/main" id="{EB7FC111-5D56-400F-9A55-506799CF8E5E}"/>
+          <p:cNvPr id="12" name="0">
+            <a:extLst xmlns:a="http://schemas.openxmlformats.org/drawingml/2006/main">
+              <a:ext uri="{FF2B5EF4-FFF2-40B4-BE49-F238E27FC236}">
+                <a16:creationId xmlns:a16="http://schemas.microsoft.com/office/drawing/2014/main" id="{C478E66C-823A-4FE5-9B34-B64CE042D9DE}"/>
               </a:ext>
             </a:extLst>
           </p:cNvPr>
@@ -18167,10 +18609,10 @@
       </p:sp>
       <p:sp>
         <p:nvSpPr>
-          <p:cNvPr id="12" name="Book tokens">
-            <a:extLst xmlns:a="http://schemas.openxmlformats.org/drawingml/2006/main">
-              <a:ext uri="{FF2B5EF4-FFF2-40B4-BE49-F238E27FC236}">
-                <a16:creationId xmlns:a16="http://schemas.microsoft.com/office/drawing/2014/main" id="{DD8126B8-B5DC-47FC-89F7-D1069138FCE8}"/>
+          <p:cNvPr id="13" name="Book tokens">
+            <a:extLst xmlns:a="http://schemas.openxmlformats.org/drawingml/2006/main">
+              <a:ext uri="{FF2B5EF4-FFF2-40B4-BE49-F238E27FC236}">
+                <a16:creationId xmlns:a16="http://schemas.microsoft.com/office/drawing/2014/main" id="{BA83B15A-D180-47C1-8050-3679538DDABE}"/>
               </a:ext>
             </a:extLst>
           </p:cNvPr>
@@ -18224,10 +18666,10 @@
       </p:sp>
       <p:sp>
         <p:nvSpPr>
-          <p:cNvPr id="13" name="━">
-            <a:extLst xmlns:a="http://schemas.openxmlformats.org/drawingml/2006/main">
-              <a:ext uri="{FF2B5EF4-FFF2-40B4-BE49-F238E27FC236}">
-                <a16:creationId xmlns:a16="http://schemas.microsoft.com/office/drawing/2014/main" id="{A8A27571-63A4-46D8-8238-E5AF8FB3A0EA}"/>
+          <p:cNvPr id="14" name="━">
+            <a:extLst xmlns:a="http://schemas.openxmlformats.org/drawingml/2006/main">
+              <a:ext uri="{FF2B5EF4-FFF2-40B4-BE49-F238E27FC236}">
+                <a16:creationId xmlns:a16="http://schemas.microsoft.com/office/drawing/2014/main" id="{B6911AF9-3CAA-4BDB-A894-A1946231CBC9}"/>
               </a:ext>
             </a:extLst>
           </p:cNvPr>
@@ -18281,10 +18723,10 @@
       </p:sp>
       <p:sp>
         <p:nvSpPr>
-          <p:cNvPr id="14" name="Promised">
-            <a:extLst xmlns:a="http://schemas.openxmlformats.org/drawingml/2006/main">
-              <a:ext uri="{FF2B5EF4-FFF2-40B4-BE49-F238E27FC236}">
-                <a16:creationId xmlns:a16="http://schemas.microsoft.com/office/drawing/2014/main" id="{7D3CFCC8-CFE9-431E-9C06-8F2DDA87B57A}"/>
+          <p:cNvPr id="15" name="Promised">
+            <a:extLst xmlns:a="http://schemas.openxmlformats.org/drawingml/2006/main">
+              <a:ext uri="{FF2B5EF4-FFF2-40B4-BE49-F238E27FC236}">
+                <a16:creationId xmlns:a16="http://schemas.microsoft.com/office/drawing/2014/main" id="{143B6D9A-441A-4DEA-B829-821078013A85}"/>
               </a:ext>
             </a:extLst>
           </p:cNvPr>
@@ -18338,10 +18780,10 @@
       </p:sp>
       <p:sp>
         <p:nvSpPr>
-          <p:cNvPr id="15" name="━">
-            <a:extLst xmlns:a="http://schemas.openxmlformats.org/drawingml/2006/main">
-              <a:ext uri="{FF2B5EF4-FFF2-40B4-BE49-F238E27FC236}">
-                <a16:creationId xmlns:a16="http://schemas.microsoft.com/office/drawing/2014/main" id="{0C75DA2D-2104-4A86-BC83-BA2B5A5FAAFE}"/>
+          <p:cNvPr id="16" name="━">
+            <a:extLst xmlns:a="http://schemas.openxmlformats.org/drawingml/2006/main">
+              <a:ext uri="{FF2B5EF4-FFF2-40B4-BE49-F238E27FC236}">
+                <a16:creationId xmlns:a16="http://schemas.microsoft.com/office/drawing/2014/main" id="{81A4FF3B-6C8D-4462-92C9-A1E916F059E5}"/>
               </a:ext>
             </a:extLst>
           </p:cNvPr>
@@ -18395,10 +18837,10 @@
       </p:sp>
       <p:sp>
         <p:nvSpPr>
-          <p:cNvPr id="16" name="Unpromised">
-            <a:extLst xmlns:a="http://schemas.openxmlformats.org/drawingml/2006/main">
-              <a:ext uri="{FF2B5EF4-FFF2-40B4-BE49-F238E27FC236}">
-                <a16:creationId xmlns:a16="http://schemas.microsoft.com/office/drawing/2014/main" id="{07DE2299-E66C-4DAA-86AA-0AF995A601B9}"/>
+          <p:cNvPr id="17" name="Unpromised">
+            <a:extLst xmlns:a="http://schemas.openxmlformats.org/drawingml/2006/main">
+              <a:ext uri="{FF2B5EF4-FFF2-40B4-BE49-F238E27FC236}">
+                <a16:creationId xmlns:a16="http://schemas.microsoft.com/office/drawing/2014/main" id="{6B3138F6-347F-4814-B1E6-C85C3D3E628C}"/>
               </a:ext>
             </a:extLst>
           </p:cNvPr>
@@ -18452,10 +18894,10 @@
       </p:sp>
       <p:sp>
         <p:nvSpPr>
-          <p:cNvPr id="17" name="Ship + post: no transfer. Virtual balances are not extra ass">
-            <a:extLst xmlns:a="http://schemas.openxmlformats.org/drawingml/2006/main">
-              <a:ext uri="{FF2B5EF4-FFF2-40B4-BE49-F238E27FC236}">
-                <a16:creationId xmlns:a16="http://schemas.microsoft.com/office/drawing/2014/main" id="{1225A745-B452-449B-9939-63B64644A340}"/>
+          <p:cNvPr id="18" name="Ship + post: no transfer. Virtual balances are not extra ass">
+            <a:extLst xmlns:a="http://schemas.openxmlformats.org/drawingml/2006/main">
+              <a:ext uri="{FF2B5EF4-FFF2-40B4-BE49-F238E27FC236}">
+                <a16:creationId xmlns:a16="http://schemas.microsoft.com/office/drawing/2014/main" id="{E56687BE-CDE7-4683-B123-CFA0E4D9C852}"/>
               </a:ext>
             </a:extLst>
           </p:cNvPr>
@@ -18510,7 +18952,7 @@
     </p:spTree>
     <p:extLst>
       <p:ext uri="{BB962C8B-B14F-4D97-AF65-F5344CB8AC3E}">
-        <p14:creationId xmlns:p14="http://schemas.microsoft.com/office/powerpoint/2010/main" val="145888672"/>
+        <p14:creationId xmlns:p14="http://schemas.microsoft.com/office/powerpoint/2010/main" val="589590889"/>
       </p:ext>
     </p:extLst>
   </p:cSld>
@@ -18538,10 +18980,10 @@
       </p:grpSpPr>
       <p:sp>
         <p:nvSpPr>
-          <p:cNvPr id="12" name="The spot guard protects unfilled promises">
-            <a:extLst xmlns:a="http://schemas.openxmlformats.org/drawingml/2006/main">
-              <a:ext uri="{FF2B5EF4-FFF2-40B4-BE49-F238E27FC236}">
-                <a16:creationId xmlns:a16="http://schemas.microsoft.com/office/drawing/2014/main" id="{B44CD33D-D225-4DE6-83BB-01056FEC528D}"/>
+          <p:cNvPr id="13" name="The spot guard protects unfilled promises">
+            <a:extLst xmlns:a="http://schemas.openxmlformats.org/drawingml/2006/main">
+              <a:ext uri="{FF2B5EF4-FFF2-40B4-BE49-F238E27FC236}">
+                <a16:creationId xmlns:a16="http://schemas.microsoft.com/office/drawing/2014/main" id="{C6D697B8-E0FA-422D-870E-E15B091677EF}"/>
               </a:ext>
             </a:extLst>
           </p:cNvPr>
@@ -18595,14 +19037,14 @@
       </p:sp>
       <p:pic>
         <p:nvPicPr>
-          <p:cNvPr id="13" name=""/>
+          <p:cNvPr id="14" name=""/>
           <p:cNvPicPr>
             <a:picLocks xmlns:a="http://schemas.openxmlformats.org/drawingml/2006/main" noChangeAspect="1"/>
           </p:cNvPicPr>
           <p:nvPr/>
         </p:nvPicPr>
         <p:blipFill>
-          <a:blip xmlns:r="http://schemas.openxmlformats.org/officeDocument/2006/relationships" xmlns:a="http://schemas.openxmlformats.org/drawingml/2006/main" r:embed="Rcb25fb25620b497a"/>
+          <a:blip xmlns:r="http://schemas.openxmlformats.org/officeDocument/2006/relationships" xmlns:a="http://schemas.openxmlformats.org/drawingml/2006/main" r:embed="R8694905216c740dd"/>
           <a:stretch xmlns:a="http://schemas.openxmlformats.org/drawingml/2006/main"/>
         </p:blipFill>
         <p:spPr>
@@ -18620,7 +19062,7 @@
           <p:cNvPr id="3" name="Vexi Hakari">
             <a:extLst xmlns:a="http://schemas.openxmlformats.org/drawingml/2006/main">
               <a:ext uri="{FF2B5EF4-FFF2-40B4-BE49-F238E27FC236}">
-                <a16:creationId xmlns:a16="http://schemas.microsoft.com/office/drawing/2014/main" id="{8BE56CBC-8875-4E0C-840D-69E3B9472130}"/>
+                <a16:creationId xmlns:a16="http://schemas.microsoft.com/office/drawing/2014/main" id="{973EFE56-263F-42F1-8965-0BC472173B67}"/>
               </a:ext>
             </a:extLst>
           </p:cNvPr>
@@ -18674,22 +19116,22 @@
       </p:sp>
       <p:sp>
         <p:nvSpPr>
-          <p:cNvPr id="4" name="6">
-            <a:extLst xmlns:a="http://schemas.openxmlformats.org/drawingml/2006/main">
-              <a:ext uri="{FF2B5EF4-FFF2-40B4-BE49-F238E27FC236}">
-                <a16:creationId xmlns:a16="http://schemas.microsoft.com/office/drawing/2014/main" id="{994E031E-A34A-448E-BDDD-D0F72C9655E6}"/>
-              </a:ext>
-            </a:extLst>
-          </p:cNvPr>
-          <p:cNvSpPr>
-            <a:spLocks xmlns:a="http://schemas.openxmlformats.org/drawingml/2006/main" noGrp="1"/>
-          </p:cNvSpPr>
-          <p:nvPr/>
-        </p:nvSpPr>
-        <p:spPr>
-          <a:xfrm xmlns:a="http://schemas.openxmlformats.org/drawingml/2006/main">
-            <a:off x="11001375" y="6153150"/>
-            <a:ext cx="619125" cy="342900"/>
+          <p:cNvPr id="4" name="AAPL example / illustrative amounts">
+            <a:extLst xmlns:a="http://schemas.openxmlformats.org/drawingml/2006/main">
+              <a:ext uri="{FF2B5EF4-FFF2-40B4-BE49-F238E27FC236}">
+                <a16:creationId xmlns:a16="http://schemas.microsoft.com/office/drawing/2014/main" id="{D79A2A3E-029E-4980-BC07-478B2770C83A}"/>
+              </a:ext>
+            </a:extLst>
+          </p:cNvPr>
+          <p:cNvSpPr>
+            <a:spLocks xmlns:a="http://schemas.openxmlformats.org/drawingml/2006/main" noGrp="1"/>
+          </p:cNvSpPr>
+          <p:nvPr/>
+        </p:nvSpPr>
+        <p:spPr>
+          <a:xfrm xmlns:a="http://schemas.openxmlformats.org/drawingml/2006/main">
+            <a:off x="3905250" y="6153150"/>
+            <a:ext cx="6667500" cy="342900"/>
           </a:xfrm>
           <a:prstGeom xmlns:a="http://schemas.openxmlformats.org/drawingml/2006/main" prst="rect">
             <a:avLst/>
@@ -18705,7 +19147,7 @@
           </a:bodyPr>
           <a:lstStyle xmlns:a="http://schemas.openxmlformats.org/drawingml/2006/main"/>
           <a:p xmlns:a="http://schemas.openxmlformats.org/drawingml/2006/main">
-            <a:pPr algn="r">
+            <a:pPr algn="l">
               <a:defRPr sz="1275" b="0">
                 <a:solidFill>
                   <a:srgbClr val="A8A8B2"/>
@@ -18724,29 +19166,29 @@
                 <a:ea typeface="Arial"/>
                 <a:cs typeface="Arial"/>
               </a:rPr>
-              <a:t>6</a:t>
-            </a:r>
-          </a:p>
-        </p:txBody>
-      </p:sp>
-      <p:sp>
-        <p:nvSpPr>
-          <p:cNvPr id="5" name="free = wallet − promised">
-            <a:extLst xmlns:a="http://schemas.openxmlformats.org/drawingml/2006/main">
-              <a:ext uri="{FF2B5EF4-FFF2-40B4-BE49-F238E27FC236}">
-                <a16:creationId xmlns:a16="http://schemas.microsoft.com/office/drawing/2014/main" id="{78F1730F-F547-44A5-9054-FACE07D0F8FC}"/>
-              </a:ext>
-            </a:extLst>
-          </p:cNvPr>
-          <p:cNvSpPr>
-            <a:spLocks xmlns:a="http://schemas.openxmlformats.org/drawingml/2006/main" noGrp="1"/>
-          </p:cNvSpPr>
-          <p:nvPr/>
-        </p:nvSpPr>
-        <p:spPr>
-          <a:xfrm xmlns:a="http://schemas.openxmlformats.org/drawingml/2006/main">
-            <a:off x="666750" y="1419225"/>
-            <a:ext cx="10858500" cy="571500"/>
+              <a:t>AAPL example / illustrative amounts</a:t>
+            </a:r>
+          </a:p>
+        </p:txBody>
+      </p:sp>
+      <p:sp>
+        <p:nvSpPr>
+          <p:cNvPr id="5" name="6">
+            <a:extLst xmlns:a="http://schemas.openxmlformats.org/drawingml/2006/main">
+              <a:ext uri="{FF2B5EF4-FFF2-40B4-BE49-F238E27FC236}">
+                <a16:creationId xmlns:a16="http://schemas.microsoft.com/office/drawing/2014/main" id="{73B2EA65-CEBC-40D4-AC62-3A3A4C404CE8}"/>
+              </a:ext>
+            </a:extLst>
+          </p:cNvPr>
+          <p:cNvSpPr>
+            <a:spLocks xmlns:a="http://schemas.openxmlformats.org/drawingml/2006/main" noGrp="1"/>
+          </p:cNvSpPr>
+          <p:nvPr/>
+        </p:nvSpPr>
+        <p:spPr>
+          <a:xfrm xmlns:a="http://schemas.openxmlformats.org/drawingml/2006/main">
+            <a:off x="11001375" y="6153150"/>
+            <a:ext cx="619125" cy="342900"/>
           </a:xfrm>
           <a:prstGeom xmlns:a="http://schemas.openxmlformats.org/drawingml/2006/main" prst="rect">
             <a:avLst/>
@@ -18762,6 +19204,63 @@
           </a:bodyPr>
           <a:lstStyle xmlns:a="http://schemas.openxmlformats.org/drawingml/2006/main"/>
           <a:p xmlns:a="http://schemas.openxmlformats.org/drawingml/2006/main">
+            <a:pPr algn="r">
+              <a:defRPr sz="1275" b="0">
+                <a:solidFill>
+                  <a:srgbClr val="A8A8B2"/>
+                </a:solidFill>
+                <a:latin typeface="Arial"/>
+                <a:ea typeface="Arial"/>
+                <a:cs typeface="Arial"/>
+              </a:defRPr>
+            </a:pPr>
+            <a:r>
+              <a:rPr sz="1275" b="0">
+                <a:solidFill>
+                  <a:srgbClr val="A8A8B2"/>
+                </a:solidFill>
+                <a:latin typeface="Arial"/>
+                <a:ea typeface="Arial"/>
+                <a:cs typeface="Arial"/>
+              </a:rPr>
+              <a:t>6</a:t>
+            </a:r>
+          </a:p>
+        </p:txBody>
+      </p:sp>
+      <p:sp>
+        <p:nvSpPr>
+          <p:cNvPr id="6" name="free = wallet − promised">
+            <a:extLst xmlns:a="http://schemas.openxmlformats.org/drawingml/2006/main">
+              <a:ext uri="{FF2B5EF4-FFF2-40B4-BE49-F238E27FC236}">
+                <a16:creationId xmlns:a16="http://schemas.microsoft.com/office/drawing/2014/main" id="{6009E1FA-0B79-4A96-8BCF-D2076AEE4E3B}"/>
+              </a:ext>
+            </a:extLst>
+          </p:cNvPr>
+          <p:cNvSpPr>
+            <a:spLocks xmlns:a="http://schemas.openxmlformats.org/drawingml/2006/main" noGrp="1"/>
+          </p:cNvSpPr>
+          <p:nvPr/>
+        </p:nvSpPr>
+        <p:spPr>
+          <a:xfrm xmlns:a="http://schemas.openxmlformats.org/drawingml/2006/main">
+            <a:off x="666750" y="1419225"/>
+            <a:ext cx="10858500" cy="571500"/>
+          </a:xfrm>
+          <a:prstGeom xmlns:a="http://schemas.openxmlformats.org/drawingml/2006/main" prst="rect">
+            <a:avLst/>
+          </a:prstGeom>
+          <a:noFill xmlns:a="http://schemas.openxmlformats.org/drawingml/2006/main"/>
+          <a:ln xmlns:a="http://schemas.openxmlformats.org/drawingml/2006/main" w="0">
+            <a:noFill/>
+          </a:ln>
+        </p:spPr>
+        <p:txBody>
+          <a:bodyPr xmlns:a="http://schemas.openxmlformats.org/drawingml/2006/main" wrap="none" lIns="0" tIns="0" rIns="0" bIns="0" anchor="ctr">
+            <a:noAutofit/>
+          </a:bodyPr>
+          <a:lstStyle xmlns:a="http://schemas.openxmlformats.org/drawingml/2006/main"/>
+          <a:p xmlns:a="http://schemas.openxmlformats.org/drawingml/2006/main">
             <a:pPr algn="l">
               <a:defRPr sz="2700" b="1">
                 <a:solidFill>
@@ -18788,7 +19287,7 @@
       </p:sp>
       <p:graphicFrame>
         <p:nvGraphicFramePr>
-          <p:cNvPr id="17" name="Chart"/>
+          <p:cNvPr id="19" name="Chart"/>
           <p:cNvGraphicFramePr/>
           <p:nvPr/>
         </p:nvGraphicFramePr>
@@ -18798,16 +19297,16 @@
         </p:xfrm>
         <a:graphic xmlns:a="http://schemas.openxmlformats.org/drawingml/2006/main">
           <a:graphicData uri="http://schemas.openxmlformats.org/drawingml/2006/chart">
-            <c:chart xmlns:r="http://schemas.openxmlformats.org/officeDocument/2006/relationships" xmlns:c="http://schemas.openxmlformats.org/drawingml/2006/chart" r:id="R65e71bcc6b2f4ccb"/>
+            <c:chart xmlns:r="http://schemas.openxmlformats.org/officeDocument/2006/relationships" xmlns:c="http://schemas.openxmlformats.org/drawingml/2006/chart" r:id="Re466c2b5d75943c1"/>
           </a:graphicData>
         </a:graphic>
       </p:graphicFrame>
       <p:sp>
         <p:nvSpPr>
-          <p:cNvPr id="7" name="29.05 &gt; 10">
-            <a:extLst xmlns:a="http://schemas.openxmlformats.org/drawingml/2006/main">
-              <a:ext uri="{FF2B5EF4-FFF2-40B4-BE49-F238E27FC236}">
-                <a16:creationId xmlns:a16="http://schemas.microsoft.com/office/drawing/2014/main" id="{96F8A3A2-C269-484D-BCBC-C09682D7F62D}"/>
+          <p:cNvPr id="8" name="29.05 &gt; 10">
+            <a:extLst xmlns:a="http://schemas.openxmlformats.org/drawingml/2006/main">
+              <a:ext uri="{FF2B5EF4-FFF2-40B4-BE49-F238E27FC236}">
+                <a16:creationId xmlns:a16="http://schemas.microsoft.com/office/drawing/2014/main" id="{5F0F072B-21B3-4867-826B-0DD5634307DC}"/>
               </a:ext>
             </a:extLst>
           </p:cNvPr>
@@ -18861,10 +19360,10 @@
       </p:sp>
       <p:sp>
         <p:nvSpPr>
-          <p:cNvPr id="8" name="Promise preserved">
-            <a:extLst xmlns:a="http://schemas.openxmlformats.org/drawingml/2006/main">
-              <a:ext uri="{FF2B5EF4-FFF2-40B4-BE49-F238E27FC236}">
-                <a16:creationId xmlns:a16="http://schemas.microsoft.com/office/drawing/2014/main" id="{9D7EA5A1-E0FF-4811-82F3-B8D192211C1F}"/>
+          <p:cNvPr id="9" name="Promise preserved">
+            <a:extLst xmlns:a="http://schemas.openxmlformats.org/drawingml/2006/main">
+              <a:ext uri="{FF2B5EF4-FFF2-40B4-BE49-F238E27FC236}">
+                <a16:creationId xmlns:a16="http://schemas.microsoft.com/office/drawing/2014/main" id="{DF2A0177-9D9B-4AE7-A687-657DAE51D3DE}"/>
               </a:ext>
             </a:extLst>
           </p:cNvPr>
@@ -18918,10 +19417,10 @@
       </p:sp>
       <p:sp>
         <p:nvSpPr>
-          <p:cNvPr id="9" name="9 &lt; 10">
-            <a:extLst xmlns:a="http://schemas.openxmlformats.org/drawingml/2006/main">
-              <a:ext uri="{FF2B5EF4-FFF2-40B4-BE49-F238E27FC236}">
-                <a16:creationId xmlns:a16="http://schemas.microsoft.com/office/drawing/2014/main" id="{AC902046-FE01-4848-8C0C-96F9C4FA2EAD}"/>
+          <p:cNvPr id="10" name="9 &lt; 10">
+            <a:extLst xmlns:a="http://schemas.openxmlformats.org/drawingml/2006/main">
+              <a:ext uri="{FF2B5EF4-FFF2-40B4-BE49-F238E27FC236}">
+                <a16:creationId xmlns:a16="http://schemas.microsoft.com/office/drawing/2014/main" id="{309347EA-2E6E-4D4D-A0B4-4A16DF6E4AA5}"/>
               </a:ext>
             </a:extLst>
           </p:cNvPr>
@@ -18975,10 +19474,10 @@
       </p:sp>
       <p:sp>
         <p:nvSpPr>
-          <p:cNvPr id="10" name="Later fill refuses">
-            <a:extLst xmlns:a="http://schemas.openxmlformats.org/drawingml/2006/main">
-              <a:ext uri="{FF2B5EF4-FFF2-40B4-BE49-F238E27FC236}">
-                <a16:creationId xmlns:a16="http://schemas.microsoft.com/office/drawing/2014/main" id="{EABCFE64-10F2-49B9-8109-3562EAC9ACBF}"/>
+          <p:cNvPr id="11" name="Later fill refuses">
+            <a:extLst xmlns:a="http://schemas.openxmlformats.org/drawingml/2006/main">
+              <a:ext uri="{FF2B5EF4-FFF2-40B4-BE49-F238E27FC236}">
+                <a16:creationId xmlns:a16="http://schemas.microsoft.com/office/drawing/2014/main" id="{CC04DF72-1837-4C4F-8FB5-79AAC5013F1C}"/>
               </a:ext>
             </a:extLst>
           </p:cNvPr>
@@ -19032,10 +19531,10 @@
       </p:sp>
       <p:sp>
         <p:nvSpPr>
-          <p:cNvPr id="11" name="Independent fixtures: 400 USDG guarded swap / 21 TSLA sold u">
-            <a:extLst xmlns:a="http://schemas.openxmlformats.org/drawingml/2006/main">
-              <a:ext uri="{FF2B5EF4-FFF2-40B4-BE49-F238E27FC236}">
-                <a16:creationId xmlns:a16="http://schemas.microsoft.com/office/drawing/2014/main" id="{8AC112B0-567D-43A6-BD59-723C7E50B258}"/>
+          <p:cNvPr id="12" name="Independent fixtures: 400 USDG guarded swap / 21 AAPL sold u">
+            <a:extLst xmlns:a="http://schemas.openxmlformats.org/drawingml/2006/main">
+              <a:ext uri="{FF2B5EF4-FFF2-40B4-BE49-F238E27FC236}">
+                <a16:creationId xmlns:a16="http://schemas.microsoft.com/office/drawing/2014/main" id="{EDDB6A64-9C94-4EC5-BBB4-69A5AC31BAA8}"/>
               </a:ext>
             </a:extLst>
           </p:cNvPr>
@@ -19082,7 +19581,7 @@
                 <a:ea typeface="Arial"/>
                 <a:cs typeface="Arial"/>
               </a:rPr>
-              <a:t>Independent fixtures: 400 USDG guarded swap / 21 TSLA sold unguarded</a:t>
+              <a:t>Independent fixtures: 400 USDG guarded swap / 21 AAPL sold unguarded</a:t>
             </a:r>
           </a:p>
         </p:txBody>
@@ -19090,7 +19589,7 @@
     </p:spTree>
     <p:extLst>
       <p:ext uri="{BB962C8B-B14F-4D97-AF65-F5344CB8AC3E}">
-        <p14:creationId xmlns:p14="http://schemas.microsoft.com/office/powerpoint/2010/main" val="1645151707"/>
+        <p14:creationId xmlns:p14="http://schemas.microsoft.com/office/powerpoint/2010/main" val="154220662"/>
       </p:ext>
     </p:extLst>
   </p:cSld>
@@ -19118,10 +19617,10 @@
       </p:grpSpPr>
       <p:sp>
         <p:nvSpPr>
-          <p:cNvPr id="22" name="A fill moves exact collateral">
-            <a:extLst xmlns:a="http://schemas.openxmlformats.org/drawingml/2006/main">
-              <a:ext uri="{FF2B5EF4-FFF2-40B4-BE49-F238E27FC236}">
-                <a16:creationId xmlns:a16="http://schemas.microsoft.com/office/drawing/2014/main" id="{FA640320-D176-4FBB-A8F4-DF95A4ABD4FE}"/>
+          <p:cNvPr id="23" name="A fill moves exact collateral">
+            <a:extLst xmlns:a="http://schemas.openxmlformats.org/drawingml/2006/main">
+              <a:ext uri="{FF2B5EF4-FFF2-40B4-BE49-F238E27FC236}">
+                <a16:creationId xmlns:a16="http://schemas.microsoft.com/office/drawing/2014/main" id="{A419D1B3-B76E-456B-BDEF-2D3C8E16E612}"/>
               </a:ext>
             </a:extLst>
           </p:cNvPr>
@@ -19175,14 +19674,14 @@
       </p:sp>
       <p:pic>
         <p:nvPicPr>
-          <p:cNvPr id="23" name=""/>
+          <p:cNvPr id="24" name=""/>
           <p:cNvPicPr>
             <a:picLocks xmlns:a="http://schemas.openxmlformats.org/drawingml/2006/main" noChangeAspect="1"/>
           </p:cNvPicPr>
           <p:nvPr/>
         </p:nvPicPr>
         <p:blipFill>
-          <a:blip xmlns:r="http://schemas.openxmlformats.org/officeDocument/2006/relationships" xmlns:a="http://schemas.openxmlformats.org/drawingml/2006/main" r:embed="R94f0391efff3472c"/>
+          <a:blip xmlns:r="http://schemas.openxmlformats.org/officeDocument/2006/relationships" xmlns:a="http://schemas.openxmlformats.org/drawingml/2006/main" r:embed="R9fa90d22c40244a1"/>
           <a:stretch xmlns:a="http://schemas.openxmlformats.org/drawingml/2006/main"/>
         </p:blipFill>
         <p:spPr>
@@ -19200,7 +19699,7 @@
           <p:cNvPr id="3" name="Vexi Hakari">
             <a:extLst xmlns:a="http://schemas.openxmlformats.org/drawingml/2006/main">
               <a:ext uri="{FF2B5EF4-FFF2-40B4-BE49-F238E27FC236}">
-                <a16:creationId xmlns:a16="http://schemas.microsoft.com/office/drawing/2014/main" id="{25D792C7-3629-40CE-A17F-58412022636D}"/>
+                <a16:creationId xmlns:a16="http://schemas.microsoft.com/office/drawing/2014/main" id="{AB462CDE-4F4E-4D2B-B7BE-3493DD277C2F}"/>
               </a:ext>
             </a:extLst>
           </p:cNvPr>
@@ -19254,22 +19753,22 @@
       </p:sp>
       <p:sp>
         <p:nvSpPr>
-          <p:cNvPr id="4" name="7">
-            <a:extLst xmlns:a="http://schemas.openxmlformats.org/drawingml/2006/main">
-              <a:ext uri="{FF2B5EF4-FFF2-40B4-BE49-F238E27FC236}">
-                <a16:creationId xmlns:a16="http://schemas.microsoft.com/office/drawing/2014/main" id="{A746BA0E-8856-41F1-A621-B8885543AAA5}"/>
-              </a:ext>
-            </a:extLst>
-          </p:cNvPr>
-          <p:cNvSpPr>
-            <a:spLocks xmlns:a="http://schemas.openxmlformats.org/drawingml/2006/main" noGrp="1"/>
-          </p:cNvSpPr>
-          <p:nvPr/>
-        </p:nvSpPr>
-        <p:spPr>
-          <a:xfrm xmlns:a="http://schemas.openxmlformats.org/drawingml/2006/main">
-            <a:off x="11001375" y="6153150"/>
-            <a:ext cx="619125" cy="342900"/>
+          <p:cNvPr id="4" name="AAPL example / illustrative amounts">
+            <a:extLst xmlns:a="http://schemas.openxmlformats.org/drawingml/2006/main">
+              <a:ext uri="{FF2B5EF4-FFF2-40B4-BE49-F238E27FC236}">
+                <a16:creationId xmlns:a16="http://schemas.microsoft.com/office/drawing/2014/main" id="{448C8749-F966-4D59-8F5C-917AEFCC7AB4}"/>
+              </a:ext>
+            </a:extLst>
+          </p:cNvPr>
+          <p:cNvSpPr>
+            <a:spLocks xmlns:a="http://schemas.openxmlformats.org/drawingml/2006/main" noGrp="1"/>
+          </p:cNvSpPr>
+          <p:nvPr/>
+        </p:nvSpPr>
+        <p:spPr>
+          <a:xfrm xmlns:a="http://schemas.openxmlformats.org/drawingml/2006/main">
+            <a:off x="3905250" y="6153150"/>
+            <a:ext cx="6667500" cy="342900"/>
           </a:xfrm>
           <a:prstGeom xmlns:a="http://schemas.openxmlformats.org/drawingml/2006/main" prst="rect">
             <a:avLst/>
@@ -19285,7 +19784,7 @@
           </a:bodyPr>
           <a:lstStyle xmlns:a="http://schemas.openxmlformats.org/drawingml/2006/main"/>
           <a:p xmlns:a="http://schemas.openxmlformats.org/drawingml/2006/main">
-            <a:pPr algn="r">
+            <a:pPr algn="l">
               <a:defRPr sz="1275" b="0">
                 <a:solidFill>
                   <a:srgbClr val="A8A8B2"/>
@@ -19304,29 +19803,29 @@
                 <a:ea typeface="Arial"/>
                 <a:cs typeface="Arial"/>
               </a:rPr>
-              <a:t>7</a:t>
-            </a:r>
-          </a:p>
-        </p:txBody>
-      </p:sp>
-      <p:sp>
-        <p:nvSpPr>
-          <p:cNvPr id="5" name="5 calls + 3 puts">
-            <a:extLst xmlns:a="http://schemas.openxmlformats.org/drawingml/2006/main">
-              <a:ext uri="{FF2B5EF4-FFF2-40B4-BE49-F238E27FC236}">
-                <a16:creationId xmlns:a16="http://schemas.microsoft.com/office/drawing/2014/main" id="{CF8ECCFF-B768-41F1-8917-D60C75D184B6}"/>
-              </a:ext>
-            </a:extLst>
-          </p:cNvPr>
-          <p:cNvSpPr>
-            <a:spLocks xmlns:a="http://schemas.openxmlformats.org/drawingml/2006/main" noGrp="1"/>
-          </p:cNvSpPr>
-          <p:nvPr/>
-        </p:nvSpPr>
-        <p:spPr>
-          <a:xfrm xmlns:a="http://schemas.openxmlformats.org/drawingml/2006/main">
-            <a:off x="609600" y="1419225"/>
-            <a:ext cx="7715250" cy="523875"/>
+              <a:t>AAPL example / illustrative amounts</a:t>
+            </a:r>
+          </a:p>
+        </p:txBody>
+      </p:sp>
+      <p:sp>
+        <p:nvSpPr>
+          <p:cNvPr id="5" name="7">
+            <a:extLst xmlns:a="http://schemas.openxmlformats.org/drawingml/2006/main">
+              <a:ext uri="{FF2B5EF4-FFF2-40B4-BE49-F238E27FC236}">
+                <a16:creationId xmlns:a16="http://schemas.microsoft.com/office/drawing/2014/main" id="{C04E412D-49A6-4EAB-98E2-15409F4FDDCB}"/>
+              </a:ext>
+            </a:extLst>
+          </p:cNvPr>
+          <p:cNvSpPr>
+            <a:spLocks xmlns:a="http://schemas.openxmlformats.org/drawingml/2006/main" noGrp="1"/>
+          </p:cNvSpPr>
+          <p:nvPr/>
+        </p:nvSpPr>
+        <p:spPr>
+          <a:xfrm xmlns:a="http://schemas.openxmlformats.org/drawingml/2006/main">
+            <a:off x="11001375" y="6153150"/>
+            <a:ext cx="619125" cy="342900"/>
           </a:xfrm>
           <a:prstGeom xmlns:a="http://schemas.openxmlformats.org/drawingml/2006/main" prst="rect">
             <a:avLst/>
@@ -19342,6 +19841,63 @@
           </a:bodyPr>
           <a:lstStyle xmlns:a="http://schemas.openxmlformats.org/drawingml/2006/main"/>
           <a:p xmlns:a="http://schemas.openxmlformats.org/drawingml/2006/main">
+            <a:pPr algn="r">
+              <a:defRPr sz="1275" b="0">
+                <a:solidFill>
+                  <a:srgbClr val="A8A8B2"/>
+                </a:solidFill>
+                <a:latin typeface="Arial"/>
+                <a:ea typeface="Arial"/>
+                <a:cs typeface="Arial"/>
+              </a:defRPr>
+            </a:pPr>
+            <a:r>
+              <a:rPr sz="1275" b="0">
+                <a:solidFill>
+                  <a:srgbClr val="A8A8B2"/>
+                </a:solidFill>
+                <a:latin typeface="Arial"/>
+                <a:ea typeface="Arial"/>
+                <a:cs typeface="Arial"/>
+              </a:rPr>
+              <a:t>7</a:t>
+            </a:r>
+          </a:p>
+        </p:txBody>
+      </p:sp>
+      <p:sp>
+        <p:nvSpPr>
+          <p:cNvPr id="6" name="5 calls + 3 puts">
+            <a:extLst xmlns:a="http://schemas.openxmlformats.org/drawingml/2006/main">
+              <a:ext uri="{FF2B5EF4-FFF2-40B4-BE49-F238E27FC236}">
+                <a16:creationId xmlns:a16="http://schemas.microsoft.com/office/drawing/2014/main" id="{958671A3-38EB-49B6-9D6C-F21D09B5404A}"/>
+              </a:ext>
+            </a:extLst>
+          </p:cNvPr>
+          <p:cNvSpPr>
+            <a:spLocks xmlns:a="http://schemas.openxmlformats.org/drawingml/2006/main" noGrp="1"/>
+          </p:cNvSpPr>
+          <p:nvPr/>
+        </p:nvSpPr>
+        <p:spPr>
+          <a:xfrm xmlns:a="http://schemas.openxmlformats.org/drawingml/2006/main">
+            <a:off x="609600" y="1419225"/>
+            <a:ext cx="7715250" cy="523875"/>
+          </a:xfrm>
+          <a:prstGeom xmlns:a="http://schemas.openxmlformats.org/drawingml/2006/main" prst="rect">
+            <a:avLst/>
+          </a:prstGeom>
+          <a:noFill xmlns:a="http://schemas.openxmlformats.org/drawingml/2006/main"/>
+          <a:ln xmlns:a="http://schemas.openxmlformats.org/drawingml/2006/main" w="0">
+            <a:noFill/>
+          </a:ln>
+        </p:spPr>
+        <p:txBody>
+          <a:bodyPr xmlns:a="http://schemas.openxmlformats.org/drawingml/2006/main" wrap="none" lIns="0" tIns="0" rIns="0" bIns="0" anchor="ctr">
+            <a:noAutofit/>
+          </a:bodyPr>
+          <a:lstStyle xmlns:a="http://schemas.openxmlformats.org/drawingml/2006/main"/>
+          <a:p xmlns:a="http://schemas.openxmlformats.org/drawingml/2006/main">
             <a:pPr algn="l">
               <a:defRPr sz="2625" b="1">
                 <a:solidFill>
@@ -19368,10 +19924,10 @@
       </p:sp>
       <p:sp>
         <p:nvSpPr>
-          <p:cNvPr id="6" name="Maker">
-            <a:extLst xmlns:a="http://schemas.openxmlformats.org/drawingml/2006/main">
-              <a:ext uri="{FF2B5EF4-FFF2-40B4-BE49-F238E27FC236}">
-                <a16:creationId xmlns:a16="http://schemas.microsoft.com/office/drawing/2014/main" id="{CB3A7858-E957-4FF3-8519-EA845B358D13}"/>
+          <p:cNvPr id="7" name="Maker">
+            <a:extLst xmlns:a="http://schemas.openxmlformats.org/drawingml/2006/main">
+              <a:ext uri="{FF2B5EF4-FFF2-40B4-BE49-F238E27FC236}">
+                <a16:creationId xmlns:a16="http://schemas.microsoft.com/office/drawing/2014/main" id="{EA68E711-2CC9-4E7A-84BB-572404B9C3A5}"/>
               </a:ext>
             </a:extLst>
           </p:cNvPr>
@@ -19429,10 +19985,10 @@
       </p:sp>
       <p:sp>
         <p:nvSpPr>
-          <p:cNvPr id="7" name="Aqua.pull">
-            <a:extLst xmlns:a="http://schemas.openxmlformats.org/drawingml/2006/main">
-              <a:ext uri="{FF2B5EF4-FFF2-40B4-BE49-F238E27FC236}">
-                <a16:creationId xmlns:a16="http://schemas.microsoft.com/office/drawing/2014/main" id="{95D59232-87B0-40CE-898F-935D7B97BDD1}"/>
+          <p:cNvPr id="8" name="Aqua.pull">
+            <a:extLst xmlns:a="http://schemas.openxmlformats.org/drawingml/2006/main">
+              <a:ext uri="{FF2B5EF4-FFF2-40B4-BE49-F238E27FC236}">
+                <a16:creationId xmlns:a16="http://schemas.microsoft.com/office/drawing/2014/main" id="{29EBEC15-F8EE-4B79-8986-D68A362A5DAE}"/>
               </a:ext>
             </a:extLst>
           </p:cNvPr>
@@ -19490,10 +20046,10 @@
       </p:sp>
       <p:sp>
         <p:nvSpPr>
-          <p:cNvPr id="8" name="">
-            <a:extLst xmlns:a="http://schemas.openxmlformats.org/drawingml/2006/main">
-              <a:ext uri="{FF2B5EF4-FFF2-40B4-BE49-F238E27FC236}">
-                <a16:creationId xmlns:a16="http://schemas.microsoft.com/office/drawing/2014/main" id="{7F633AC8-363D-4E31-A0EF-AE6BE0B53C7F}"/>
+          <p:cNvPr id="9" name="">
+            <a:extLst xmlns:a="http://schemas.openxmlformats.org/drawingml/2006/main">
+              <a:ext uri="{FF2B5EF4-FFF2-40B4-BE49-F238E27FC236}">
+                <a16:creationId xmlns:a16="http://schemas.microsoft.com/office/drawing/2014/main" id="{17271535-E265-424C-A14E-1193EE5ED22D}"/>
               </a:ext>
             </a:extLst>
           </p:cNvPr>
@@ -19533,10 +20089,10 @@
       </p:sp>
       <p:sp>
         <p:nvSpPr>
-          <p:cNvPr id="9" name="Book">
-            <a:extLst xmlns:a="http://schemas.openxmlformats.org/drawingml/2006/main">
-              <a:ext uri="{FF2B5EF4-FFF2-40B4-BE49-F238E27FC236}">
-                <a16:creationId xmlns:a16="http://schemas.microsoft.com/office/drawing/2014/main" id="{F7A3042E-8628-4558-88D5-1C9F1F5368BE}"/>
+          <p:cNvPr id="10" name="Book">
+            <a:extLst xmlns:a="http://schemas.openxmlformats.org/drawingml/2006/main">
+              <a:ext uri="{FF2B5EF4-FFF2-40B4-BE49-F238E27FC236}">
+                <a16:creationId xmlns:a16="http://schemas.microsoft.com/office/drawing/2014/main" id="{86A88766-2BA8-436F-8C2F-BBEE88735D39}"/>
               </a:ext>
             </a:extLst>
           </p:cNvPr>
@@ -19590,10 +20146,10 @@
       </p:sp>
       <p:cxnSp>
         <p:nvCxnSpPr>
-          <p:cNvPr id="31" name=""/>
+          <p:cNvPr id="33" name=""/>
           <p:cNvCxnSpPr>
-            <a:stCxn xmlns:a="http://schemas.openxmlformats.org/drawingml/2006/main" id="6" idx="3"/>
-            <a:endCxn xmlns:a="http://schemas.openxmlformats.org/drawingml/2006/main" id="7" idx="1"/>
+            <a:stCxn xmlns:a="http://schemas.openxmlformats.org/drawingml/2006/main" id="7" idx="3"/>
+            <a:endCxn xmlns:a="http://schemas.openxmlformats.org/drawingml/2006/main" id="8" idx="1"/>
           </p:cNvCxnSpPr>
           <p:nvPr/>
         </p:nvCxnSpPr>
@@ -19616,10 +20172,10 @@
       </p:cxnSp>
       <p:cxnSp>
         <p:nvCxnSpPr>
-          <p:cNvPr id="32" name=""/>
+          <p:cNvPr id="34" name=""/>
           <p:cNvCxnSpPr>
-            <a:stCxn xmlns:a="http://schemas.openxmlformats.org/drawingml/2006/main" id="7" idx="3"/>
-            <a:endCxn xmlns:a="http://schemas.openxmlformats.org/drawingml/2006/main" id="8" idx="1"/>
+            <a:stCxn xmlns:a="http://schemas.openxmlformats.org/drawingml/2006/main" id="8" idx="3"/>
+            <a:endCxn xmlns:a="http://schemas.openxmlformats.org/drawingml/2006/main" id="9" idx="1"/>
           </p:cNvCxnSpPr>
           <p:nvPr/>
         </p:nvCxnSpPr>
@@ -19642,10 +20198,10 @@
       </p:cxnSp>
       <p:sp>
         <p:nvSpPr>
-          <p:cNvPr id="12" name="5 TSLA + 1,200 USDG">
-            <a:extLst xmlns:a="http://schemas.openxmlformats.org/drawingml/2006/main">
-              <a:ext uri="{FF2B5EF4-FFF2-40B4-BE49-F238E27FC236}">
-                <a16:creationId xmlns:a16="http://schemas.microsoft.com/office/drawing/2014/main" id="{E81ECA6C-93CC-4269-ACB7-22041CBCA799}"/>
+          <p:cNvPr id="13" name="5 AAPL + 1,200 USDG">
+            <a:extLst xmlns:a="http://schemas.openxmlformats.org/drawingml/2006/main">
+              <a:ext uri="{FF2B5EF4-FFF2-40B4-BE49-F238E27FC236}">
+                <a16:creationId xmlns:a16="http://schemas.microsoft.com/office/drawing/2014/main" id="{DD710626-58D2-4D73-A294-3FE561CB3567}"/>
               </a:ext>
             </a:extLst>
           </p:cNvPr>
@@ -19692,17 +20248,17 @@
                 <a:ea typeface="Arial"/>
                 <a:cs typeface="Arial"/>
               </a:rPr>
-              <a:t>5 TSLA + 1,200 USDG</a:t>
-            </a:r>
-          </a:p>
-        </p:txBody>
-      </p:sp>
-      <p:sp>
-        <p:nvSpPr>
-          <p:cNvPr id="13" name="Buyer">
-            <a:extLst xmlns:a="http://schemas.openxmlformats.org/drawingml/2006/main">
-              <a:ext uri="{FF2B5EF4-FFF2-40B4-BE49-F238E27FC236}">
-                <a16:creationId xmlns:a16="http://schemas.microsoft.com/office/drawing/2014/main" id="{C5FCE514-696F-490E-BF2B-D6EEA6F738AA}"/>
+              <a:t>5 AAPL + 1,200 USDG</a:t>
+            </a:r>
+          </a:p>
+        </p:txBody>
+      </p:sp>
+      <p:sp>
+        <p:nvSpPr>
+          <p:cNvPr id="14" name="Buyer">
+            <a:extLst xmlns:a="http://schemas.openxmlformats.org/drawingml/2006/main">
+              <a:ext uri="{FF2B5EF4-FFF2-40B4-BE49-F238E27FC236}">
+                <a16:creationId xmlns:a16="http://schemas.microsoft.com/office/drawing/2014/main" id="{B0436081-32CD-4467-93B1-6C3B0EF203C2}"/>
               </a:ext>
             </a:extLst>
           </p:cNvPr>
@@ -19760,10 +20316,10 @@
       </p:sp>
       <p:cxnSp>
         <p:nvCxnSpPr>
-          <p:cNvPr id="35" name=""/>
+          <p:cNvPr id="37" name=""/>
           <p:cNvCxnSpPr>
-            <a:stCxn xmlns:a="http://schemas.openxmlformats.org/drawingml/2006/main" id="13" idx="3"/>
-            <a:endCxn xmlns:a="http://schemas.openxmlformats.org/drawingml/2006/main" id="8" idx="2"/>
+            <a:stCxn xmlns:a="http://schemas.openxmlformats.org/drawingml/2006/main" id="14" idx="3"/>
+            <a:endCxn xmlns:a="http://schemas.openxmlformats.org/drawingml/2006/main" id="9" idx="2"/>
           </p:cNvCxnSpPr>
           <p:nvPr/>
         </p:nvCxnSpPr>
@@ -19786,10 +20342,10 @@
       </p:cxnSp>
       <p:sp>
         <p:nvSpPr>
-          <p:cNvPr id="15" name="64.0064 USDG premium">
-            <a:extLst xmlns:a="http://schemas.openxmlformats.org/drawingml/2006/main">
-              <a:ext uri="{FF2B5EF4-FFF2-40B4-BE49-F238E27FC236}">
-                <a16:creationId xmlns:a16="http://schemas.microsoft.com/office/drawing/2014/main" id="{7DEFFDC4-0728-43BD-B25E-08FF278BCE82}"/>
+          <p:cNvPr id="16" name="64.0064 USDG premium">
+            <a:extLst xmlns:a="http://schemas.openxmlformats.org/drawingml/2006/main">
+              <a:ext uri="{FF2B5EF4-FFF2-40B4-BE49-F238E27FC236}">
+                <a16:creationId xmlns:a16="http://schemas.microsoft.com/office/drawing/2014/main" id="{CEF2D1AE-3C44-4870-8253-7B4CBF30E273}"/>
               </a:ext>
             </a:extLst>
           </p:cNvPr>
@@ -19843,10 +20399,10 @@
       </p:sp>
       <p:sp>
         <p:nvSpPr>
-          <p:cNvPr id="16" name="5 call + 3 put longs">
-            <a:extLst xmlns:a="http://schemas.openxmlformats.org/drawingml/2006/main">
-              <a:ext uri="{FF2B5EF4-FFF2-40B4-BE49-F238E27FC236}">
-                <a16:creationId xmlns:a16="http://schemas.microsoft.com/office/drawing/2014/main" id="{A4C3AC84-6F69-4A66-8303-B66C2CC2A9D5}"/>
+          <p:cNvPr id="17" name="5 call + 3 put longs">
+            <a:extLst xmlns:a="http://schemas.openxmlformats.org/drawingml/2006/main">
+              <a:ext uri="{FF2B5EF4-FFF2-40B4-BE49-F238E27FC236}">
+                <a16:creationId xmlns:a16="http://schemas.microsoft.com/office/drawing/2014/main" id="{E609F632-8681-4F90-BA8D-B6BF1BB48846}"/>
               </a:ext>
             </a:extLst>
           </p:cNvPr>
@@ -19900,10 +20456,10 @@
       </p:sp>
       <p:sp>
         <p:nvSpPr>
-          <p:cNvPr id="17" name="5 TSLA">
-            <a:extLst xmlns:a="http://schemas.openxmlformats.org/drawingml/2006/main">
-              <a:ext uri="{FF2B5EF4-FFF2-40B4-BE49-F238E27FC236}">
-                <a16:creationId xmlns:a16="http://schemas.microsoft.com/office/drawing/2014/main" id="{579D7A24-52DA-4C81-8703-0A37C9631CA3}"/>
+          <p:cNvPr id="18" name="5 AAPL">
+            <a:extLst xmlns:a="http://schemas.openxmlformats.org/drawingml/2006/main">
+              <a:ext uri="{FF2B5EF4-FFF2-40B4-BE49-F238E27FC236}">
+                <a16:creationId xmlns:a16="http://schemas.microsoft.com/office/drawing/2014/main" id="{15289116-1A8C-4397-AF5D-4E35AEBEBB74}"/>
               </a:ext>
             </a:extLst>
           </p:cNvPr>
@@ -19950,17 +20506,17 @@
                 <a:ea typeface="Arial"/>
                 <a:cs typeface="Arial"/>
               </a:rPr>
-              <a:t>5 TSLA</a:t>
-            </a:r>
-          </a:p>
-        </p:txBody>
-      </p:sp>
-      <p:sp>
-        <p:nvSpPr>
-          <p:cNvPr id="18" name="1,264.0064 USDG">
-            <a:extLst xmlns:a="http://schemas.openxmlformats.org/drawingml/2006/main">
-              <a:ext uri="{FF2B5EF4-FFF2-40B4-BE49-F238E27FC236}">
-                <a16:creationId xmlns:a16="http://schemas.microsoft.com/office/drawing/2014/main" id="{A25AF71D-8C7B-497F-9D16-5B00D70AEE31}"/>
+              <a:t>5 AAPL</a:t>
+            </a:r>
+          </a:p>
+        </p:txBody>
+      </p:sp>
+      <p:sp>
+        <p:nvSpPr>
+          <p:cNvPr id="19" name="1,264.0064 USDG">
+            <a:extLst xmlns:a="http://schemas.openxmlformats.org/drawingml/2006/main">
+              <a:ext uri="{FF2B5EF4-FFF2-40B4-BE49-F238E27FC236}">
+                <a16:creationId xmlns:a16="http://schemas.microsoft.com/office/drawing/2014/main" id="{8E617813-049A-4FE5-903F-F88008C8BB9D}"/>
               </a:ext>
             </a:extLst>
           </p:cNvPr>
@@ -20014,10 +20570,10 @@
       </p:sp>
       <p:sp>
         <p:nvSpPr>
-          <p:cNvPr id="19" name="Remaining promises">
-            <a:extLst xmlns:a="http://schemas.openxmlformats.org/drawingml/2006/main">
-              <a:ext uri="{FF2B5EF4-FFF2-40B4-BE49-F238E27FC236}">
-                <a16:creationId xmlns:a16="http://schemas.microsoft.com/office/drawing/2014/main" id="{BCB05BCE-8152-490D-A4C5-4249A99F43E5}"/>
+          <p:cNvPr id="20" name="Remaining promises">
+            <a:extLst xmlns:a="http://schemas.openxmlformats.org/drawingml/2006/main">
+              <a:ext uri="{FF2B5EF4-FFF2-40B4-BE49-F238E27FC236}">
+                <a16:creationId xmlns:a16="http://schemas.microsoft.com/office/drawing/2014/main" id="{5A25062B-0A35-4C36-8E9D-6A54294EAFE8}"/>
               </a:ext>
             </a:extLst>
           </p:cNvPr>
@@ -20071,10 +20627,10 @@
       </p:sp>
       <p:sp>
         <p:nvSpPr>
-          <p:cNvPr id="20" name="5 TSLA">
-            <a:extLst xmlns:a="http://schemas.openxmlformats.org/drawingml/2006/main">
-              <a:ext uri="{FF2B5EF4-FFF2-40B4-BE49-F238E27FC236}">
-                <a16:creationId xmlns:a16="http://schemas.microsoft.com/office/drawing/2014/main" id="{ADBC7EF5-04D0-4EA1-83F3-A2ED5B55CF16}"/>
+          <p:cNvPr id="21" name="5 AAPL">
+            <a:extLst xmlns:a="http://schemas.openxmlformats.org/drawingml/2006/main">
+              <a:ext uri="{FF2B5EF4-FFF2-40B4-BE49-F238E27FC236}">
+                <a16:creationId xmlns:a16="http://schemas.microsoft.com/office/drawing/2014/main" id="{2E317561-0AAB-4B5E-84F1-A1C385B65502}"/>
               </a:ext>
             </a:extLst>
           </p:cNvPr>
@@ -20121,17 +20677,17 @@
                 <a:ea typeface="Arial"/>
                 <a:cs typeface="Arial"/>
               </a:rPr>
-              <a:t>5 TSLA</a:t>
-            </a:r>
-          </a:p>
-        </p:txBody>
-      </p:sp>
-      <p:sp>
-        <p:nvSpPr>
-          <p:cNvPr id="21" name="2,800 USDG">
-            <a:extLst xmlns:a="http://schemas.openxmlformats.org/drawingml/2006/main">
-              <a:ext uri="{FF2B5EF4-FFF2-40B4-BE49-F238E27FC236}">
-                <a16:creationId xmlns:a16="http://schemas.microsoft.com/office/drawing/2014/main" id="{66838940-2400-4627-A7A0-A9424FCE66AC}"/>
+              <a:t>5 AAPL</a:t>
+            </a:r>
+          </a:p>
+        </p:txBody>
+      </p:sp>
+      <p:sp>
+        <p:nvSpPr>
+          <p:cNvPr id="22" name="2,800 USDG">
+            <a:extLst xmlns:a="http://schemas.openxmlformats.org/drawingml/2006/main">
+              <a:ext uri="{FF2B5EF4-FFF2-40B4-BE49-F238E27FC236}">
+                <a16:creationId xmlns:a16="http://schemas.microsoft.com/office/drawing/2014/main" id="{BD4BA713-12EA-457A-B997-797B8ECB749F}"/>
               </a:ext>
             </a:extLst>
           </p:cNvPr>
@@ -20186,7 +20742,7 @@
     </p:spTree>
     <p:extLst>
       <p:ext uri="{BB962C8B-B14F-4D97-AF65-F5344CB8AC3E}">
-        <p14:creationId xmlns:p14="http://schemas.microsoft.com/office/powerpoint/2010/main" val="616966812"/>
+        <p14:creationId xmlns:p14="http://schemas.microsoft.com/office/powerpoint/2010/main" val="1673587602"/>
       </p:ext>
     </p:extLst>
   </p:cSld>
@@ -20217,7 +20773,7 @@
           <p:cNvPr id="20" name="What the hook records">
             <a:extLst xmlns:a="http://schemas.openxmlformats.org/drawingml/2006/main">
               <a:ext uri="{FF2B5EF4-FFF2-40B4-BE49-F238E27FC236}">
-                <a16:creationId xmlns:a16="http://schemas.microsoft.com/office/drawing/2014/main" id="{90310CF1-1CFB-4552-9ED6-DDE2F5622B2B}"/>
+                <a16:creationId xmlns:a16="http://schemas.microsoft.com/office/drawing/2014/main" id="{8F19E28B-F36C-4E58-9AD8-E83858BE89F7}"/>
               </a:ext>
             </a:extLst>
           </p:cNvPr>
@@ -20278,7 +20834,7 @@
           <p:nvPr/>
         </p:nvPicPr>
         <p:blipFill>
-          <a:blip xmlns:r="http://schemas.openxmlformats.org/officeDocument/2006/relationships" xmlns:a="http://schemas.openxmlformats.org/drawingml/2006/main" r:embed="R6961ead24cd24250"/>
+          <a:blip xmlns:r="http://schemas.openxmlformats.org/officeDocument/2006/relationships" xmlns:a="http://schemas.openxmlformats.org/drawingml/2006/main" r:embed="Rf52bd82d8e884afd"/>
           <a:stretch xmlns:a="http://schemas.openxmlformats.org/drawingml/2006/main"/>
         </p:blipFill>
         <p:spPr>
@@ -20296,7 +20852,7 @@
           <p:cNvPr id="3" name="Vexi Hakari">
             <a:extLst xmlns:a="http://schemas.openxmlformats.org/drawingml/2006/main">
               <a:ext uri="{FF2B5EF4-FFF2-40B4-BE49-F238E27FC236}">
-                <a16:creationId xmlns:a16="http://schemas.microsoft.com/office/drawing/2014/main" id="{8D6F38C9-71CD-4EB6-B3CE-C964BFCDC120}"/>
+                <a16:creationId xmlns:a16="http://schemas.microsoft.com/office/drawing/2014/main" id="{C27B43F6-6ED9-421E-9D98-FF65EB3C2415}"/>
               </a:ext>
             </a:extLst>
           </p:cNvPr>
@@ -20353,7 +20909,7 @@
           <p:cNvPr id="4" name="8">
             <a:extLst xmlns:a="http://schemas.openxmlformats.org/drawingml/2006/main">
               <a:ext uri="{FF2B5EF4-FFF2-40B4-BE49-F238E27FC236}">
-                <a16:creationId xmlns:a16="http://schemas.microsoft.com/office/drawing/2014/main" id="{44BB2F95-EDAB-401C-9236-F55129578670}"/>
+                <a16:creationId xmlns:a16="http://schemas.microsoft.com/office/drawing/2014/main" id="{7C41F00F-95AE-471A-8E3C-81893994CAF1}"/>
               </a:ext>
             </a:extLst>
           </p:cNvPr>
@@ -20410,7 +20966,7 @@
           <p:cNvPr id="5" name="Before first swap of the second">
             <a:extLst xmlns:a="http://schemas.openxmlformats.org/drawingml/2006/main">
               <a:ext uri="{FF2B5EF4-FFF2-40B4-BE49-F238E27FC236}">
-                <a16:creationId xmlns:a16="http://schemas.microsoft.com/office/drawing/2014/main" id="{FC086E0A-D077-48AB-BC55-CC51D2B1A0C8}"/>
+                <a16:creationId xmlns:a16="http://schemas.microsoft.com/office/drawing/2014/main" id="{5637CDC5-9F1E-4071-87AE-C2FD5323DF46}"/>
               </a:ext>
             </a:extLst>
           </p:cNvPr>
@@ -20467,7 +21023,7 @@
           <p:cNvPr id="6" name="Record">
             <a:extLst xmlns:a="http://schemas.openxmlformats.org/drawingml/2006/main">
               <a:ext uri="{FF2B5EF4-FFF2-40B4-BE49-F238E27FC236}">
-                <a16:creationId xmlns:a16="http://schemas.microsoft.com/office/drawing/2014/main" id="{5383A838-B462-4AF6-9D86-EDC71D2B0D86}"/>
+                <a16:creationId xmlns:a16="http://schemas.microsoft.com/office/drawing/2014/main" id="{7EB36D38-C7E7-4500-A91E-3CE3D7462E09}"/>
               </a:ext>
             </a:extLst>
           </p:cNvPr>
@@ -20528,7 +21084,7 @@
           <p:cNvPr id="7" name="Push">
             <a:extLst xmlns:a="http://schemas.openxmlformats.org/drawingml/2006/main">
               <a:ext uri="{FF2B5EF4-FFF2-40B4-BE49-F238E27FC236}">
-                <a16:creationId xmlns:a16="http://schemas.microsoft.com/office/drawing/2014/main" id="{B5563403-D109-48AD-BD14-9D942EBA6F3C}"/>
+                <a16:creationId xmlns:a16="http://schemas.microsoft.com/office/drawing/2014/main" id="{53EAAB60-2826-4CAD-99FF-9C84B306E70F}"/>
               </a:ext>
             </a:extLst>
           </p:cNvPr>
@@ -20589,7 +21145,7 @@
           <p:cNvPr id="8" name="Undo">
             <a:extLst xmlns:a="http://schemas.openxmlformats.org/drawingml/2006/main">
               <a:ext uri="{FF2B5EF4-FFF2-40B4-BE49-F238E27FC236}">
-                <a16:creationId xmlns:a16="http://schemas.microsoft.com/office/drawing/2014/main" id="{5D194E1F-6F40-4014-BBBE-86524742D22F}"/>
+                <a16:creationId xmlns:a16="http://schemas.microsoft.com/office/drawing/2014/main" id="{9C90F27F-8F48-48E3-9201-D458737E1DDD}"/>
               </a:ext>
             </a:extLst>
           </p:cNvPr>
@@ -20650,7 +21206,7 @@
           <p:cNvPr id="9" name="Next record">
             <a:extLst xmlns:a="http://schemas.openxmlformats.org/drawingml/2006/main">
               <a:ext uri="{FF2B5EF4-FFF2-40B4-BE49-F238E27FC236}">
-                <a16:creationId xmlns:a16="http://schemas.microsoft.com/office/drawing/2014/main" id="{ECF7C483-2131-4259-9420-8EA2E091B51F}"/>
+                <a16:creationId xmlns:a16="http://schemas.microsoft.com/office/drawing/2014/main" id="{0A73AA12-76EB-4878-AB9C-ECFA9D482723}"/>
               </a:ext>
             </a:extLst>
           </p:cNvPr>
@@ -20789,7 +21345,7 @@
           <p:cNvPr id="13" name="Push + undo in one transaction">
             <a:extLst xmlns:a="http://schemas.openxmlformats.org/drawingml/2006/main">
               <a:ext uri="{FF2B5EF4-FFF2-40B4-BE49-F238E27FC236}">
-                <a16:creationId xmlns:a16="http://schemas.microsoft.com/office/drawing/2014/main" id="{661F193C-557A-4B84-BB93-EA3055266C09}"/>
+                <a16:creationId xmlns:a16="http://schemas.microsoft.com/office/drawing/2014/main" id="{FAA723A2-8BF4-4953-B516-0D3D5FC5AD9E}"/>
               </a:ext>
             </a:extLst>
           </p:cNvPr>
@@ -20846,7 +21402,7 @@
           <p:cNvPr id="14" name="">
             <a:extLst xmlns:a="http://schemas.openxmlformats.org/drawingml/2006/main">
               <a:ext uri="{FF2B5EF4-FFF2-40B4-BE49-F238E27FC236}">
-                <a16:creationId xmlns:a16="http://schemas.microsoft.com/office/drawing/2014/main" id="{EA27BF0C-CA47-42F1-AD20-52D6CF714F75}"/>
+                <a16:creationId xmlns:a16="http://schemas.microsoft.com/office/drawing/2014/main" id="{858EB8B0-6F7F-469C-8E12-87F043A3533D}"/>
               </a:ext>
             </a:extLst>
           </p:cNvPr>
@@ -20876,7 +21432,7 @@
           <p:cNvPr id="15" name="Raw tick TWAP">
             <a:extLst xmlns:a="http://schemas.openxmlformats.org/drawingml/2006/main">
               <a:ext uri="{FF2B5EF4-FFF2-40B4-BE49-F238E27FC236}">
-                <a16:creationId xmlns:a16="http://schemas.microsoft.com/office/drawing/2014/main" id="{E1ECD765-518E-42EE-8CC2-F614CFBD6960}"/>
+                <a16:creationId xmlns:a16="http://schemas.microsoft.com/office/drawing/2014/main" id="{B2990D1B-4437-47E5-800C-92329105C86D}"/>
               </a:ext>
             </a:extLst>
           </p:cNvPr>
@@ -20933,7 +21489,7 @@
           <p:cNvPr id="16" name="Truncated tick TWAP">
             <a:extLst xmlns:a="http://schemas.openxmlformats.org/drawingml/2006/main">
               <a:ext uri="{FF2B5EF4-FFF2-40B4-BE49-F238E27FC236}">
-                <a16:creationId xmlns:a16="http://schemas.microsoft.com/office/drawing/2014/main" id="{9818641E-6FAC-4250-A054-16A6DD2A1570}"/>
+                <a16:creationId xmlns:a16="http://schemas.microsoft.com/office/drawing/2014/main" id="{BAAEBB70-456E-4718-AC3C-C6F096A36FF0}"/>
               </a:ext>
             </a:extLst>
           </p:cNvPr>
@@ -20990,7 +21546,7 @@
           <p:cNvPr id="17" name="1-hour center">
             <a:extLst xmlns:a="http://schemas.openxmlformats.org/drawingml/2006/main">
               <a:ext uri="{FF2B5EF4-FFF2-40B4-BE49-F238E27FC236}">
-                <a16:creationId xmlns:a16="http://schemas.microsoft.com/office/drawing/2014/main" id="{92E1FA6C-C392-4A7D-A734-FBBF764E63E8}"/>
+                <a16:creationId xmlns:a16="http://schemas.microsoft.com/office/drawing/2014/main" id="{22CCDF99-2309-4426-B7AE-DDE0A061C5F2}"/>
               </a:ext>
             </a:extLst>
           </p:cNvPr>
@@ -21047,7 +21603,7 @@
           <p:cNvPr id="18" name="≤250 ticks per record">
             <a:extLst xmlns:a="http://schemas.openxmlformats.org/drawingml/2006/main">
               <a:ext uri="{FF2B5EF4-FFF2-40B4-BE49-F238E27FC236}">
-                <a16:creationId xmlns:a16="http://schemas.microsoft.com/office/drawing/2014/main" id="{F91F1B0E-05C8-4F9F-9EF8-2D970F4E1CF8}"/>
+                <a16:creationId xmlns:a16="http://schemas.microsoft.com/office/drawing/2014/main" id="{BF23C056-6BA1-48D2-8FFC-E59FBDEBA5B0}"/>
               </a:ext>
             </a:extLst>
           </p:cNvPr>
@@ -21104,7 +21660,7 @@
           <p:cNvPr id="19" name="OpenZeppelin / Panoptic oracle. Sustained moves can become t">
             <a:extLst xmlns:a="http://schemas.openxmlformats.org/drawingml/2006/main">
               <a:ext uri="{FF2B5EF4-FFF2-40B4-BE49-F238E27FC236}">
-                <a16:creationId xmlns:a16="http://schemas.microsoft.com/office/drawing/2014/main" id="{8FB41A8E-CFC1-443A-A4B3-9354F9DF7B8D}"/>
+                <a16:creationId xmlns:a16="http://schemas.microsoft.com/office/drawing/2014/main" id="{46ED71B6-C049-475B-91BA-0B34840AD553}"/>
               </a:ext>
             </a:extLst>
           </p:cNvPr>
@@ -21159,7 +21715,7 @@
     </p:spTree>
     <p:extLst>
       <p:ext uri="{BB962C8B-B14F-4D97-AF65-F5344CB8AC3E}">
-        <p14:creationId xmlns:p14="http://schemas.microsoft.com/office/powerpoint/2010/main" val="2053522296"/>
+        <p14:creationId xmlns:p14="http://schemas.microsoft.com/office/powerpoint/2010/main" val="1675543057"/>
       </p:ext>
     </p:extLst>
   </p:cSld>
@@ -21187,10 +21743,10 @@
       </p:grpSpPr>
       <p:sp>
         <p:nvSpPr>
-          <p:cNvPr id="19" name="The reference defines a fixed band">
-            <a:extLst xmlns:a="http://schemas.openxmlformats.org/drawingml/2006/main">
-              <a:ext uri="{FF2B5EF4-FFF2-40B4-BE49-F238E27FC236}">
-                <a16:creationId xmlns:a16="http://schemas.microsoft.com/office/drawing/2014/main" id="{60F5009E-4478-421F-9BE4-380D9B9B6D37}"/>
+          <p:cNvPr id="20" name="The reference defines a fixed band">
+            <a:extLst xmlns:a="http://schemas.openxmlformats.org/drawingml/2006/main">
+              <a:ext uri="{FF2B5EF4-FFF2-40B4-BE49-F238E27FC236}">
+                <a16:creationId xmlns:a16="http://schemas.microsoft.com/office/drawing/2014/main" id="{6EA2682B-791D-4C0C-A183-0ADA89FDD3E5}"/>
               </a:ext>
             </a:extLst>
           </p:cNvPr>
@@ -21244,14 +21800,14 @@
       </p:sp>
       <p:pic>
         <p:nvPicPr>
-          <p:cNvPr id="20" name=""/>
+          <p:cNvPr id="21" name=""/>
           <p:cNvPicPr>
             <a:picLocks xmlns:a="http://schemas.openxmlformats.org/drawingml/2006/main" noChangeAspect="1"/>
           </p:cNvPicPr>
           <p:nvPr/>
         </p:nvPicPr>
         <p:blipFill>
-          <a:blip xmlns:r="http://schemas.openxmlformats.org/officeDocument/2006/relationships" xmlns:a="http://schemas.openxmlformats.org/drawingml/2006/main" r:embed="Ra2659189b1d14dd7"/>
+          <a:blip xmlns:r="http://schemas.openxmlformats.org/officeDocument/2006/relationships" xmlns:a="http://schemas.openxmlformats.org/drawingml/2006/main" r:embed="R5dc8181213244a1a"/>
           <a:stretch xmlns:a="http://schemas.openxmlformats.org/drawingml/2006/main"/>
         </p:blipFill>
         <p:spPr>
@@ -21269,7 +21825,7 @@
           <p:cNvPr id="3" name="Vexi Hakari">
             <a:extLst xmlns:a="http://schemas.openxmlformats.org/drawingml/2006/main">
               <a:ext uri="{FF2B5EF4-FFF2-40B4-BE49-F238E27FC236}">
-                <a16:creationId xmlns:a16="http://schemas.microsoft.com/office/drawing/2014/main" id="{4158157D-576D-4C74-AE2F-C115E4E1AAAA}"/>
+                <a16:creationId xmlns:a16="http://schemas.microsoft.com/office/drawing/2014/main" id="{360D0BC7-87B8-40C2-9C92-66D7B7121434}"/>
               </a:ext>
             </a:extLst>
           </p:cNvPr>
@@ -21323,22 +21879,22 @@
       </p:sp>
       <p:sp>
         <p:nvSpPr>
-          <p:cNvPr id="4" name="9">
-            <a:extLst xmlns:a="http://schemas.openxmlformats.org/drawingml/2006/main">
-              <a:ext uri="{FF2B5EF4-FFF2-40B4-BE49-F238E27FC236}">
-                <a16:creationId xmlns:a16="http://schemas.microsoft.com/office/drawing/2014/main" id="{3114CA53-E7FD-4780-BA4D-D18E80038821}"/>
-              </a:ext>
-            </a:extLst>
-          </p:cNvPr>
-          <p:cNvSpPr>
-            <a:spLocks xmlns:a="http://schemas.openxmlformats.org/drawingml/2006/main" noGrp="1"/>
-          </p:cNvSpPr>
-          <p:nvPr/>
-        </p:nvSpPr>
-        <p:spPr>
-          <a:xfrm xmlns:a="http://schemas.openxmlformats.org/drawingml/2006/main">
-            <a:off x="11001375" y="6153150"/>
-            <a:ext cx="619125" cy="342900"/>
+          <p:cNvPr id="4" name="AAPL example / illustrative amounts">
+            <a:extLst xmlns:a="http://schemas.openxmlformats.org/drawingml/2006/main">
+              <a:ext uri="{FF2B5EF4-FFF2-40B4-BE49-F238E27FC236}">
+                <a16:creationId xmlns:a16="http://schemas.microsoft.com/office/drawing/2014/main" id="{2A32AA4D-1F0B-43AF-949D-13D2C804AF40}"/>
+              </a:ext>
+            </a:extLst>
+          </p:cNvPr>
+          <p:cNvSpPr>
+            <a:spLocks xmlns:a="http://schemas.openxmlformats.org/drawingml/2006/main" noGrp="1"/>
+          </p:cNvSpPr>
+          <p:nvPr/>
+        </p:nvSpPr>
+        <p:spPr>
+          <a:xfrm xmlns:a="http://schemas.openxmlformats.org/drawingml/2006/main">
+            <a:off x="3905250" y="6153150"/>
+            <a:ext cx="6667500" cy="342900"/>
           </a:xfrm>
           <a:prstGeom xmlns:a="http://schemas.openxmlformats.org/drawingml/2006/main" prst="rect">
             <a:avLst/>
@@ -21354,6 +21910,63 @@
           </a:bodyPr>
           <a:lstStyle xmlns:a="http://schemas.openxmlformats.org/drawingml/2006/main"/>
           <a:p xmlns:a="http://schemas.openxmlformats.org/drawingml/2006/main">
+            <a:pPr algn="l">
+              <a:defRPr sz="1275" b="0">
+                <a:solidFill>
+                  <a:srgbClr val="A8A8B2"/>
+                </a:solidFill>
+                <a:latin typeface="Arial"/>
+                <a:ea typeface="Arial"/>
+                <a:cs typeface="Arial"/>
+              </a:defRPr>
+            </a:pPr>
+            <a:r>
+              <a:rPr sz="1275" b="0">
+                <a:solidFill>
+                  <a:srgbClr val="A8A8B2"/>
+                </a:solidFill>
+                <a:latin typeface="Arial"/>
+                <a:ea typeface="Arial"/>
+                <a:cs typeface="Arial"/>
+              </a:rPr>
+              <a:t>AAPL example / illustrative amounts</a:t>
+            </a:r>
+          </a:p>
+        </p:txBody>
+      </p:sp>
+      <p:sp>
+        <p:nvSpPr>
+          <p:cNvPr id="5" name="9">
+            <a:extLst xmlns:a="http://schemas.openxmlformats.org/drawingml/2006/main">
+              <a:ext uri="{FF2B5EF4-FFF2-40B4-BE49-F238E27FC236}">
+                <a16:creationId xmlns:a16="http://schemas.microsoft.com/office/drawing/2014/main" id="{D9F5F7BC-8D41-4692-85A6-750E1F66E0AB}"/>
+              </a:ext>
+            </a:extLst>
+          </p:cNvPr>
+          <p:cNvSpPr>
+            <a:spLocks xmlns:a="http://schemas.openxmlformats.org/drawingml/2006/main" noGrp="1"/>
+          </p:cNvSpPr>
+          <p:nvPr/>
+        </p:nvSpPr>
+        <p:spPr>
+          <a:xfrm xmlns:a="http://schemas.openxmlformats.org/drawingml/2006/main">
+            <a:off x="11001375" y="6153150"/>
+            <a:ext cx="619125" cy="342900"/>
+          </a:xfrm>
+          <a:prstGeom xmlns:a="http://schemas.openxmlformats.org/drawingml/2006/main" prst="rect">
+            <a:avLst/>
+          </a:prstGeom>
+          <a:noFill xmlns:a="http://schemas.openxmlformats.org/drawingml/2006/main"/>
+          <a:ln xmlns:a="http://schemas.openxmlformats.org/drawingml/2006/main" w="0">
+            <a:noFill/>
+          </a:ln>
+        </p:spPr>
+        <p:txBody>
+          <a:bodyPr xmlns:a="http://schemas.openxmlformats.org/drawingml/2006/main" wrap="none" lIns="0" tIns="0" rIns="0" bIns="0" anchor="ctr">
+            <a:noAutofit/>
+          </a:bodyPr>
+          <a:lstStyle xmlns:a="http://schemas.openxmlformats.org/drawingml/2006/main"/>
+          <a:p xmlns:a="http://schemas.openxmlformats.org/drawingml/2006/main">
             <a:pPr algn="r">
               <a:defRPr sz="1275" b="0">
                 <a:solidFill>
@@ -21380,7 +21993,7 @@
       </p:sp>
       <p:graphicFrame>
         <p:nvGraphicFramePr>
-          <p:cNvPr id="23" name="Chart"/>
+          <p:cNvPr id="25" name="Chart"/>
           <p:cNvGraphicFramePr/>
           <p:nvPr/>
         </p:nvGraphicFramePr>
@@ -21390,16 +22003,16 @@
         </p:xfrm>
         <a:graphic xmlns:a="http://schemas.openxmlformats.org/drawingml/2006/main">
           <a:graphicData uri="http://schemas.openxmlformats.org/drawingml/2006/chart">
-            <c:chart xmlns:r="http://schemas.openxmlformats.org/officeDocument/2006/relationships" xmlns:c="http://schemas.openxmlformats.org/drawingml/2006/chart" r:id="R80f5962e1e3341bb"/>
+            <c:chart xmlns:r="http://schemas.openxmlformats.org/officeDocument/2006/relationships" xmlns:c="http://schemas.openxmlformats.org/drawingml/2006/chart" r:id="Rc926f00a86fc4514"/>
           </a:graphicData>
         </a:graphic>
       </p:graphicFrame>
       <p:sp>
         <p:nvSpPr>
-          <p:cNvPr id="6" name="USDG">
-            <a:extLst xmlns:a="http://schemas.openxmlformats.org/drawingml/2006/main">
-              <a:ext uri="{FF2B5EF4-FFF2-40B4-BE49-F238E27FC236}">
-                <a16:creationId xmlns:a16="http://schemas.microsoft.com/office/drawing/2014/main" id="{1F517B43-ACD9-4D63-B995-6758AEE8E376}"/>
+          <p:cNvPr id="7" name="USDG">
+            <a:extLst xmlns:a="http://schemas.openxmlformats.org/drawingml/2006/main">
+              <a:ext uri="{FF2B5EF4-FFF2-40B4-BE49-F238E27FC236}">
+                <a16:creationId xmlns:a16="http://schemas.microsoft.com/office/drawing/2014/main" id="{B51FB3E0-C83C-4864-AB4D-2FD0C134F2AD}"/>
               </a:ext>
             </a:extLst>
           </p:cNvPr>
@@ -21453,10 +22066,10 @@
       </p:sp>
       <p:sp>
         <p:nvSpPr>
-          <p:cNvPr id="7" name="━">
-            <a:extLst xmlns:a="http://schemas.openxmlformats.org/drawingml/2006/main">
-              <a:ext uri="{FF2B5EF4-FFF2-40B4-BE49-F238E27FC236}">
-                <a16:creationId xmlns:a16="http://schemas.microsoft.com/office/drawing/2014/main" id="{A3237A7C-3B9B-4094-B4DD-E2B3B2808A62}"/>
+          <p:cNvPr id="8" name="━">
+            <a:extLst xmlns:a="http://schemas.openxmlformats.org/drawingml/2006/main">
+              <a:ext uri="{FF2B5EF4-FFF2-40B4-BE49-F238E27FC236}">
+                <a16:creationId xmlns:a16="http://schemas.microsoft.com/office/drawing/2014/main" id="{F78CB2D7-C05C-4269-9CE6-2129D07114CB}"/>
               </a:ext>
             </a:extLst>
           </p:cNvPr>
@@ -21510,10 +22123,10 @@
       </p:sp>
       <p:sp>
         <p:nvSpPr>
-          <p:cNvPr id="8" name="Reference">
-            <a:extLst xmlns:a="http://schemas.openxmlformats.org/drawingml/2006/main">
-              <a:ext uri="{FF2B5EF4-FFF2-40B4-BE49-F238E27FC236}">
-                <a16:creationId xmlns:a16="http://schemas.microsoft.com/office/drawing/2014/main" id="{5523F525-73ED-41E4-8147-CD65513FE849}"/>
+          <p:cNvPr id="9" name="Reference">
+            <a:extLst xmlns:a="http://schemas.openxmlformats.org/drawingml/2006/main">
+              <a:ext uri="{FF2B5EF4-FFF2-40B4-BE49-F238E27FC236}">
+                <a16:creationId xmlns:a16="http://schemas.microsoft.com/office/drawing/2014/main" id="{599FFFC0-5C70-4916-9C27-5629E62EF55E}"/>
               </a:ext>
             </a:extLst>
           </p:cNvPr>
@@ -21567,10 +22180,10 @@
       </p:sp>
       <p:sp>
         <p:nvSpPr>
-          <p:cNvPr id="9" name="━">
-            <a:extLst xmlns:a="http://schemas.openxmlformats.org/drawingml/2006/main">
-              <a:ext uri="{FF2B5EF4-FFF2-40B4-BE49-F238E27FC236}">
-                <a16:creationId xmlns:a16="http://schemas.microsoft.com/office/drawing/2014/main" id="{BB862077-568F-4937-A6D1-19CE6DD60139}"/>
+          <p:cNvPr id="10" name="━">
+            <a:extLst xmlns:a="http://schemas.openxmlformats.org/drawingml/2006/main">
+              <a:ext uri="{FF2B5EF4-FFF2-40B4-BE49-F238E27FC236}">
+                <a16:creationId xmlns:a16="http://schemas.microsoft.com/office/drawing/2014/main" id="{DECF3900-E00E-4CDD-9141-D1CFDBBBDBDA}"/>
               </a:ext>
             </a:extLst>
           </p:cNvPr>
@@ -21624,10 +22237,10 @@
       </p:sp>
       <p:sp>
         <p:nvSpPr>
-          <p:cNvPr id="10" name="TWAP">
-            <a:extLst xmlns:a="http://schemas.openxmlformats.org/drawingml/2006/main">
-              <a:ext uri="{FF2B5EF4-FFF2-40B4-BE49-F238E27FC236}">
-                <a16:creationId xmlns:a16="http://schemas.microsoft.com/office/drawing/2014/main" id="{97A2F9C4-FD29-4CFC-B07E-B8E89F807C0A}"/>
+          <p:cNvPr id="11" name="TWAP">
+            <a:extLst xmlns:a="http://schemas.openxmlformats.org/drawingml/2006/main">
+              <a:ext uri="{FF2B5EF4-FFF2-40B4-BE49-F238E27FC236}">
+                <a16:creationId xmlns:a16="http://schemas.microsoft.com/office/drawing/2014/main" id="{7D5847E5-4642-46BE-BE62-07AD7455EDE3}"/>
               </a:ext>
             </a:extLst>
           </p:cNvPr>
@@ -21681,10 +22294,10 @@
       </p:sp>
       <p:sp>
         <p:nvSpPr>
-          <p:cNvPr id="11" name="━">
-            <a:extLst xmlns:a="http://schemas.openxmlformats.org/drawingml/2006/main">
-              <a:ext uri="{FF2B5EF4-FFF2-40B4-BE49-F238E27FC236}">
-                <a16:creationId xmlns:a16="http://schemas.microsoft.com/office/drawing/2014/main" id="{AE36880D-A529-48F7-92CE-5065A1E1CB4B}"/>
+          <p:cNvPr id="12" name="━">
+            <a:extLst xmlns:a="http://schemas.openxmlformats.org/drawingml/2006/main">
+              <a:ext uri="{FF2B5EF4-FFF2-40B4-BE49-F238E27FC236}">
+                <a16:creationId xmlns:a16="http://schemas.microsoft.com/office/drawing/2014/main" id="{464AB0C8-ABED-4639-BE37-52271B4CB325}"/>
               </a:ext>
             </a:extLst>
           </p:cNvPr>
@@ -21738,10 +22351,10 @@
       </p:sp>
       <p:sp>
         <p:nvSpPr>
-          <p:cNvPr id="12" name="±5%">
-            <a:extLst xmlns:a="http://schemas.openxmlformats.org/drawingml/2006/main">
-              <a:ext uri="{FF2B5EF4-FFF2-40B4-BE49-F238E27FC236}">
-                <a16:creationId xmlns:a16="http://schemas.microsoft.com/office/drawing/2014/main" id="{00833CDB-3C75-4D16-ADA8-9E64AD48B29B}"/>
+          <p:cNvPr id="13" name="±5%">
+            <a:extLst xmlns:a="http://schemas.openxmlformats.org/drawingml/2006/main">
+              <a:ext uri="{FF2B5EF4-FFF2-40B4-BE49-F238E27FC236}">
+                <a16:creationId xmlns:a16="http://schemas.microsoft.com/office/drawing/2014/main" id="{7884C0BE-08F9-4E5A-8883-5A8C27EE394E}"/>
               </a:ext>
             </a:extLst>
           </p:cNvPr>
@@ -21795,10 +22408,10 @@
       </p:sp>
       <p:sp>
         <p:nvSpPr>
-          <p:cNvPr id="13" name="+5.1%">
-            <a:extLst xmlns:a="http://schemas.openxmlformats.org/drawingml/2006/main">
-              <a:ext uri="{FF2B5EF4-FFF2-40B4-BE49-F238E27FC236}">
-                <a16:creationId xmlns:a16="http://schemas.microsoft.com/office/drawing/2014/main" id="{80B1A3FD-6D54-48EE-B359-70E6B70F555B}"/>
+          <p:cNvPr id="14" name="+5.1%">
+            <a:extLst xmlns:a="http://schemas.openxmlformats.org/drawingml/2006/main">
+              <a:ext uri="{FF2B5EF4-FFF2-40B4-BE49-F238E27FC236}">
+                <a16:creationId xmlns:a16="http://schemas.microsoft.com/office/drawing/2014/main" id="{D41510CB-5EAF-45F2-941C-13307A5C9F91}"/>
               </a:ext>
             </a:extLst>
           </p:cNvPr>
@@ -21852,10 +22465,10 @@
       </p:sp>
       <p:sp>
         <p:nvSpPr>
-          <p:cNvPr id="14" name="Buy refused">
-            <a:extLst xmlns:a="http://schemas.openxmlformats.org/drawingml/2006/main">
-              <a:ext uri="{FF2B5EF4-FFF2-40B4-BE49-F238E27FC236}">
-                <a16:creationId xmlns:a16="http://schemas.microsoft.com/office/drawing/2014/main" id="{3E065811-9844-4957-89FB-C7BA7B4BC5F3}"/>
+          <p:cNvPr id="15" name="Buy refused">
+            <a:extLst xmlns:a="http://schemas.openxmlformats.org/drawingml/2006/main">
+              <a:ext uri="{FF2B5EF4-FFF2-40B4-BE49-F238E27FC236}">
+                <a16:creationId xmlns:a16="http://schemas.microsoft.com/office/drawing/2014/main" id="{3327269F-8432-4EC3-974C-32707BA25C05}"/>
               </a:ext>
             </a:extLst>
           </p:cNvPr>
@@ -21909,10 +22522,10 @@
       </p:sp>
       <p:sp>
         <p:nvSpPr>
-          <p:cNvPr id="15" name="Also checked">
-            <a:extLst xmlns:a="http://schemas.openxmlformats.org/drawingml/2006/main">
-              <a:ext uri="{FF2B5EF4-FFF2-40B4-BE49-F238E27FC236}">
-                <a16:creationId xmlns:a16="http://schemas.microsoft.com/office/drawing/2014/main" id="{46264486-6AB7-467E-A8B2-88F8ED262EE8}"/>
+          <p:cNvPr id="16" name="Also checked">
+            <a:extLst xmlns:a="http://schemas.openxmlformats.org/drawingml/2006/main">
+              <a:ext uri="{FF2B5EF4-FFF2-40B4-BE49-F238E27FC236}">
+                <a16:creationId xmlns:a16="http://schemas.microsoft.com/office/drawing/2014/main" id="{87792E26-69D5-4017-8C4F-4D5894AFEA26}"/>
               </a:ext>
             </a:extLst>
           </p:cNvPr>
@@ -21966,10 +22579,10 @@
       </p:sp>
       <p:sp>
         <p:nvSpPr>
-          <p:cNvPr id="16" name="History / liquidity">
-            <a:extLst xmlns:a="http://schemas.openxmlformats.org/drawingml/2006/main">
-              <a:ext uri="{FF2B5EF4-FFF2-40B4-BE49-F238E27FC236}">
-                <a16:creationId xmlns:a16="http://schemas.microsoft.com/office/drawing/2014/main" id="{CADF25D8-1FC5-420F-B946-58004B564F39}"/>
+          <p:cNvPr id="17" name="History / liquidity">
+            <a:extLst xmlns:a="http://schemas.openxmlformats.org/drawingml/2006/main">
+              <a:ext uri="{FF2B5EF4-FFF2-40B4-BE49-F238E27FC236}">
+                <a16:creationId xmlns:a16="http://schemas.microsoft.com/office/drawing/2014/main" id="{DFACB480-B2F9-4331-B06A-55D2B766A4FF}"/>
               </a:ext>
             </a:extLst>
           </p:cNvPr>
@@ -22023,10 +22636,10 @@
       </p:sp>
       <p:sp>
         <p:nvSpPr>
-          <p:cNvPr id="17" name="Raw / truncated">
-            <a:extLst xmlns:a="http://schemas.openxmlformats.org/drawingml/2006/main">
-              <a:ext uri="{FF2B5EF4-FFF2-40B4-BE49-F238E27FC236}">
-                <a16:creationId xmlns:a16="http://schemas.microsoft.com/office/drawing/2014/main" id="{628258AD-C9C7-4EA4-9459-1C324C72A0AF}"/>
+          <p:cNvPr id="18" name="Raw / truncated">
+            <a:extLst xmlns:a="http://schemas.openxmlformats.org/drawingml/2006/main">
+              <a:ext uri="{FF2B5EF4-FFF2-40B4-BE49-F238E27FC236}">
+                <a16:creationId xmlns:a16="http://schemas.microsoft.com/office/drawing/2014/main" id="{1B29A09D-A97E-4106-9279-7C77C61C030C}"/>
               </a:ext>
             </a:extLst>
           </p:cNvPr>
@@ -22080,10 +22693,10 @@
       </p:sp>
       <p:sp>
         <p:nvSpPr>
-          <p:cNvPr id="18" name="Recorded local-fork snapshots. Fixed band width, rolling cen">
-            <a:extLst xmlns:a="http://schemas.openxmlformats.org/drawingml/2006/main">
-              <a:ext uri="{FF2B5EF4-FFF2-40B4-BE49-F238E27FC236}">
-                <a16:creationId xmlns:a16="http://schemas.microsoft.com/office/drawing/2014/main" id="{CF7645E8-9D46-460C-9FBA-0CCBC50D0303}"/>
+          <p:cNvPr id="19" name="AAPL illustration adapted from the fork. Fixed width, rollin">
+            <a:extLst xmlns:a="http://schemas.openxmlformats.org/drawingml/2006/main">
+              <a:ext uri="{FF2B5EF4-FFF2-40B4-BE49-F238E27FC236}">
+                <a16:creationId xmlns:a16="http://schemas.microsoft.com/office/drawing/2014/main" id="{FDDE9F9F-8ACD-4FD1-B120-B06159610DB5}"/>
               </a:ext>
             </a:extLst>
           </p:cNvPr>
@@ -22130,7 +22743,7 @@
                 <a:ea typeface="Arial"/>
                 <a:cs typeface="Arial"/>
               </a:rPr>
-              <a:t>Recorded local-fork snapshots. Fixed band width, rolling center.</a:t>
+              <a:t>AAPL illustration adapted from the fork. Fixed width, rolling center.</a:t>
             </a:r>
           </a:p>
         </p:txBody>
@@ -22138,7 +22751,7 @@
     </p:spTree>
     <p:extLst>
       <p:ext uri="{BB962C8B-B14F-4D97-AF65-F5344CB8AC3E}">
-        <p14:creationId xmlns:p14="http://schemas.microsoft.com/office/powerpoint/2010/main" val="669410546"/>
+        <p14:creationId xmlns:p14="http://schemas.microsoft.com/office/powerpoint/2010/main" val="545523520"/>
       </p:ext>
     </p:extLst>
   </p:cSld>
